--- a/pres-bigdata/1.1-comparison-NoSql-DB-vs-standard-DB.pptx
+++ b/pres-bigdata/1.1-comparison-NoSql-DB-vs-standard-DB.pptx
@@ -16,6 +16,30 @@
     <p:sldId id="264" r:id="rId10"/>
     <p:sldId id="265" r:id="rId11"/>
     <p:sldId id="266" r:id="rId12"/>
+    <p:sldId id="268" r:id="rId13"/>
+    <p:sldId id="269" r:id="rId14"/>
+    <p:sldId id="272" r:id="rId15"/>
+    <p:sldId id="275" r:id="rId16"/>
+    <p:sldId id="273" r:id="rId17"/>
+    <p:sldId id="274" r:id="rId18"/>
+    <p:sldId id="271" r:id="rId19"/>
+    <p:sldId id="278" r:id="rId20"/>
+    <p:sldId id="277" r:id="rId21"/>
+    <p:sldId id="279" r:id="rId22"/>
+    <p:sldId id="280" r:id="rId23"/>
+    <p:sldId id="281" r:id="rId24"/>
+    <p:sldId id="270" r:id="rId25"/>
+    <p:sldId id="276" r:id="rId26"/>
+    <p:sldId id="282" r:id="rId27"/>
+    <p:sldId id="283" r:id="rId28"/>
+    <p:sldId id="284" r:id="rId29"/>
+    <p:sldId id="285" r:id="rId30"/>
+    <p:sldId id="286" r:id="rId31"/>
+    <p:sldId id="287" r:id="rId32"/>
+    <p:sldId id="288" r:id="rId33"/>
+    <p:sldId id="290" r:id="rId34"/>
+    <p:sldId id="289" r:id="rId35"/>
+    <p:sldId id="267" r:id="rId36"/>
   </p:sldIdLst>
   <p:sldSz cx="12192000" cy="6858000"/>
   <p:notesSz cx="6858000" cy="9144000"/>
@@ -269,7 +293,7 @@
           <a:p>
             <a:fld id="{5D693FE3-A199-4C9E-8963-DC5A59A6898C}" type="datetimeFigureOut">
               <a:rPr lang="fr-FR" smtClean="0"/>
-              <a:t>01/10/2025</a:t>
+              <a:t>16/10/2025</a:t>
             </a:fld>
             <a:endParaRPr lang="fr-FR"/>
           </a:p>
@@ -467,7 +491,7 @@
           <a:p>
             <a:fld id="{5D693FE3-A199-4C9E-8963-DC5A59A6898C}" type="datetimeFigureOut">
               <a:rPr lang="fr-FR" smtClean="0"/>
-              <a:t>01/10/2025</a:t>
+              <a:t>16/10/2025</a:t>
             </a:fld>
             <a:endParaRPr lang="fr-FR"/>
           </a:p>
@@ -675,7 +699,7 @@
           <a:p>
             <a:fld id="{5D693FE3-A199-4C9E-8963-DC5A59A6898C}" type="datetimeFigureOut">
               <a:rPr lang="fr-FR" smtClean="0"/>
-              <a:t>01/10/2025</a:t>
+              <a:t>16/10/2025</a:t>
             </a:fld>
             <a:endParaRPr lang="fr-FR"/>
           </a:p>
@@ -873,7 +897,7 @@
           <a:p>
             <a:fld id="{5D693FE3-A199-4C9E-8963-DC5A59A6898C}" type="datetimeFigureOut">
               <a:rPr lang="fr-FR" smtClean="0"/>
-              <a:t>01/10/2025</a:t>
+              <a:t>16/10/2025</a:t>
             </a:fld>
             <a:endParaRPr lang="fr-FR"/>
           </a:p>
@@ -1148,7 +1172,7 @@
           <a:p>
             <a:fld id="{5D693FE3-A199-4C9E-8963-DC5A59A6898C}" type="datetimeFigureOut">
               <a:rPr lang="fr-FR" smtClean="0"/>
-              <a:t>01/10/2025</a:t>
+              <a:t>16/10/2025</a:t>
             </a:fld>
             <a:endParaRPr lang="fr-FR"/>
           </a:p>
@@ -1413,7 +1437,7 @@
           <a:p>
             <a:fld id="{5D693FE3-A199-4C9E-8963-DC5A59A6898C}" type="datetimeFigureOut">
               <a:rPr lang="fr-FR" smtClean="0"/>
-              <a:t>01/10/2025</a:t>
+              <a:t>16/10/2025</a:t>
             </a:fld>
             <a:endParaRPr lang="fr-FR"/>
           </a:p>
@@ -1825,7 +1849,7 @@
           <a:p>
             <a:fld id="{5D693FE3-A199-4C9E-8963-DC5A59A6898C}" type="datetimeFigureOut">
               <a:rPr lang="fr-FR" smtClean="0"/>
-              <a:t>01/10/2025</a:t>
+              <a:t>16/10/2025</a:t>
             </a:fld>
             <a:endParaRPr lang="fr-FR"/>
           </a:p>
@@ -1966,7 +1990,7 @@
           <a:p>
             <a:fld id="{5D693FE3-A199-4C9E-8963-DC5A59A6898C}" type="datetimeFigureOut">
               <a:rPr lang="fr-FR" smtClean="0"/>
-              <a:t>01/10/2025</a:t>
+              <a:t>16/10/2025</a:t>
             </a:fld>
             <a:endParaRPr lang="fr-FR"/>
           </a:p>
@@ -2079,7 +2103,7 @@
           <a:p>
             <a:fld id="{5D693FE3-A199-4C9E-8963-DC5A59A6898C}" type="datetimeFigureOut">
               <a:rPr lang="fr-FR" smtClean="0"/>
-              <a:t>01/10/2025</a:t>
+              <a:t>16/10/2025</a:t>
             </a:fld>
             <a:endParaRPr lang="fr-FR"/>
           </a:p>
@@ -2390,7 +2414,7 @@
           <a:p>
             <a:fld id="{5D693FE3-A199-4C9E-8963-DC5A59A6898C}" type="datetimeFigureOut">
               <a:rPr lang="fr-FR" smtClean="0"/>
-              <a:t>01/10/2025</a:t>
+              <a:t>16/10/2025</a:t>
             </a:fld>
             <a:endParaRPr lang="fr-FR"/>
           </a:p>
@@ -2678,7 +2702,7 @@
           <a:p>
             <a:fld id="{5D693FE3-A199-4C9E-8963-DC5A59A6898C}" type="datetimeFigureOut">
               <a:rPr lang="fr-FR" smtClean="0"/>
-              <a:t>01/10/2025</a:t>
+              <a:t>16/10/2025</a:t>
             </a:fld>
             <a:endParaRPr lang="fr-FR"/>
           </a:p>
@@ -2919,7 +2943,7 @@
           <a:p>
             <a:fld id="{5D693FE3-A199-4C9E-8963-DC5A59A6898C}" type="datetimeFigureOut">
               <a:rPr lang="fr-FR" smtClean="0"/>
-              <a:t>01/10/2025</a:t>
+              <a:t>16/10/2025</a:t>
             </a:fld>
             <a:endParaRPr lang="fr-FR"/>
           </a:p>
@@ -4417,6 +4441,4405 @@
 </p:sld>
 </file>
 
+<file path=ppt/slides/slide12.xml><?xml version="1.0" encoding="utf-8"?>
+<p:sld xmlns:a="http://schemas.openxmlformats.org/drawingml/2006/main" xmlns:r="http://schemas.openxmlformats.org/officeDocument/2006/relationships" xmlns:p="http://schemas.openxmlformats.org/presentationml/2006/main">
+  <p:cSld>
+    <p:spTree>
+      <p:nvGrpSpPr>
+        <p:cNvPr id="1" name=""/>
+        <p:cNvGrpSpPr/>
+        <p:nvPr/>
+      </p:nvGrpSpPr>
+      <p:grpSpPr>
+        <a:xfrm>
+          <a:off x="0" y="0"/>
+          <a:ext cx="0" cy="0"/>
+          <a:chOff x="0" y="0"/>
+          <a:chExt cx="0" cy="0"/>
+        </a:xfrm>
+      </p:grpSpPr>
+      <p:sp>
+        <p:nvSpPr>
+          <p:cNvPr id="2" name="Titre 1">
+            <a:extLst>
+              <a:ext uri="{FF2B5EF4-FFF2-40B4-BE49-F238E27FC236}">
+                <a16:creationId xmlns:a16="http://schemas.microsoft.com/office/drawing/2014/main" id="{12438BB0-31D5-412F-8E6A-9755E3CE7705}"/>
+              </a:ext>
+            </a:extLst>
+          </p:cNvPr>
+          <p:cNvSpPr>
+            <a:spLocks noGrp="1"/>
+          </p:cNvSpPr>
+          <p:nvPr>
+            <p:ph type="title"/>
+          </p:nvPr>
+        </p:nvSpPr>
+        <p:spPr>
+          <a:xfrm>
+            <a:off x="200025" y="0"/>
+            <a:ext cx="11801475" cy="942975"/>
+          </a:xfrm>
+        </p:spPr>
+        <p:txBody>
+          <a:bodyPr/>
+          <a:lstStyle/>
+          <a:p>
+            <a:r>
+              <a:rPr lang="fr-FR" dirty="0" err="1"/>
+              <a:t>Writing</a:t>
+            </a:r>
+            <a:r>
+              <a:rPr lang="fr-FR" dirty="0"/>
+              <a:t> Row UPDATE in Standard OLTP  </a:t>
+            </a:r>
+            <a:r>
+              <a:rPr lang="fr-FR" dirty="0" err="1"/>
+              <a:t>Databases</a:t>
+            </a:r>
+            <a:endParaRPr lang="fr-FR" dirty="0"/>
+          </a:p>
+        </p:txBody>
+      </p:sp>
+      <p:sp>
+        <p:nvSpPr>
+          <p:cNvPr id="5" name="Rectangle : carré corné 4">
+            <a:extLst>
+              <a:ext uri="{FF2B5EF4-FFF2-40B4-BE49-F238E27FC236}">
+                <a16:creationId xmlns:a16="http://schemas.microsoft.com/office/drawing/2014/main" id="{C48AC624-25F6-4136-8C15-3532DA6E7300}"/>
+              </a:ext>
+            </a:extLst>
+          </p:cNvPr>
+          <p:cNvSpPr/>
+          <p:nvPr/>
+        </p:nvSpPr>
+        <p:spPr>
+          <a:xfrm>
+            <a:off x="2352675" y="1414463"/>
+            <a:ext cx="1428750" cy="2544983"/>
+          </a:xfrm>
+          <a:prstGeom prst="foldedCorner">
+            <a:avLst/>
+          </a:prstGeom>
+          <a:noFill/>
+        </p:spPr>
+        <p:style>
+          <a:lnRef idx="2">
+            <a:schemeClr val="accent1">
+              <a:shade val="50000"/>
+            </a:schemeClr>
+          </a:lnRef>
+          <a:fillRef idx="1">
+            <a:schemeClr val="accent1"/>
+          </a:fillRef>
+          <a:effectRef idx="0">
+            <a:schemeClr val="accent1"/>
+          </a:effectRef>
+          <a:fontRef idx="minor">
+            <a:schemeClr val="lt1"/>
+          </a:fontRef>
+        </p:style>
+        <p:txBody>
+          <a:bodyPr rtlCol="0" anchor="ctr"/>
+          <a:lstStyle/>
+          <a:p>
+            <a:pPr algn="ctr"/>
+            <a:endParaRPr lang="fr-FR" dirty="0"/>
+          </a:p>
+        </p:txBody>
+      </p:sp>
+      <p:sp>
+        <p:nvSpPr>
+          <p:cNvPr id="6" name="Rectangle 5">
+            <a:extLst>
+              <a:ext uri="{FF2B5EF4-FFF2-40B4-BE49-F238E27FC236}">
+                <a16:creationId xmlns:a16="http://schemas.microsoft.com/office/drawing/2014/main" id="{F58FBEA2-F416-4A36-A068-2A20D15D4811}"/>
+              </a:ext>
+            </a:extLst>
+          </p:cNvPr>
+          <p:cNvSpPr/>
+          <p:nvPr/>
+        </p:nvSpPr>
+        <p:spPr>
+          <a:xfrm>
+            <a:off x="2352675" y="2028825"/>
+            <a:ext cx="1428750" cy="709612"/>
+          </a:xfrm>
+          <a:prstGeom prst="rect">
+            <a:avLst/>
+          </a:prstGeom>
+          <a:solidFill>
+            <a:schemeClr val="accent5">
+              <a:lumMod val="20000"/>
+              <a:lumOff val="80000"/>
+            </a:schemeClr>
+          </a:solidFill>
+        </p:spPr>
+        <p:style>
+          <a:lnRef idx="2">
+            <a:schemeClr val="accent1">
+              <a:shade val="50000"/>
+            </a:schemeClr>
+          </a:lnRef>
+          <a:fillRef idx="1">
+            <a:schemeClr val="accent1"/>
+          </a:fillRef>
+          <a:effectRef idx="0">
+            <a:schemeClr val="accent1"/>
+          </a:effectRef>
+          <a:fontRef idx="minor">
+            <a:schemeClr val="lt1"/>
+          </a:fontRef>
+        </p:style>
+        <p:txBody>
+          <a:bodyPr rtlCol="0" anchor="ctr"/>
+          <a:lstStyle/>
+          <a:p>
+            <a:pPr algn="ctr"/>
+            <a:endParaRPr lang="fr-FR"/>
+          </a:p>
+        </p:txBody>
+      </p:sp>
+      <p:sp>
+        <p:nvSpPr>
+          <p:cNvPr id="7" name="Rectangle : coins arrondis 6">
+            <a:extLst>
+              <a:ext uri="{FF2B5EF4-FFF2-40B4-BE49-F238E27FC236}">
+                <a16:creationId xmlns:a16="http://schemas.microsoft.com/office/drawing/2014/main" id="{8544C0C0-D9BA-41E4-B6E2-70C05DECEACE}"/>
+              </a:ext>
+            </a:extLst>
+          </p:cNvPr>
+          <p:cNvSpPr/>
+          <p:nvPr/>
+        </p:nvSpPr>
+        <p:spPr>
+          <a:xfrm>
+            <a:off x="2562225" y="2216020"/>
+            <a:ext cx="714375" cy="261937"/>
+          </a:xfrm>
+          <a:prstGeom prst="roundRect">
+            <a:avLst/>
+          </a:prstGeom>
+        </p:spPr>
+        <p:style>
+          <a:lnRef idx="2">
+            <a:schemeClr val="accent1">
+              <a:shade val="50000"/>
+            </a:schemeClr>
+          </a:lnRef>
+          <a:fillRef idx="1">
+            <a:schemeClr val="accent1"/>
+          </a:fillRef>
+          <a:effectRef idx="0">
+            <a:schemeClr val="accent1"/>
+          </a:effectRef>
+          <a:fontRef idx="minor">
+            <a:schemeClr val="lt1"/>
+          </a:fontRef>
+        </p:style>
+        <p:txBody>
+          <a:bodyPr rtlCol="0" anchor="ctr"/>
+          <a:lstStyle/>
+          <a:p>
+            <a:pPr algn="ctr"/>
+            <a:endParaRPr lang="fr-FR"/>
+          </a:p>
+        </p:txBody>
+      </p:sp>
+      <p:sp>
+        <p:nvSpPr>
+          <p:cNvPr id="8" name="ZoneTexte 7">
+            <a:extLst>
+              <a:ext uri="{FF2B5EF4-FFF2-40B4-BE49-F238E27FC236}">
+                <a16:creationId xmlns:a16="http://schemas.microsoft.com/office/drawing/2014/main" id="{4EC43442-DC5A-470A-9862-9F9B1583E7D7}"/>
+              </a:ext>
+            </a:extLst>
+          </p:cNvPr>
+          <p:cNvSpPr txBox="1"/>
+          <p:nvPr/>
+        </p:nvSpPr>
+        <p:spPr>
+          <a:xfrm>
+            <a:off x="4410075" y="1885323"/>
+            <a:ext cx="2750048" cy="923330"/>
+          </a:xfrm>
+          <a:prstGeom prst="rect">
+            <a:avLst/>
+          </a:prstGeom>
+          <a:noFill/>
+        </p:spPr>
+        <p:txBody>
+          <a:bodyPr wrap="none" rtlCol="0">
+            <a:spAutoFit/>
+          </a:bodyPr>
+          <a:lstStyle/>
+          <a:p>
+            <a:r>
+              <a:rPr lang="fr-FR" dirty="0"/>
+              <a:t>The </a:t>
+            </a:r>
+            <a:r>
+              <a:rPr lang="fr-FR" dirty="0" err="1"/>
+              <a:t>Modified</a:t>
+            </a:r>
+            <a:endParaRPr lang="fr-FR" dirty="0"/>
+          </a:p>
+          <a:p>
+            <a:r>
+              <a:rPr lang="fr-FR" dirty="0"/>
+              <a:t>Block </a:t>
+            </a:r>
+            <a:r>
+              <a:rPr lang="fr-FR" dirty="0" err="1"/>
+              <a:t>is</a:t>
+            </a:r>
+            <a:r>
+              <a:rPr lang="fr-FR" dirty="0"/>
+              <a:t> </a:t>
+            </a:r>
+            <a:r>
+              <a:rPr lang="fr-FR" dirty="0" err="1"/>
+              <a:t>marked</a:t>
+            </a:r>
+            <a:r>
+              <a:rPr lang="fr-FR" dirty="0"/>
+              <a:t> as « Dirty »</a:t>
+            </a:r>
+          </a:p>
+          <a:p>
+            <a:r>
+              <a:rPr lang="fr-FR" dirty="0"/>
+              <a:t>… to </a:t>
+            </a:r>
+            <a:r>
+              <a:rPr lang="fr-FR" dirty="0" err="1"/>
+              <a:t>be</a:t>
+            </a:r>
+            <a:r>
+              <a:rPr lang="fr-FR" dirty="0"/>
+              <a:t> </a:t>
+            </a:r>
+            <a:r>
+              <a:rPr lang="fr-FR" dirty="0" err="1"/>
+              <a:t>saved</a:t>
+            </a:r>
+            <a:r>
+              <a:rPr lang="fr-FR" dirty="0"/>
+              <a:t> </a:t>
+            </a:r>
+            <a:r>
+              <a:rPr lang="fr-FR" dirty="0" err="1"/>
+              <a:t>later</a:t>
+            </a:r>
+            <a:r>
+              <a:rPr lang="fr-FR" dirty="0"/>
+              <a:t> to Disk</a:t>
+            </a:r>
+          </a:p>
+        </p:txBody>
+      </p:sp>
+      <p:sp>
+        <p:nvSpPr>
+          <p:cNvPr id="9" name="Rectangle : coins arrondis 8">
+            <a:extLst>
+              <a:ext uri="{FF2B5EF4-FFF2-40B4-BE49-F238E27FC236}">
+                <a16:creationId xmlns:a16="http://schemas.microsoft.com/office/drawing/2014/main" id="{EBF2B738-809E-43AB-A00B-D1FD0CC86BDB}"/>
+              </a:ext>
+            </a:extLst>
+          </p:cNvPr>
+          <p:cNvSpPr/>
+          <p:nvPr/>
+        </p:nvSpPr>
+        <p:spPr>
+          <a:xfrm>
+            <a:off x="2806627" y="2412648"/>
+            <a:ext cx="714375" cy="261937"/>
+          </a:xfrm>
+          <a:prstGeom prst="roundRect">
+            <a:avLst/>
+          </a:prstGeom>
+        </p:spPr>
+        <p:style>
+          <a:lnRef idx="2">
+            <a:schemeClr val="accent1">
+              <a:shade val="50000"/>
+            </a:schemeClr>
+          </a:lnRef>
+          <a:fillRef idx="1">
+            <a:schemeClr val="accent1"/>
+          </a:fillRef>
+          <a:effectRef idx="0">
+            <a:schemeClr val="accent1"/>
+          </a:effectRef>
+          <a:fontRef idx="minor">
+            <a:schemeClr val="lt1"/>
+          </a:fontRef>
+        </p:style>
+        <p:txBody>
+          <a:bodyPr rtlCol="0" anchor="ctr"/>
+          <a:lstStyle/>
+          <a:p>
+            <a:pPr algn="ctr"/>
+            <a:endParaRPr lang="fr-FR"/>
+          </a:p>
+        </p:txBody>
+      </p:sp>
+      <p:sp>
+        <p:nvSpPr>
+          <p:cNvPr id="10" name="Flèche : courbe vers le bas 9">
+            <a:extLst>
+              <a:ext uri="{FF2B5EF4-FFF2-40B4-BE49-F238E27FC236}">
+                <a16:creationId xmlns:a16="http://schemas.microsoft.com/office/drawing/2014/main" id="{3C16D45C-21EB-4F3D-B004-8D8801211A98}"/>
+              </a:ext>
+            </a:extLst>
+          </p:cNvPr>
+          <p:cNvSpPr/>
+          <p:nvPr/>
+        </p:nvSpPr>
+        <p:spPr>
+          <a:xfrm rot="2623080">
+            <a:off x="3440594" y="2154032"/>
+            <a:ext cx="289624" cy="264378"/>
+          </a:xfrm>
+          <a:prstGeom prst="curvedDownArrow">
+            <a:avLst/>
+          </a:prstGeom>
+        </p:spPr>
+        <p:style>
+          <a:lnRef idx="2">
+            <a:schemeClr val="accent1">
+              <a:shade val="50000"/>
+            </a:schemeClr>
+          </a:lnRef>
+          <a:fillRef idx="1">
+            <a:schemeClr val="accent1"/>
+          </a:fillRef>
+          <a:effectRef idx="0">
+            <a:schemeClr val="accent1"/>
+          </a:effectRef>
+          <a:fontRef idx="minor">
+            <a:schemeClr val="lt1"/>
+          </a:fontRef>
+        </p:style>
+        <p:txBody>
+          <a:bodyPr rtlCol="0" anchor="ctr"/>
+          <a:lstStyle/>
+          <a:p>
+            <a:pPr algn="ctr"/>
+            <a:endParaRPr lang="fr-FR">
+              <a:solidFill>
+                <a:schemeClr val="tx1"/>
+              </a:solidFill>
+            </a:endParaRPr>
+          </a:p>
+        </p:txBody>
+      </p:sp>
+      <p:sp>
+        <p:nvSpPr>
+          <p:cNvPr id="11" name="ZoneTexte 10">
+            <a:extLst>
+              <a:ext uri="{FF2B5EF4-FFF2-40B4-BE49-F238E27FC236}">
+                <a16:creationId xmlns:a16="http://schemas.microsoft.com/office/drawing/2014/main" id="{66F76FAE-8AAB-45EA-99BD-509A96246270}"/>
+              </a:ext>
+            </a:extLst>
+          </p:cNvPr>
+          <p:cNvSpPr txBox="1"/>
+          <p:nvPr/>
+        </p:nvSpPr>
+        <p:spPr>
+          <a:xfrm>
+            <a:off x="266381" y="1518995"/>
+            <a:ext cx="1851341" cy="923330"/>
+          </a:xfrm>
+          <a:prstGeom prst="rect">
+            <a:avLst/>
+          </a:prstGeom>
+          <a:noFill/>
+        </p:spPr>
+        <p:txBody>
+          <a:bodyPr wrap="none" rtlCol="0">
+            <a:spAutoFit/>
+          </a:bodyPr>
+          <a:lstStyle/>
+          <a:p>
+            <a:r>
+              <a:rPr lang="fr-FR" dirty="0" err="1"/>
+              <a:t>Modify</a:t>
+            </a:r>
+            <a:r>
+              <a:rPr lang="fr-FR" dirty="0"/>
+              <a:t> </a:t>
+            </a:r>
+            <a:r>
+              <a:rPr lang="fr-FR" dirty="0" err="1"/>
+              <a:t>directly</a:t>
+            </a:r>
+            <a:r>
+              <a:rPr lang="fr-FR" dirty="0"/>
+              <a:t> </a:t>
+            </a:r>
+          </a:p>
+          <a:p>
+            <a:r>
+              <a:rPr lang="fr-FR" dirty="0"/>
+              <a:t>the RAM memory</a:t>
+            </a:r>
+          </a:p>
+          <a:p>
+            <a:r>
+              <a:rPr lang="fr-FR" dirty="0"/>
+              <a:t> ROW</a:t>
+            </a:r>
+          </a:p>
+        </p:txBody>
+      </p:sp>
+      <p:sp>
+        <p:nvSpPr>
+          <p:cNvPr id="12" name="Rectangle : coins arrondis 11">
+            <a:extLst>
+              <a:ext uri="{FF2B5EF4-FFF2-40B4-BE49-F238E27FC236}">
+                <a16:creationId xmlns:a16="http://schemas.microsoft.com/office/drawing/2014/main" id="{401555AC-A02E-4EA6-85C7-3177F4E6BA2D}"/>
+              </a:ext>
+            </a:extLst>
+          </p:cNvPr>
+          <p:cNvSpPr/>
+          <p:nvPr/>
+        </p:nvSpPr>
+        <p:spPr>
+          <a:xfrm>
+            <a:off x="4410075" y="4784627"/>
+            <a:ext cx="714375" cy="261937"/>
+          </a:xfrm>
+          <a:prstGeom prst="roundRect">
+            <a:avLst/>
+          </a:prstGeom>
+        </p:spPr>
+        <p:style>
+          <a:lnRef idx="2">
+            <a:schemeClr val="accent1">
+              <a:shade val="50000"/>
+            </a:schemeClr>
+          </a:lnRef>
+          <a:fillRef idx="1">
+            <a:schemeClr val="accent1"/>
+          </a:fillRef>
+          <a:effectRef idx="0">
+            <a:schemeClr val="accent1"/>
+          </a:effectRef>
+          <a:fontRef idx="minor">
+            <a:schemeClr val="lt1"/>
+          </a:fontRef>
+        </p:style>
+        <p:txBody>
+          <a:bodyPr rtlCol="0" anchor="ctr"/>
+          <a:lstStyle/>
+          <a:p>
+            <a:pPr algn="ctr"/>
+            <a:endParaRPr lang="fr-FR"/>
+          </a:p>
+        </p:txBody>
+      </p:sp>
+      <p:sp>
+        <p:nvSpPr>
+          <p:cNvPr id="13" name="Flèche : pentagone 12">
+            <a:extLst>
+              <a:ext uri="{FF2B5EF4-FFF2-40B4-BE49-F238E27FC236}">
+                <a16:creationId xmlns:a16="http://schemas.microsoft.com/office/drawing/2014/main" id="{DB721C20-49FB-4655-ABF2-967DAA45F52C}"/>
+              </a:ext>
+            </a:extLst>
+          </p:cNvPr>
+          <p:cNvSpPr/>
+          <p:nvPr/>
+        </p:nvSpPr>
+        <p:spPr>
+          <a:xfrm>
+            <a:off x="2352675" y="4567730"/>
+            <a:ext cx="5481637" cy="709612"/>
+          </a:xfrm>
+          <a:prstGeom prst="homePlate">
+            <a:avLst/>
+          </a:prstGeom>
+          <a:noFill/>
+        </p:spPr>
+        <p:style>
+          <a:lnRef idx="2">
+            <a:schemeClr val="accent1">
+              <a:shade val="50000"/>
+            </a:schemeClr>
+          </a:lnRef>
+          <a:fillRef idx="1">
+            <a:schemeClr val="accent1"/>
+          </a:fillRef>
+          <a:effectRef idx="0">
+            <a:schemeClr val="accent1"/>
+          </a:effectRef>
+          <a:fontRef idx="minor">
+            <a:schemeClr val="lt1"/>
+          </a:fontRef>
+        </p:style>
+        <p:txBody>
+          <a:bodyPr rtlCol="0" anchor="ctr"/>
+          <a:lstStyle/>
+          <a:p>
+            <a:pPr algn="ctr"/>
+            <a:endParaRPr lang="fr-FR"/>
+          </a:p>
+        </p:txBody>
+      </p:sp>
+      <p:sp>
+        <p:nvSpPr>
+          <p:cNvPr id="14" name="Cadre 13">
+            <a:extLst>
+              <a:ext uri="{FF2B5EF4-FFF2-40B4-BE49-F238E27FC236}">
+                <a16:creationId xmlns:a16="http://schemas.microsoft.com/office/drawing/2014/main" id="{AE8242E8-DE33-4E61-B4B5-CC69BBB32FA8}"/>
+              </a:ext>
+            </a:extLst>
+          </p:cNvPr>
+          <p:cNvSpPr/>
+          <p:nvPr/>
+        </p:nvSpPr>
+        <p:spPr>
+          <a:xfrm>
+            <a:off x="4103761" y="4672013"/>
+            <a:ext cx="1209675" cy="509587"/>
+          </a:xfrm>
+          <a:prstGeom prst="frame">
+            <a:avLst/>
+          </a:prstGeom>
+        </p:spPr>
+        <p:style>
+          <a:lnRef idx="2">
+            <a:schemeClr val="accent1">
+              <a:shade val="50000"/>
+            </a:schemeClr>
+          </a:lnRef>
+          <a:fillRef idx="1">
+            <a:schemeClr val="accent1"/>
+          </a:fillRef>
+          <a:effectRef idx="0">
+            <a:schemeClr val="accent1"/>
+          </a:effectRef>
+          <a:fontRef idx="minor">
+            <a:schemeClr val="lt1"/>
+          </a:fontRef>
+        </p:style>
+        <p:txBody>
+          <a:bodyPr rtlCol="0" anchor="ctr"/>
+          <a:lstStyle/>
+          <a:p>
+            <a:pPr algn="ctr"/>
+            <a:endParaRPr lang="fr-FR">
+              <a:solidFill>
+                <a:schemeClr val="tx1"/>
+              </a:solidFill>
+            </a:endParaRPr>
+          </a:p>
+        </p:txBody>
+      </p:sp>
+      <p:sp>
+        <p:nvSpPr>
+          <p:cNvPr id="15" name="Cadre 14">
+            <a:extLst>
+              <a:ext uri="{FF2B5EF4-FFF2-40B4-BE49-F238E27FC236}">
+                <a16:creationId xmlns:a16="http://schemas.microsoft.com/office/drawing/2014/main" id="{F163C5FE-E1E3-4EC0-BA62-52D199212BD3}"/>
+              </a:ext>
+            </a:extLst>
+          </p:cNvPr>
+          <p:cNvSpPr/>
+          <p:nvPr/>
+        </p:nvSpPr>
+        <p:spPr>
+          <a:xfrm>
+            <a:off x="2571750" y="4686300"/>
+            <a:ext cx="623887" cy="509587"/>
+          </a:xfrm>
+          <a:prstGeom prst="frame">
+            <a:avLst/>
+          </a:prstGeom>
+        </p:spPr>
+        <p:style>
+          <a:lnRef idx="2">
+            <a:schemeClr val="accent1">
+              <a:shade val="50000"/>
+            </a:schemeClr>
+          </a:lnRef>
+          <a:fillRef idx="1">
+            <a:schemeClr val="accent1"/>
+          </a:fillRef>
+          <a:effectRef idx="0">
+            <a:schemeClr val="accent1"/>
+          </a:effectRef>
+          <a:fontRef idx="minor">
+            <a:schemeClr val="lt1"/>
+          </a:fontRef>
+        </p:style>
+        <p:txBody>
+          <a:bodyPr rtlCol="0" anchor="ctr"/>
+          <a:lstStyle/>
+          <a:p>
+            <a:pPr algn="ctr"/>
+            <a:endParaRPr lang="fr-FR">
+              <a:solidFill>
+                <a:schemeClr val="tx1"/>
+              </a:solidFill>
+            </a:endParaRPr>
+          </a:p>
+        </p:txBody>
+      </p:sp>
+      <p:sp>
+        <p:nvSpPr>
+          <p:cNvPr id="16" name="Cadre 15">
+            <a:extLst>
+              <a:ext uri="{FF2B5EF4-FFF2-40B4-BE49-F238E27FC236}">
+                <a16:creationId xmlns:a16="http://schemas.microsoft.com/office/drawing/2014/main" id="{0B7902DD-FF29-45A7-875F-20BA3DB9AE39}"/>
+              </a:ext>
+            </a:extLst>
+          </p:cNvPr>
+          <p:cNvSpPr/>
+          <p:nvPr/>
+        </p:nvSpPr>
+        <p:spPr>
+          <a:xfrm>
+            <a:off x="3326717" y="4686299"/>
+            <a:ext cx="623887" cy="509587"/>
+          </a:xfrm>
+          <a:prstGeom prst="frame">
+            <a:avLst/>
+          </a:prstGeom>
+        </p:spPr>
+        <p:style>
+          <a:lnRef idx="2">
+            <a:schemeClr val="accent1">
+              <a:shade val="50000"/>
+            </a:schemeClr>
+          </a:lnRef>
+          <a:fillRef idx="1">
+            <a:schemeClr val="accent1"/>
+          </a:fillRef>
+          <a:effectRef idx="0">
+            <a:schemeClr val="accent1"/>
+          </a:effectRef>
+          <a:fontRef idx="minor">
+            <a:schemeClr val="lt1"/>
+          </a:fontRef>
+        </p:style>
+        <p:txBody>
+          <a:bodyPr rtlCol="0" anchor="ctr"/>
+          <a:lstStyle/>
+          <a:p>
+            <a:pPr algn="ctr"/>
+            <a:endParaRPr lang="fr-FR">
+              <a:solidFill>
+                <a:schemeClr val="tx1"/>
+              </a:solidFill>
+            </a:endParaRPr>
+          </a:p>
+        </p:txBody>
+      </p:sp>
+      <p:sp>
+        <p:nvSpPr>
+          <p:cNvPr id="17" name="ZoneTexte 16">
+            <a:extLst>
+              <a:ext uri="{FF2B5EF4-FFF2-40B4-BE49-F238E27FC236}">
+                <a16:creationId xmlns:a16="http://schemas.microsoft.com/office/drawing/2014/main" id="{F3233584-3BF4-4476-A253-2FB634BF912D}"/>
+              </a:ext>
+            </a:extLst>
+          </p:cNvPr>
+          <p:cNvSpPr txBox="1"/>
+          <p:nvPr/>
+        </p:nvSpPr>
+        <p:spPr>
+          <a:xfrm>
+            <a:off x="4103761" y="3959446"/>
+            <a:ext cx="6581674" cy="646331"/>
+          </a:xfrm>
+          <a:prstGeom prst="rect">
+            <a:avLst/>
+          </a:prstGeom>
+          <a:noFill/>
+        </p:spPr>
+        <p:txBody>
+          <a:bodyPr wrap="none" rtlCol="0">
+            <a:spAutoFit/>
+          </a:bodyPr>
+          <a:lstStyle/>
+          <a:p>
+            <a:r>
+              <a:rPr lang="fr-FR" dirty="0"/>
+              <a:t>Write append the Commit changes in the WAL </a:t>
+            </a:r>
+            <a:r>
+              <a:rPr lang="fr-FR" dirty="0" err="1"/>
+              <a:t>Transactional</a:t>
+            </a:r>
+            <a:r>
+              <a:rPr lang="fr-FR" dirty="0"/>
+              <a:t> Log File</a:t>
+            </a:r>
+            <a:br>
+              <a:rPr lang="fr-FR" dirty="0"/>
+            </a:br>
+            <a:r>
+              <a:rPr lang="fr-FR" dirty="0"/>
+              <a:t>(in Oracle, the « REDO File » )</a:t>
+            </a:r>
+          </a:p>
+        </p:txBody>
+      </p:sp>
+      <p:sp>
+        <p:nvSpPr>
+          <p:cNvPr id="18" name="Flèche : pentagone 17">
+            <a:extLst>
+              <a:ext uri="{FF2B5EF4-FFF2-40B4-BE49-F238E27FC236}">
+                <a16:creationId xmlns:a16="http://schemas.microsoft.com/office/drawing/2014/main" id="{E65EAED2-FC91-4E67-AB90-8D15B8AA7F99}"/>
+              </a:ext>
+            </a:extLst>
+          </p:cNvPr>
+          <p:cNvSpPr/>
+          <p:nvPr/>
+        </p:nvSpPr>
+        <p:spPr>
+          <a:xfrm flipH="1">
+            <a:off x="2365986" y="5865128"/>
+            <a:ext cx="5481637" cy="709612"/>
+          </a:xfrm>
+          <a:prstGeom prst="homePlate">
+            <a:avLst/>
+          </a:prstGeom>
+          <a:noFill/>
+        </p:spPr>
+        <p:style>
+          <a:lnRef idx="2">
+            <a:schemeClr val="accent1">
+              <a:shade val="50000"/>
+            </a:schemeClr>
+          </a:lnRef>
+          <a:fillRef idx="1">
+            <a:schemeClr val="accent1"/>
+          </a:fillRef>
+          <a:effectRef idx="0">
+            <a:schemeClr val="accent1"/>
+          </a:effectRef>
+          <a:fontRef idx="minor">
+            <a:schemeClr val="lt1"/>
+          </a:fontRef>
+        </p:style>
+        <p:txBody>
+          <a:bodyPr rtlCol="0" anchor="ctr"/>
+          <a:lstStyle/>
+          <a:p>
+            <a:pPr algn="ctr"/>
+            <a:endParaRPr lang="fr-FR"/>
+          </a:p>
+        </p:txBody>
+      </p:sp>
+      <p:sp>
+        <p:nvSpPr>
+          <p:cNvPr id="19" name="Rectangle : coins arrondis 18">
+            <a:extLst>
+              <a:ext uri="{FF2B5EF4-FFF2-40B4-BE49-F238E27FC236}">
+                <a16:creationId xmlns:a16="http://schemas.microsoft.com/office/drawing/2014/main" id="{A3472759-CC83-43C4-A475-3F4B6CC7A630}"/>
+              </a:ext>
+            </a:extLst>
+          </p:cNvPr>
+          <p:cNvSpPr/>
+          <p:nvPr/>
+        </p:nvSpPr>
+        <p:spPr>
+          <a:xfrm>
+            <a:off x="4423386" y="6088965"/>
+            <a:ext cx="714375" cy="261937"/>
+          </a:xfrm>
+          <a:prstGeom prst="roundRect">
+            <a:avLst/>
+          </a:prstGeom>
+        </p:spPr>
+        <p:style>
+          <a:lnRef idx="2">
+            <a:schemeClr val="accent1">
+              <a:shade val="50000"/>
+            </a:schemeClr>
+          </a:lnRef>
+          <a:fillRef idx="1">
+            <a:schemeClr val="accent1"/>
+          </a:fillRef>
+          <a:effectRef idx="0">
+            <a:schemeClr val="accent1"/>
+          </a:effectRef>
+          <a:fontRef idx="minor">
+            <a:schemeClr val="lt1"/>
+          </a:fontRef>
+        </p:style>
+        <p:txBody>
+          <a:bodyPr rtlCol="0" anchor="ctr"/>
+          <a:lstStyle/>
+          <a:p>
+            <a:pPr algn="ctr"/>
+            <a:endParaRPr lang="fr-FR"/>
+          </a:p>
+        </p:txBody>
+      </p:sp>
+      <p:sp>
+        <p:nvSpPr>
+          <p:cNvPr id="20" name="ZoneTexte 19">
+            <a:extLst>
+              <a:ext uri="{FF2B5EF4-FFF2-40B4-BE49-F238E27FC236}">
+                <a16:creationId xmlns:a16="http://schemas.microsoft.com/office/drawing/2014/main" id="{404AFA9A-DC7E-47A5-9C0B-BC61888BF892}"/>
+              </a:ext>
+            </a:extLst>
+          </p:cNvPr>
+          <p:cNvSpPr txBox="1"/>
+          <p:nvPr/>
+        </p:nvSpPr>
+        <p:spPr>
+          <a:xfrm>
+            <a:off x="5527749" y="5459005"/>
+            <a:ext cx="5454570" cy="369332"/>
+          </a:xfrm>
+          <a:prstGeom prst="rect">
+            <a:avLst/>
+          </a:prstGeom>
+          <a:noFill/>
+        </p:spPr>
+        <p:txBody>
+          <a:bodyPr wrap="none" rtlCol="0">
+            <a:spAutoFit/>
+          </a:bodyPr>
+          <a:lstStyle/>
+          <a:p>
+            <a:r>
+              <a:rPr lang="fr-FR" dirty="0"/>
+              <a:t>In Oracle… </a:t>
+            </a:r>
+            <a:r>
+              <a:rPr lang="fr-FR" dirty="0" err="1"/>
+              <a:t>also</a:t>
+            </a:r>
+            <a:r>
+              <a:rPr lang="fr-FR" dirty="0"/>
+              <a:t> </a:t>
+            </a:r>
+            <a:r>
+              <a:rPr lang="fr-FR" dirty="0" err="1"/>
+              <a:t>write</a:t>
+            </a:r>
+            <a:r>
+              <a:rPr lang="fr-FR" dirty="0"/>
+              <a:t> the OLD ROW in the « UNDO File »</a:t>
+            </a:r>
+          </a:p>
+        </p:txBody>
+      </p:sp>
+      <p:sp>
+        <p:nvSpPr>
+          <p:cNvPr id="21" name="Organigramme : Disque magnétique 20">
+            <a:extLst>
+              <a:ext uri="{FF2B5EF4-FFF2-40B4-BE49-F238E27FC236}">
+                <a16:creationId xmlns:a16="http://schemas.microsoft.com/office/drawing/2014/main" id="{6F84D696-FE22-46CA-A5D3-4289275C15D3}"/>
+              </a:ext>
+            </a:extLst>
+          </p:cNvPr>
+          <p:cNvSpPr/>
+          <p:nvPr/>
+        </p:nvSpPr>
+        <p:spPr>
+          <a:xfrm>
+            <a:off x="7720012" y="742949"/>
+            <a:ext cx="1466850" cy="2940271"/>
+          </a:xfrm>
+          <a:prstGeom prst="flowChartMagneticDisk">
+            <a:avLst/>
+          </a:prstGeom>
+          <a:noFill/>
+        </p:spPr>
+        <p:style>
+          <a:lnRef idx="2">
+            <a:schemeClr val="accent1">
+              <a:shade val="50000"/>
+            </a:schemeClr>
+          </a:lnRef>
+          <a:fillRef idx="1">
+            <a:schemeClr val="accent1"/>
+          </a:fillRef>
+          <a:effectRef idx="0">
+            <a:schemeClr val="accent1"/>
+          </a:effectRef>
+          <a:fontRef idx="minor">
+            <a:schemeClr val="lt1"/>
+          </a:fontRef>
+        </p:style>
+        <p:txBody>
+          <a:bodyPr rtlCol="0" anchor="ctr"/>
+          <a:lstStyle/>
+          <a:p>
+            <a:pPr algn="ctr"/>
+            <a:endParaRPr lang="fr-FR"/>
+          </a:p>
+        </p:txBody>
+      </p:sp>
+      <p:sp>
+        <p:nvSpPr>
+          <p:cNvPr id="22" name="Rectangle : carré corné 21">
+            <a:extLst>
+              <a:ext uri="{FF2B5EF4-FFF2-40B4-BE49-F238E27FC236}">
+                <a16:creationId xmlns:a16="http://schemas.microsoft.com/office/drawing/2014/main" id="{11571E43-EAEE-47F9-B592-9FB040D3741F}"/>
+              </a:ext>
+            </a:extLst>
+          </p:cNvPr>
+          <p:cNvSpPr/>
+          <p:nvPr/>
+        </p:nvSpPr>
+        <p:spPr>
+          <a:xfrm>
+            <a:off x="7834312" y="1861410"/>
+            <a:ext cx="1226235" cy="1339580"/>
+          </a:xfrm>
+          <a:prstGeom prst="foldedCorner">
+            <a:avLst/>
+          </a:prstGeom>
+          <a:noFill/>
+        </p:spPr>
+        <p:style>
+          <a:lnRef idx="2">
+            <a:schemeClr val="accent1">
+              <a:shade val="50000"/>
+            </a:schemeClr>
+          </a:lnRef>
+          <a:fillRef idx="1">
+            <a:schemeClr val="accent1"/>
+          </a:fillRef>
+          <a:effectRef idx="0">
+            <a:schemeClr val="accent1"/>
+          </a:effectRef>
+          <a:fontRef idx="minor">
+            <a:schemeClr val="lt1"/>
+          </a:fontRef>
+        </p:style>
+        <p:txBody>
+          <a:bodyPr rtlCol="0" anchor="ctr"/>
+          <a:lstStyle/>
+          <a:p>
+            <a:pPr algn="ctr"/>
+            <a:endParaRPr lang="fr-FR" dirty="0"/>
+          </a:p>
+        </p:txBody>
+      </p:sp>
+      <p:sp>
+        <p:nvSpPr>
+          <p:cNvPr id="23" name="Rectangle 22">
+            <a:extLst>
+              <a:ext uri="{FF2B5EF4-FFF2-40B4-BE49-F238E27FC236}">
+                <a16:creationId xmlns:a16="http://schemas.microsoft.com/office/drawing/2014/main" id="{A2E2E478-D925-4FFE-AF6D-7BF9C046FCF6}"/>
+              </a:ext>
+            </a:extLst>
+          </p:cNvPr>
+          <p:cNvSpPr/>
+          <p:nvPr/>
+        </p:nvSpPr>
+        <p:spPr>
+          <a:xfrm>
+            <a:off x="7847623" y="2110598"/>
+            <a:ext cx="1212924" cy="452216"/>
+          </a:xfrm>
+          <a:prstGeom prst="rect">
+            <a:avLst/>
+          </a:prstGeom>
+          <a:solidFill>
+            <a:schemeClr val="accent5">
+              <a:lumMod val="20000"/>
+              <a:lumOff val="80000"/>
+            </a:schemeClr>
+          </a:solidFill>
+        </p:spPr>
+        <p:style>
+          <a:lnRef idx="2">
+            <a:schemeClr val="accent1">
+              <a:shade val="50000"/>
+            </a:schemeClr>
+          </a:lnRef>
+          <a:fillRef idx="1">
+            <a:schemeClr val="accent1"/>
+          </a:fillRef>
+          <a:effectRef idx="0">
+            <a:schemeClr val="accent1"/>
+          </a:effectRef>
+          <a:fontRef idx="minor">
+            <a:schemeClr val="lt1"/>
+          </a:fontRef>
+        </p:style>
+        <p:txBody>
+          <a:bodyPr rtlCol="0" anchor="ctr"/>
+          <a:lstStyle/>
+          <a:p>
+            <a:pPr algn="ctr"/>
+            <a:endParaRPr lang="fr-FR"/>
+          </a:p>
+        </p:txBody>
+      </p:sp>
+      <p:sp>
+        <p:nvSpPr>
+          <p:cNvPr id="24" name="Organigramme : Disque magnétique 23">
+            <a:extLst>
+              <a:ext uri="{FF2B5EF4-FFF2-40B4-BE49-F238E27FC236}">
+                <a16:creationId xmlns:a16="http://schemas.microsoft.com/office/drawing/2014/main" id="{1259C5D5-CFB7-4823-A379-BB9C162FA5AA}"/>
+              </a:ext>
+            </a:extLst>
+          </p:cNvPr>
+          <p:cNvSpPr/>
+          <p:nvPr/>
+        </p:nvSpPr>
+        <p:spPr>
+          <a:xfrm>
+            <a:off x="8087482" y="4400402"/>
+            <a:ext cx="899356" cy="963202"/>
+          </a:xfrm>
+          <a:prstGeom prst="flowChartMagneticDisk">
+            <a:avLst/>
+          </a:prstGeom>
+          <a:noFill/>
+        </p:spPr>
+        <p:style>
+          <a:lnRef idx="2">
+            <a:schemeClr val="accent1">
+              <a:shade val="50000"/>
+            </a:schemeClr>
+          </a:lnRef>
+          <a:fillRef idx="1">
+            <a:schemeClr val="accent1"/>
+          </a:fillRef>
+          <a:effectRef idx="0">
+            <a:schemeClr val="accent1"/>
+          </a:effectRef>
+          <a:fontRef idx="minor">
+            <a:schemeClr val="lt1"/>
+          </a:fontRef>
+        </p:style>
+        <p:txBody>
+          <a:bodyPr rtlCol="0" anchor="ctr"/>
+          <a:lstStyle/>
+          <a:p>
+            <a:pPr algn="ctr"/>
+            <a:endParaRPr lang="fr-FR"/>
+          </a:p>
+        </p:txBody>
+      </p:sp>
+      <p:sp>
+        <p:nvSpPr>
+          <p:cNvPr id="25" name="Organigramme : Disque magnétique 24">
+            <a:extLst>
+              <a:ext uri="{FF2B5EF4-FFF2-40B4-BE49-F238E27FC236}">
+                <a16:creationId xmlns:a16="http://schemas.microsoft.com/office/drawing/2014/main" id="{3B2F4EB5-269F-41EC-B77B-9731C02B32E3}"/>
+              </a:ext>
+            </a:extLst>
+          </p:cNvPr>
+          <p:cNvSpPr/>
+          <p:nvPr/>
+        </p:nvSpPr>
+        <p:spPr>
+          <a:xfrm>
+            <a:off x="8161191" y="5804560"/>
+            <a:ext cx="899356" cy="963202"/>
+          </a:xfrm>
+          <a:prstGeom prst="flowChartMagneticDisk">
+            <a:avLst/>
+          </a:prstGeom>
+          <a:noFill/>
+        </p:spPr>
+        <p:style>
+          <a:lnRef idx="2">
+            <a:schemeClr val="accent1">
+              <a:shade val="50000"/>
+            </a:schemeClr>
+          </a:lnRef>
+          <a:fillRef idx="1">
+            <a:schemeClr val="accent1"/>
+          </a:fillRef>
+          <a:effectRef idx="0">
+            <a:schemeClr val="accent1"/>
+          </a:effectRef>
+          <a:fontRef idx="minor">
+            <a:schemeClr val="lt1"/>
+          </a:fontRef>
+        </p:style>
+        <p:txBody>
+          <a:bodyPr rtlCol="0" anchor="ctr"/>
+          <a:lstStyle/>
+          <a:p>
+            <a:pPr algn="ctr"/>
+            <a:endParaRPr lang="fr-FR"/>
+          </a:p>
+        </p:txBody>
+      </p:sp>
+      <p:sp>
+        <p:nvSpPr>
+          <p:cNvPr id="26" name="ZoneTexte 25">
+            <a:extLst>
+              <a:ext uri="{FF2B5EF4-FFF2-40B4-BE49-F238E27FC236}">
+                <a16:creationId xmlns:a16="http://schemas.microsoft.com/office/drawing/2014/main" id="{7015E1CF-0212-4EE5-A456-8D2A5D42CD6B}"/>
+              </a:ext>
+            </a:extLst>
+          </p:cNvPr>
+          <p:cNvSpPr txBox="1"/>
+          <p:nvPr/>
+        </p:nvSpPr>
+        <p:spPr>
+          <a:xfrm>
+            <a:off x="9060547" y="4592429"/>
+            <a:ext cx="2725874" cy="646331"/>
+          </a:xfrm>
+          <a:prstGeom prst="rect">
+            <a:avLst/>
+          </a:prstGeom>
+          <a:noFill/>
+        </p:spPr>
+        <p:txBody>
+          <a:bodyPr wrap="none" rtlCol="0">
+            <a:spAutoFit/>
+          </a:bodyPr>
+          <a:lstStyle/>
+          <a:p>
+            <a:r>
+              <a:rPr lang="fr-FR" dirty="0"/>
+              <a:t>Write append + </a:t>
+            </a:r>
+          </a:p>
+          <a:p>
+            <a:r>
+              <a:rPr lang="fr-FR" dirty="0" err="1"/>
+              <a:t>Immediate</a:t>
+            </a:r>
+            <a:r>
+              <a:rPr lang="fr-FR" dirty="0"/>
+              <a:t> Sync-FLUSH File</a:t>
+            </a:r>
+          </a:p>
+        </p:txBody>
+      </p:sp>
+    </p:spTree>
+    <p:extLst>
+      <p:ext uri="{BB962C8B-B14F-4D97-AF65-F5344CB8AC3E}">
+        <p14:creationId xmlns:p14="http://schemas.microsoft.com/office/powerpoint/2010/main" val="2078582229"/>
+      </p:ext>
+    </p:extLst>
+  </p:cSld>
+  <p:clrMapOvr>
+    <a:masterClrMapping/>
+  </p:clrMapOvr>
+</p:sld>
+</file>
+
+<file path=ppt/slides/slide13.xml><?xml version="1.0" encoding="utf-8"?>
+<p:sld xmlns:a="http://schemas.openxmlformats.org/drawingml/2006/main" xmlns:r="http://schemas.openxmlformats.org/officeDocument/2006/relationships" xmlns:p="http://schemas.openxmlformats.org/presentationml/2006/main">
+  <p:cSld>
+    <p:spTree>
+      <p:nvGrpSpPr>
+        <p:cNvPr id="1" name=""/>
+        <p:cNvGrpSpPr/>
+        <p:nvPr/>
+      </p:nvGrpSpPr>
+      <p:grpSpPr>
+        <a:xfrm>
+          <a:off x="0" y="0"/>
+          <a:ext cx="0" cy="0"/>
+          <a:chOff x="0" y="0"/>
+          <a:chExt cx="0" cy="0"/>
+        </a:xfrm>
+      </p:grpSpPr>
+      <p:sp>
+        <p:nvSpPr>
+          <p:cNvPr id="2" name="Titre 1">
+            <a:extLst>
+              <a:ext uri="{FF2B5EF4-FFF2-40B4-BE49-F238E27FC236}">
+                <a16:creationId xmlns:a16="http://schemas.microsoft.com/office/drawing/2014/main" id="{2464C720-2F49-4F44-A7AF-5B130AD59418}"/>
+              </a:ext>
+            </a:extLst>
+          </p:cNvPr>
+          <p:cNvSpPr>
+            <a:spLocks noGrp="1"/>
+          </p:cNvSpPr>
+          <p:nvPr>
+            <p:ph type="title"/>
+          </p:nvPr>
+        </p:nvSpPr>
+        <p:spPr>
+          <a:xfrm>
+            <a:off x="223837" y="365126"/>
+            <a:ext cx="11763375" cy="839788"/>
+          </a:xfrm>
+        </p:spPr>
+        <p:txBody>
+          <a:bodyPr>
+            <a:normAutofit fontScale="90000"/>
+          </a:bodyPr>
+          <a:lstStyle/>
+          <a:p>
+            <a:r>
+              <a:rPr lang="fr-FR" dirty="0"/>
+              <a:t>In </a:t>
+            </a:r>
+            <a:r>
+              <a:rPr lang="fr-FR" dirty="0" err="1"/>
+              <a:t>BigData</a:t>
+            </a:r>
+            <a:r>
+              <a:rPr lang="fr-FR" dirty="0"/>
+              <a:t> Storage : No « </a:t>
+            </a:r>
+            <a:r>
+              <a:rPr lang="fr-FR" dirty="0" err="1"/>
+              <a:t>lseek</a:t>
+            </a:r>
+            <a:r>
+              <a:rPr lang="fr-FR" dirty="0"/>
+              <a:t>() » + « </a:t>
+            </a:r>
+            <a:r>
+              <a:rPr lang="fr-FR" dirty="0" err="1"/>
+              <a:t>writeAt</a:t>
+            </a:r>
+            <a:r>
+              <a:rPr lang="fr-FR" dirty="0"/>
+              <a:t>() » File !!!</a:t>
+            </a:r>
+            <a:br>
+              <a:rPr lang="fr-FR" dirty="0"/>
+            </a:br>
+            <a:r>
+              <a:rPr lang="fr-FR" dirty="0"/>
+              <a:t>(and </a:t>
+            </a:r>
+            <a:r>
+              <a:rPr lang="fr-FR" dirty="0" err="1">
+                <a:sym typeface="Wingdings" panose="05000000000000000000" pitchFamily="2" charset="2"/>
+              </a:rPr>
+              <a:t>DataSet</a:t>
+            </a:r>
+            <a:r>
+              <a:rPr lang="fr-FR" dirty="0">
+                <a:sym typeface="Wingdings" panose="05000000000000000000" pitchFamily="2" charset="2"/>
+              </a:rPr>
+              <a:t> are Immutable )</a:t>
+            </a:r>
+            <a:endParaRPr lang="fr-FR" dirty="0"/>
+          </a:p>
+        </p:txBody>
+      </p:sp>
+      <p:sp>
+        <p:nvSpPr>
+          <p:cNvPr id="4" name="Rectangle : carré corné 3">
+            <a:extLst>
+              <a:ext uri="{FF2B5EF4-FFF2-40B4-BE49-F238E27FC236}">
+                <a16:creationId xmlns:a16="http://schemas.microsoft.com/office/drawing/2014/main" id="{BA5EA948-36BE-4CB2-BA56-1B7C00D3268E}"/>
+              </a:ext>
+            </a:extLst>
+          </p:cNvPr>
+          <p:cNvSpPr/>
+          <p:nvPr/>
+        </p:nvSpPr>
+        <p:spPr>
+          <a:xfrm>
+            <a:off x="6096000" y="2080532"/>
+            <a:ext cx="1428750" cy="2544983"/>
+          </a:xfrm>
+          <a:prstGeom prst="foldedCorner">
+            <a:avLst/>
+          </a:prstGeom>
+          <a:noFill/>
+        </p:spPr>
+        <p:style>
+          <a:lnRef idx="2">
+            <a:schemeClr val="accent1">
+              <a:shade val="50000"/>
+            </a:schemeClr>
+          </a:lnRef>
+          <a:fillRef idx="1">
+            <a:schemeClr val="accent1"/>
+          </a:fillRef>
+          <a:effectRef idx="0">
+            <a:schemeClr val="accent1"/>
+          </a:effectRef>
+          <a:fontRef idx="minor">
+            <a:schemeClr val="lt1"/>
+          </a:fontRef>
+        </p:style>
+        <p:txBody>
+          <a:bodyPr rtlCol="0" anchor="ctr"/>
+          <a:lstStyle/>
+          <a:p>
+            <a:pPr algn="ctr"/>
+            <a:endParaRPr lang="fr-FR" dirty="0"/>
+          </a:p>
+        </p:txBody>
+      </p:sp>
+      <p:sp>
+        <p:nvSpPr>
+          <p:cNvPr id="5" name="Rectangle 4">
+            <a:extLst>
+              <a:ext uri="{FF2B5EF4-FFF2-40B4-BE49-F238E27FC236}">
+                <a16:creationId xmlns:a16="http://schemas.microsoft.com/office/drawing/2014/main" id="{B14F242F-0B45-4D61-A85D-27BF0199DACE}"/>
+              </a:ext>
+            </a:extLst>
+          </p:cNvPr>
+          <p:cNvSpPr/>
+          <p:nvPr/>
+        </p:nvSpPr>
+        <p:spPr>
+          <a:xfrm>
+            <a:off x="6096000" y="2694894"/>
+            <a:ext cx="1428750" cy="709612"/>
+          </a:xfrm>
+          <a:prstGeom prst="rect">
+            <a:avLst/>
+          </a:prstGeom>
+          <a:solidFill>
+            <a:schemeClr val="accent5">
+              <a:lumMod val="20000"/>
+              <a:lumOff val="80000"/>
+            </a:schemeClr>
+          </a:solidFill>
+        </p:spPr>
+        <p:style>
+          <a:lnRef idx="2">
+            <a:schemeClr val="accent1">
+              <a:shade val="50000"/>
+            </a:schemeClr>
+          </a:lnRef>
+          <a:fillRef idx="1">
+            <a:schemeClr val="accent1"/>
+          </a:fillRef>
+          <a:effectRef idx="0">
+            <a:schemeClr val="accent1"/>
+          </a:effectRef>
+          <a:fontRef idx="minor">
+            <a:schemeClr val="lt1"/>
+          </a:fontRef>
+        </p:style>
+        <p:txBody>
+          <a:bodyPr rtlCol="0" anchor="ctr"/>
+          <a:lstStyle/>
+          <a:p>
+            <a:pPr algn="ctr"/>
+            <a:endParaRPr lang="fr-FR"/>
+          </a:p>
+        </p:txBody>
+      </p:sp>
+      <p:sp>
+        <p:nvSpPr>
+          <p:cNvPr id="6" name="Rectangle : coins arrondis 5">
+            <a:extLst>
+              <a:ext uri="{FF2B5EF4-FFF2-40B4-BE49-F238E27FC236}">
+                <a16:creationId xmlns:a16="http://schemas.microsoft.com/office/drawing/2014/main" id="{EDA79FB3-CA90-47EB-BF12-375C8CDE8F01}"/>
+              </a:ext>
+            </a:extLst>
+          </p:cNvPr>
+          <p:cNvSpPr/>
+          <p:nvPr/>
+        </p:nvSpPr>
+        <p:spPr>
+          <a:xfrm>
+            <a:off x="6305550" y="2882089"/>
+            <a:ext cx="714375" cy="261937"/>
+          </a:xfrm>
+          <a:prstGeom prst="roundRect">
+            <a:avLst/>
+          </a:prstGeom>
+        </p:spPr>
+        <p:style>
+          <a:lnRef idx="2">
+            <a:schemeClr val="accent1">
+              <a:shade val="50000"/>
+            </a:schemeClr>
+          </a:lnRef>
+          <a:fillRef idx="1">
+            <a:schemeClr val="accent1"/>
+          </a:fillRef>
+          <a:effectRef idx="0">
+            <a:schemeClr val="accent1"/>
+          </a:effectRef>
+          <a:fontRef idx="minor">
+            <a:schemeClr val="lt1"/>
+          </a:fontRef>
+        </p:style>
+        <p:txBody>
+          <a:bodyPr rtlCol="0" anchor="ctr"/>
+          <a:lstStyle/>
+          <a:p>
+            <a:pPr algn="ctr"/>
+            <a:endParaRPr lang="fr-FR"/>
+          </a:p>
+        </p:txBody>
+      </p:sp>
+      <p:sp>
+        <p:nvSpPr>
+          <p:cNvPr id="8" name="Flèche : courbe vers le bas 7">
+            <a:extLst>
+              <a:ext uri="{FF2B5EF4-FFF2-40B4-BE49-F238E27FC236}">
+                <a16:creationId xmlns:a16="http://schemas.microsoft.com/office/drawing/2014/main" id="{1B739F51-6F7A-4EA1-AD5A-9D753A4A183B}"/>
+              </a:ext>
+            </a:extLst>
+          </p:cNvPr>
+          <p:cNvSpPr/>
+          <p:nvPr/>
+        </p:nvSpPr>
+        <p:spPr>
+          <a:xfrm rot="2623080">
+            <a:off x="7183919" y="2820101"/>
+            <a:ext cx="289624" cy="264378"/>
+          </a:xfrm>
+          <a:prstGeom prst="curvedDownArrow">
+            <a:avLst/>
+          </a:prstGeom>
+          <a:solidFill>
+            <a:srgbClr val="FF0000"/>
+          </a:solidFill>
+        </p:spPr>
+        <p:style>
+          <a:lnRef idx="2">
+            <a:schemeClr val="accent1">
+              <a:shade val="50000"/>
+            </a:schemeClr>
+          </a:lnRef>
+          <a:fillRef idx="1">
+            <a:schemeClr val="accent1"/>
+          </a:fillRef>
+          <a:effectRef idx="0">
+            <a:schemeClr val="accent1"/>
+          </a:effectRef>
+          <a:fontRef idx="minor">
+            <a:schemeClr val="lt1"/>
+          </a:fontRef>
+        </p:style>
+        <p:txBody>
+          <a:bodyPr rtlCol="0" anchor="ctr"/>
+          <a:lstStyle/>
+          <a:p>
+            <a:pPr algn="ctr"/>
+            <a:endParaRPr lang="fr-FR">
+              <a:solidFill>
+                <a:schemeClr val="tx1"/>
+              </a:solidFill>
+            </a:endParaRPr>
+          </a:p>
+        </p:txBody>
+      </p:sp>
+      <p:sp>
+        <p:nvSpPr>
+          <p:cNvPr id="9" name="ZoneTexte 8">
+            <a:extLst>
+              <a:ext uri="{FF2B5EF4-FFF2-40B4-BE49-F238E27FC236}">
+                <a16:creationId xmlns:a16="http://schemas.microsoft.com/office/drawing/2014/main" id="{46D50186-4D97-469F-AD27-E090AA9F0D29}"/>
+              </a:ext>
+            </a:extLst>
+          </p:cNvPr>
+          <p:cNvSpPr txBox="1"/>
+          <p:nvPr/>
+        </p:nvSpPr>
+        <p:spPr>
+          <a:xfrm>
+            <a:off x="2643904" y="2652937"/>
+            <a:ext cx="2577885" cy="646331"/>
+          </a:xfrm>
+          <a:prstGeom prst="rect">
+            <a:avLst/>
+          </a:prstGeom>
+          <a:noFill/>
+        </p:spPr>
+        <p:txBody>
+          <a:bodyPr wrap="none" rtlCol="0">
+            <a:spAutoFit/>
+          </a:bodyPr>
+          <a:lstStyle/>
+          <a:p>
+            <a:r>
+              <a:rPr lang="fr-FR" dirty="0"/>
+              <a:t>CAN NOT </a:t>
+            </a:r>
+            <a:r>
+              <a:rPr lang="fr-FR" dirty="0" err="1"/>
+              <a:t>Modify</a:t>
+            </a:r>
+            <a:r>
+              <a:rPr lang="fr-FR" dirty="0"/>
+              <a:t> </a:t>
+            </a:r>
+            <a:r>
+              <a:rPr lang="fr-FR" dirty="0" err="1"/>
+              <a:t>directly</a:t>
+            </a:r>
+            <a:r>
+              <a:rPr lang="fr-FR" dirty="0"/>
+              <a:t> </a:t>
+            </a:r>
+          </a:p>
+          <a:p>
+            <a:r>
+              <a:rPr lang="fr-FR" dirty="0"/>
+              <a:t>a File in the « middle »</a:t>
+            </a:r>
+          </a:p>
+        </p:txBody>
+      </p:sp>
+      <p:sp>
+        <p:nvSpPr>
+          <p:cNvPr id="10" name="Interdiction 9">
+            <a:extLst>
+              <a:ext uri="{FF2B5EF4-FFF2-40B4-BE49-F238E27FC236}">
+                <a16:creationId xmlns:a16="http://schemas.microsoft.com/office/drawing/2014/main" id="{3944CCDC-A695-430D-8344-338A58A91084}"/>
+              </a:ext>
+            </a:extLst>
+          </p:cNvPr>
+          <p:cNvSpPr/>
+          <p:nvPr/>
+        </p:nvSpPr>
+        <p:spPr>
+          <a:xfrm>
+            <a:off x="7234237" y="2526150"/>
+            <a:ext cx="480256" cy="461038"/>
+          </a:xfrm>
+          <a:prstGeom prst="noSmoking">
+            <a:avLst>
+              <a:gd name="adj" fmla="val 14383"/>
+            </a:avLst>
+          </a:prstGeom>
+          <a:solidFill>
+            <a:srgbClr val="FF0000"/>
+          </a:solidFill>
+        </p:spPr>
+        <p:style>
+          <a:lnRef idx="2">
+            <a:schemeClr val="accent1">
+              <a:shade val="50000"/>
+            </a:schemeClr>
+          </a:lnRef>
+          <a:fillRef idx="1">
+            <a:schemeClr val="accent1"/>
+          </a:fillRef>
+          <a:effectRef idx="0">
+            <a:schemeClr val="accent1"/>
+          </a:effectRef>
+          <a:fontRef idx="minor">
+            <a:schemeClr val="lt1"/>
+          </a:fontRef>
+        </p:style>
+        <p:txBody>
+          <a:bodyPr rtlCol="0" anchor="ctr"/>
+          <a:lstStyle/>
+          <a:p>
+            <a:pPr algn="ctr"/>
+            <a:endParaRPr lang="fr-FR">
+              <a:solidFill>
+                <a:schemeClr val="tx1"/>
+              </a:solidFill>
+            </a:endParaRPr>
+          </a:p>
+        </p:txBody>
+      </p:sp>
+      <p:sp>
+        <p:nvSpPr>
+          <p:cNvPr id="11" name="Flèche : droite 10">
+            <a:extLst>
+              <a:ext uri="{FF2B5EF4-FFF2-40B4-BE49-F238E27FC236}">
+                <a16:creationId xmlns:a16="http://schemas.microsoft.com/office/drawing/2014/main" id="{17ED7346-6934-4404-AA27-55CA2326BBC0}"/>
+              </a:ext>
+            </a:extLst>
+          </p:cNvPr>
+          <p:cNvSpPr/>
+          <p:nvPr/>
+        </p:nvSpPr>
+        <p:spPr>
+          <a:xfrm>
+            <a:off x="5248275" y="4390344"/>
+            <a:ext cx="686587" cy="397096"/>
+          </a:xfrm>
+          <a:prstGeom prst="rightArrow">
+            <a:avLst/>
+          </a:prstGeom>
+        </p:spPr>
+        <p:style>
+          <a:lnRef idx="2">
+            <a:schemeClr val="accent1">
+              <a:shade val="50000"/>
+            </a:schemeClr>
+          </a:lnRef>
+          <a:fillRef idx="1">
+            <a:schemeClr val="accent1"/>
+          </a:fillRef>
+          <a:effectRef idx="0">
+            <a:schemeClr val="accent1"/>
+          </a:effectRef>
+          <a:fontRef idx="minor">
+            <a:schemeClr val="lt1"/>
+          </a:fontRef>
+        </p:style>
+        <p:txBody>
+          <a:bodyPr rtlCol="0" anchor="ctr"/>
+          <a:lstStyle/>
+          <a:p>
+            <a:pPr algn="ctr"/>
+            <a:endParaRPr lang="fr-FR"/>
+          </a:p>
+        </p:txBody>
+      </p:sp>
+      <p:sp>
+        <p:nvSpPr>
+          <p:cNvPr id="12" name="ZoneTexte 11">
+            <a:extLst>
+              <a:ext uri="{FF2B5EF4-FFF2-40B4-BE49-F238E27FC236}">
+                <a16:creationId xmlns:a16="http://schemas.microsoft.com/office/drawing/2014/main" id="{6436B590-D77A-417C-8236-2B7ACE786497}"/>
+              </a:ext>
+            </a:extLst>
+          </p:cNvPr>
+          <p:cNvSpPr txBox="1"/>
+          <p:nvPr/>
+        </p:nvSpPr>
+        <p:spPr>
+          <a:xfrm>
+            <a:off x="1709737" y="4390344"/>
+            <a:ext cx="3443288" cy="646331"/>
+          </a:xfrm>
+          <a:prstGeom prst="rect">
+            <a:avLst/>
+          </a:prstGeom>
+          <a:noFill/>
+        </p:spPr>
+        <p:txBody>
+          <a:bodyPr wrap="square" rtlCol="0">
+            <a:spAutoFit/>
+          </a:bodyPr>
+          <a:lstStyle/>
+          <a:p>
+            <a:r>
+              <a:rPr lang="fr-FR" dirty="0"/>
+              <a:t>CAN </a:t>
+            </a:r>
+            <a:r>
+              <a:rPr lang="fr-FR" dirty="0" err="1"/>
+              <a:t>Only</a:t>
+            </a:r>
+            <a:r>
+              <a:rPr lang="fr-FR" dirty="0"/>
+              <a:t> « Write Append » to File,  </a:t>
+            </a:r>
+          </a:p>
+          <a:p>
+            <a:r>
+              <a:rPr lang="fr-FR" dirty="0"/>
+              <a:t>or </a:t>
+            </a:r>
+            <a:r>
+              <a:rPr lang="fr-FR" dirty="0" err="1"/>
+              <a:t>Delete+RE-Create</a:t>
+            </a:r>
+            <a:r>
+              <a:rPr lang="fr-FR" dirty="0"/>
+              <a:t> </a:t>
+            </a:r>
+            <a:r>
+              <a:rPr lang="fr-FR" dirty="0" err="1"/>
+              <a:t>it</a:t>
+            </a:r>
+            <a:r>
+              <a:rPr lang="fr-FR" dirty="0"/>
+              <a:t> </a:t>
+            </a:r>
+            <a:r>
+              <a:rPr lang="fr-FR" dirty="0" err="1"/>
+              <a:t>from</a:t>
+            </a:r>
+            <a:r>
+              <a:rPr lang="fr-FR" dirty="0"/>
+              <a:t> 0!</a:t>
+            </a:r>
+          </a:p>
+        </p:txBody>
+      </p:sp>
+    </p:spTree>
+    <p:extLst>
+      <p:ext uri="{BB962C8B-B14F-4D97-AF65-F5344CB8AC3E}">
+        <p14:creationId xmlns:p14="http://schemas.microsoft.com/office/powerpoint/2010/main" val="3072902844"/>
+      </p:ext>
+    </p:extLst>
+  </p:cSld>
+  <p:clrMapOvr>
+    <a:masterClrMapping/>
+  </p:clrMapOvr>
+</p:sld>
+</file>
+
+<file path=ppt/slides/slide14.xml><?xml version="1.0" encoding="utf-8"?>
+<p:sld xmlns:a="http://schemas.openxmlformats.org/drawingml/2006/main" xmlns:r="http://schemas.openxmlformats.org/officeDocument/2006/relationships" xmlns:p="http://schemas.openxmlformats.org/presentationml/2006/main">
+  <p:cSld>
+    <p:spTree>
+      <p:nvGrpSpPr>
+        <p:cNvPr id="1" name=""/>
+        <p:cNvGrpSpPr/>
+        <p:nvPr/>
+      </p:nvGrpSpPr>
+      <p:grpSpPr>
+        <a:xfrm>
+          <a:off x="0" y="0"/>
+          <a:ext cx="0" cy="0"/>
+          <a:chOff x="0" y="0"/>
+          <a:chExt cx="0" cy="0"/>
+        </a:xfrm>
+      </p:grpSpPr>
+      <p:sp>
+        <p:nvSpPr>
+          <p:cNvPr id="2" name="Titre 1">
+            <a:extLst>
+              <a:ext uri="{FF2B5EF4-FFF2-40B4-BE49-F238E27FC236}">
+                <a16:creationId xmlns:a16="http://schemas.microsoft.com/office/drawing/2014/main" id="{7BFF5364-E3EF-4EAE-95FD-A499370D2993}"/>
+              </a:ext>
+            </a:extLst>
+          </p:cNvPr>
+          <p:cNvSpPr>
+            <a:spLocks noGrp="1"/>
+          </p:cNvSpPr>
+          <p:nvPr>
+            <p:ph type="title"/>
+          </p:nvPr>
+        </p:nvSpPr>
+        <p:spPr/>
+        <p:txBody>
+          <a:bodyPr/>
+          <a:lstStyle/>
+          <a:p>
+            <a:r>
+              <a:rPr lang="fr-FR" dirty="0"/>
+              <a:t>Notice… It </a:t>
+            </a:r>
+            <a:r>
+              <a:rPr lang="fr-FR" dirty="0" err="1"/>
+              <a:t>is</a:t>
+            </a:r>
+            <a:r>
+              <a:rPr lang="fr-FR" dirty="0"/>
+              <a:t> </a:t>
+            </a:r>
+            <a:r>
+              <a:rPr lang="fr-FR" dirty="0" err="1"/>
+              <a:t>always</a:t>
+            </a:r>
+            <a:r>
+              <a:rPr lang="fr-FR" dirty="0"/>
+              <a:t> possible to </a:t>
+            </a:r>
+            <a:r>
+              <a:rPr lang="fr-FR" dirty="0" err="1"/>
+              <a:t>readAt</a:t>
+            </a:r>
+            <a:r>
+              <a:rPr lang="fr-FR" dirty="0"/>
+              <a:t>() File</a:t>
+            </a:r>
+          </a:p>
+        </p:txBody>
+      </p:sp>
+      <p:sp>
+        <p:nvSpPr>
+          <p:cNvPr id="4" name="Rectangle : carré corné 3">
+            <a:extLst>
+              <a:ext uri="{FF2B5EF4-FFF2-40B4-BE49-F238E27FC236}">
+                <a16:creationId xmlns:a16="http://schemas.microsoft.com/office/drawing/2014/main" id="{A2790C33-6E55-4966-B2E7-7544B1F8F311}"/>
+              </a:ext>
+            </a:extLst>
+          </p:cNvPr>
+          <p:cNvSpPr/>
+          <p:nvPr/>
+        </p:nvSpPr>
+        <p:spPr>
+          <a:xfrm>
+            <a:off x="3902528" y="2412546"/>
+            <a:ext cx="1428750" cy="2544983"/>
+          </a:xfrm>
+          <a:prstGeom prst="foldedCorner">
+            <a:avLst/>
+          </a:prstGeom>
+          <a:noFill/>
+        </p:spPr>
+        <p:style>
+          <a:lnRef idx="2">
+            <a:schemeClr val="accent1">
+              <a:shade val="50000"/>
+            </a:schemeClr>
+          </a:lnRef>
+          <a:fillRef idx="1">
+            <a:schemeClr val="accent1"/>
+          </a:fillRef>
+          <a:effectRef idx="0">
+            <a:schemeClr val="accent1"/>
+          </a:effectRef>
+          <a:fontRef idx="minor">
+            <a:schemeClr val="lt1"/>
+          </a:fontRef>
+        </p:style>
+        <p:txBody>
+          <a:bodyPr rtlCol="0" anchor="ctr"/>
+          <a:lstStyle/>
+          <a:p>
+            <a:pPr algn="ctr"/>
+            <a:endParaRPr lang="fr-FR" dirty="0"/>
+          </a:p>
+        </p:txBody>
+      </p:sp>
+      <p:sp>
+        <p:nvSpPr>
+          <p:cNvPr id="5" name="Rectangle 4">
+            <a:extLst>
+              <a:ext uri="{FF2B5EF4-FFF2-40B4-BE49-F238E27FC236}">
+                <a16:creationId xmlns:a16="http://schemas.microsoft.com/office/drawing/2014/main" id="{33AA4FEA-DA73-44A2-A3F2-528D15E625C0}"/>
+              </a:ext>
+            </a:extLst>
+          </p:cNvPr>
+          <p:cNvSpPr/>
+          <p:nvPr/>
+        </p:nvSpPr>
+        <p:spPr>
+          <a:xfrm>
+            <a:off x="3902528" y="3026908"/>
+            <a:ext cx="1428750" cy="709612"/>
+          </a:xfrm>
+          <a:prstGeom prst="rect">
+            <a:avLst/>
+          </a:prstGeom>
+          <a:solidFill>
+            <a:schemeClr val="accent5">
+              <a:lumMod val="20000"/>
+              <a:lumOff val="80000"/>
+            </a:schemeClr>
+          </a:solidFill>
+        </p:spPr>
+        <p:style>
+          <a:lnRef idx="2">
+            <a:schemeClr val="accent1">
+              <a:shade val="50000"/>
+            </a:schemeClr>
+          </a:lnRef>
+          <a:fillRef idx="1">
+            <a:schemeClr val="accent1"/>
+          </a:fillRef>
+          <a:effectRef idx="0">
+            <a:schemeClr val="accent1"/>
+          </a:effectRef>
+          <a:fontRef idx="minor">
+            <a:schemeClr val="lt1"/>
+          </a:fontRef>
+        </p:style>
+        <p:txBody>
+          <a:bodyPr rtlCol="0" anchor="ctr"/>
+          <a:lstStyle/>
+          <a:p>
+            <a:pPr algn="ctr"/>
+            <a:endParaRPr lang="fr-FR"/>
+          </a:p>
+        </p:txBody>
+      </p:sp>
+      <p:sp>
+        <p:nvSpPr>
+          <p:cNvPr id="9" name="Rectangle 8">
+            <a:extLst>
+              <a:ext uri="{FF2B5EF4-FFF2-40B4-BE49-F238E27FC236}">
+                <a16:creationId xmlns:a16="http://schemas.microsoft.com/office/drawing/2014/main" id="{DAF84723-F20A-46DC-A0D9-75134868A773}"/>
+              </a:ext>
+            </a:extLst>
+          </p:cNvPr>
+          <p:cNvSpPr/>
+          <p:nvPr/>
+        </p:nvSpPr>
+        <p:spPr>
+          <a:xfrm>
+            <a:off x="7092043" y="3026908"/>
+            <a:ext cx="1428750" cy="709612"/>
+          </a:xfrm>
+          <a:prstGeom prst="rect">
+            <a:avLst/>
+          </a:prstGeom>
+          <a:solidFill>
+            <a:schemeClr val="accent5">
+              <a:lumMod val="20000"/>
+              <a:lumOff val="80000"/>
+            </a:schemeClr>
+          </a:solidFill>
+        </p:spPr>
+        <p:style>
+          <a:lnRef idx="2">
+            <a:schemeClr val="accent1">
+              <a:shade val="50000"/>
+            </a:schemeClr>
+          </a:lnRef>
+          <a:fillRef idx="1">
+            <a:schemeClr val="accent1"/>
+          </a:fillRef>
+          <a:effectRef idx="0">
+            <a:schemeClr val="accent1"/>
+          </a:effectRef>
+          <a:fontRef idx="minor">
+            <a:schemeClr val="lt1"/>
+          </a:fontRef>
+        </p:style>
+        <p:txBody>
+          <a:bodyPr rtlCol="0" anchor="ctr"/>
+          <a:lstStyle/>
+          <a:p>
+            <a:pPr algn="ctr"/>
+            <a:endParaRPr lang="fr-FR"/>
+          </a:p>
+        </p:txBody>
+      </p:sp>
+      <p:sp>
+        <p:nvSpPr>
+          <p:cNvPr id="10" name="Flèche : droite 9">
+            <a:extLst>
+              <a:ext uri="{FF2B5EF4-FFF2-40B4-BE49-F238E27FC236}">
+                <a16:creationId xmlns:a16="http://schemas.microsoft.com/office/drawing/2014/main" id="{1B4AC3FE-6CDF-41F6-9102-73148D0541BA}"/>
+              </a:ext>
+            </a:extLst>
+          </p:cNvPr>
+          <p:cNvSpPr/>
+          <p:nvPr/>
+        </p:nvSpPr>
+        <p:spPr>
+          <a:xfrm>
+            <a:off x="5781675" y="3202439"/>
+            <a:ext cx="640896" cy="319089"/>
+          </a:xfrm>
+          <a:prstGeom prst="rightArrow">
+            <a:avLst/>
+          </a:prstGeom>
+        </p:spPr>
+        <p:style>
+          <a:lnRef idx="2">
+            <a:schemeClr val="accent1">
+              <a:shade val="50000"/>
+            </a:schemeClr>
+          </a:lnRef>
+          <a:fillRef idx="1">
+            <a:schemeClr val="accent1"/>
+          </a:fillRef>
+          <a:effectRef idx="0">
+            <a:schemeClr val="accent1"/>
+          </a:effectRef>
+          <a:fontRef idx="minor">
+            <a:schemeClr val="lt1"/>
+          </a:fontRef>
+        </p:style>
+        <p:txBody>
+          <a:bodyPr rtlCol="0" anchor="ctr"/>
+          <a:lstStyle/>
+          <a:p>
+            <a:pPr algn="ctr"/>
+            <a:endParaRPr lang="fr-FR"/>
+          </a:p>
+        </p:txBody>
+      </p:sp>
+      <p:sp>
+        <p:nvSpPr>
+          <p:cNvPr id="11" name="ZoneTexte 10">
+            <a:extLst>
+              <a:ext uri="{FF2B5EF4-FFF2-40B4-BE49-F238E27FC236}">
+                <a16:creationId xmlns:a16="http://schemas.microsoft.com/office/drawing/2014/main" id="{CC0F6741-DB00-4D0E-9C44-202A55F7EB0F}"/>
+              </a:ext>
+            </a:extLst>
+          </p:cNvPr>
+          <p:cNvSpPr txBox="1"/>
+          <p:nvPr/>
+        </p:nvSpPr>
+        <p:spPr>
+          <a:xfrm>
+            <a:off x="5529943" y="2657576"/>
+            <a:ext cx="4131129" cy="369332"/>
+          </a:xfrm>
+          <a:prstGeom prst="rect">
+            <a:avLst/>
+          </a:prstGeom>
+          <a:noFill/>
+        </p:spPr>
+        <p:txBody>
+          <a:bodyPr wrap="square" rtlCol="0">
+            <a:spAutoFit/>
+          </a:bodyPr>
+          <a:lstStyle/>
+          <a:p>
+            <a:r>
+              <a:rPr lang="fr-FR" dirty="0" err="1"/>
+              <a:t>readAt</a:t>
+            </a:r>
+            <a:r>
+              <a:rPr lang="fr-FR" dirty="0"/>
+              <a:t>(position, </a:t>
+            </a:r>
+            <a:r>
+              <a:rPr lang="fr-FR" dirty="0" err="1"/>
+              <a:t>len</a:t>
+            </a:r>
+            <a:r>
+              <a:rPr lang="fr-FR" dirty="0"/>
+              <a:t>)</a:t>
+            </a:r>
+          </a:p>
+        </p:txBody>
+      </p:sp>
+    </p:spTree>
+    <p:extLst>
+      <p:ext uri="{BB962C8B-B14F-4D97-AF65-F5344CB8AC3E}">
+        <p14:creationId xmlns:p14="http://schemas.microsoft.com/office/powerpoint/2010/main" val="1774987445"/>
+      </p:ext>
+    </p:extLst>
+  </p:cSld>
+  <p:clrMapOvr>
+    <a:masterClrMapping/>
+  </p:clrMapOvr>
+</p:sld>
+</file>
+
+<file path=ppt/slides/slide15.xml><?xml version="1.0" encoding="utf-8"?>
+<p:sld xmlns:a="http://schemas.openxmlformats.org/drawingml/2006/main" xmlns:r="http://schemas.openxmlformats.org/officeDocument/2006/relationships" xmlns:p="http://schemas.openxmlformats.org/presentationml/2006/main">
+  <p:cSld>
+    <p:spTree>
+      <p:nvGrpSpPr>
+        <p:cNvPr id="1" name=""/>
+        <p:cNvGrpSpPr/>
+        <p:nvPr/>
+      </p:nvGrpSpPr>
+      <p:grpSpPr>
+        <a:xfrm>
+          <a:off x="0" y="0"/>
+          <a:ext cx="0" cy="0"/>
+          <a:chOff x="0" y="0"/>
+          <a:chExt cx="0" cy="0"/>
+        </a:xfrm>
+      </p:grpSpPr>
+      <p:sp>
+        <p:nvSpPr>
+          <p:cNvPr id="2" name="Titre 1">
+            <a:extLst>
+              <a:ext uri="{FF2B5EF4-FFF2-40B4-BE49-F238E27FC236}">
+                <a16:creationId xmlns:a16="http://schemas.microsoft.com/office/drawing/2014/main" id="{7BFF5364-E3EF-4EAE-95FD-A499370D2993}"/>
+              </a:ext>
+            </a:extLst>
+          </p:cNvPr>
+          <p:cNvSpPr>
+            <a:spLocks noGrp="1"/>
+          </p:cNvSpPr>
+          <p:nvPr>
+            <p:ph type="title"/>
+          </p:nvPr>
+        </p:nvSpPr>
+        <p:spPr>
+          <a:xfrm>
+            <a:off x="838200" y="54591"/>
+            <a:ext cx="10515600" cy="1636097"/>
+          </a:xfrm>
+        </p:spPr>
+        <p:txBody>
+          <a:bodyPr>
+            <a:normAutofit fontScale="90000"/>
+          </a:bodyPr>
+          <a:lstStyle/>
+          <a:p>
+            <a:r>
+              <a:rPr lang="fr-FR" dirty="0"/>
+              <a:t>Writer : can </a:t>
+            </a:r>
+            <a:r>
+              <a:rPr lang="fr-FR" dirty="0" err="1"/>
+              <a:t>only</a:t>
+            </a:r>
+            <a:r>
+              <a:rPr lang="fr-FR" dirty="0"/>
+              <a:t> </a:t>
+            </a:r>
+            <a:r>
+              <a:rPr lang="fr-FR" dirty="0" err="1"/>
+              <a:t>writeAppend</a:t>
+            </a:r>
+            <a:r>
+              <a:rPr lang="fr-FR" dirty="0"/>
+              <a:t> </a:t>
+            </a:r>
+            <a:br>
+              <a:rPr lang="fr-FR" dirty="0"/>
+            </a:br>
+            <a:r>
+              <a:rPr lang="fr-FR" dirty="0" err="1"/>
+              <a:t>into</a:t>
+            </a:r>
+            <a:r>
+              <a:rPr lang="fr-FR" dirty="0"/>
+              <a:t> </a:t>
+            </a:r>
+            <a:r>
+              <a:rPr lang="fr-FR" dirty="0" err="1"/>
+              <a:t>created</a:t>
+            </a:r>
+            <a:r>
+              <a:rPr lang="fr-FR" dirty="0"/>
+              <a:t> </a:t>
+            </a:r>
+            <a:r>
+              <a:rPr lang="fr-FR" dirty="0" err="1"/>
+              <a:t>temporary</a:t>
+            </a:r>
+            <a:r>
+              <a:rPr lang="fr-FR" dirty="0"/>
+              <a:t> « </a:t>
+            </a:r>
+            <a:r>
+              <a:rPr lang="fr-FR" dirty="0" err="1"/>
+              <a:t>opened</a:t>
+            </a:r>
+            <a:r>
+              <a:rPr lang="fr-FR" dirty="0"/>
+              <a:t>-file »</a:t>
+            </a:r>
+            <a:br>
+              <a:rPr lang="fr-FR" dirty="0"/>
+            </a:br>
+            <a:r>
+              <a:rPr lang="fr-FR" dirty="0"/>
+              <a:t>THEN Flush</a:t>
+            </a:r>
+          </a:p>
+        </p:txBody>
+      </p:sp>
+      <p:sp>
+        <p:nvSpPr>
+          <p:cNvPr id="4" name="Rectangle : carré corné 3">
+            <a:extLst>
+              <a:ext uri="{FF2B5EF4-FFF2-40B4-BE49-F238E27FC236}">
+                <a16:creationId xmlns:a16="http://schemas.microsoft.com/office/drawing/2014/main" id="{A2790C33-6E55-4966-B2E7-7544B1F8F311}"/>
+              </a:ext>
+            </a:extLst>
+          </p:cNvPr>
+          <p:cNvSpPr/>
+          <p:nvPr/>
+        </p:nvSpPr>
+        <p:spPr>
+          <a:xfrm>
+            <a:off x="3902528" y="2412546"/>
+            <a:ext cx="1428750" cy="2544983"/>
+          </a:xfrm>
+          <a:prstGeom prst="foldedCorner">
+            <a:avLst>
+              <a:gd name="adj" fmla="val 23143"/>
+            </a:avLst>
+          </a:prstGeom>
+          <a:pattFill prst="wdUpDiag">
+            <a:fgClr>
+              <a:schemeClr val="accent1"/>
+            </a:fgClr>
+            <a:bgClr>
+              <a:schemeClr val="bg1"/>
+            </a:bgClr>
+          </a:pattFill>
+        </p:spPr>
+        <p:style>
+          <a:lnRef idx="2">
+            <a:schemeClr val="accent1">
+              <a:shade val="50000"/>
+            </a:schemeClr>
+          </a:lnRef>
+          <a:fillRef idx="1">
+            <a:schemeClr val="accent1"/>
+          </a:fillRef>
+          <a:effectRef idx="0">
+            <a:schemeClr val="accent1"/>
+          </a:effectRef>
+          <a:fontRef idx="minor">
+            <a:schemeClr val="lt1"/>
+          </a:fontRef>
+        </p:style>
+        <p:txBody>
+          <a:bodyPr rtlCol="0" anchor="ctr"/>
+          <a:lstStyle/>
+          <a:p>
+            <a:pPr algn="ctr"/>
+            <a:endParaRPr lang="fr-FR" dirty="0"/>
+          </a:p>
+        </p:txBody>
+      </p:sp>
+      <p:sp>
+        <p:nvSpPr>
+          <p:cNvPr id="5" name="Rectangle 4">
+            <a:extLst>
+              <a:ext uri="{FF2B5EF4-FFF2-40B4-BE49-F238E27FC236}">
+                <a16:creationId xmlns:a16="http://schemas.microsoft.com/office/drawing/2014/main" id="{33AA4FEA-DA73-44A2-A3F2-528D15E625C0}"/>
+              </a:ext>
+            </a:extLst>
+          </p:cNvPr>
+          <p:cNvSpPr/>
+          <p:nvPr/>
+        </p:nvSpPr>
+        <p:spPr>
+          <a:xfrm>
+            <a:off x="1427388" y="4957528"/>
+            <a:ext cx="1428750" cy="709612"/>
+          </a:xfrm>
+          <a:prstGeom prst="rect">
+            <a:avLst/>
+          </a:prstGeom>
+          <a:solidFill>
+            <a:schemeClr val="accent5">
+              <a:lumMod val="20000"/>
+              <a:lumOff val="80000"/>
+            </a:schemeClr>
+          </a:solidFill>
+        </p:spPr>
+        <p:style>
+          <a:lnRef idx="2">
+            <a:schemeClr val="accent1">
+              <a:shade val="50000"/>
+            </a:schemeClr>
+          </a:lnRef>
+          <a:fillRef idx="1">
+            <a:schemeClr val="accent1"/>
+          </a:fillRef>
+          <a:effectRef idx="0">
+            <a:schemeClr val="accent1"/>
+          </a:effectRef>
+          <a:fontRef idx="minor">
+            <a:schemeClr val="lt1"/>
+          </a:fontRef>
+        </p:style>
+        <p:txBody>
+          <a:bodyPr rtlCol="0" anchor="ctr"/>
+          <a:lstStyle/>
+          <a:p>
+            <a:pPr algn="ctr"/>
+            <a:endParaRPr lang="fr-FR"/>
+          </a:p>
+        </p:txBody>
+      </p:sp>
+      <p:sp>
+        <p:nvSpPr>
+          <p:cNvPr id="10" name="Flèche : droite 9">
+            <a:extLst>
+              <a:ext uri="{FF2B5EF4-FFF2-40B4-BE49-F238E27FC236}">
+                <a16:creationId xmlns:a16="http://schemas.microsoft.com/office/drawing/2014/main" id="{1B4AC3FE-6CDF-41F6-9102-73148D0541BA}"/>
+              </a:ext>
+            </a:extLst>
+          </p:cNvPr>
+          <p:cNvSpPr/>
+          <p:nvPr/>
+        </p:nvSpPr>
+        <p:spPr>
+          <a:xfrm>
+            <a:off x="3062967" y="4797984"/>
+            <a:ext cx="640896" cy="319089"/>
+          </a:xfrm>
+          <a:prstGeom prst="rightArrow">
+            <a:avLst/>
+          </a:prstGeom>
+        </p:spPr>
+        <p:style>
+          <a:lnRef idx="2">
+            <a:schemeClr val="accent1">
+              <a:shade val="50000"/>
+            </a:schemeClr>
+          </a:lnRef>
+          <a:fillRef idx="1">
+            <a:schemeClr val="accent1"/>
+          </a:fillRef>
+          <a:effectRef idx="0">
+            <a:schemeClr val="accent1"/>
+          </a:effectRef>
+          <a:fontRef idx="minor">
+            <a:schemeClr val="lt1"/>
+          </a:fontRef>
+        </p:style>
+        <p:txBody>
+          <a:bodyPr rtlCol="0" anchor="ctr"/>
+          <a:lstStyle/>
+          <a:p>
+            <a:pPr algn="ctr"/>
+            <a:endParaRPr lang="fr-FR"/>
+          </a:p>
+        </p:txBody>
+      </p:sp>
+      <p:sp>
+        <p:nvSpPr>
+          <p:cNvPr id="11" name="ZoneTexte 10">
+            <a:extLst>
+              <a:ext uri="{FF2B5EF4-FFF2-40B4-BE49-F238E27FC236}">
+                <a16:creationId xmlns:a16="http://schemas.microsoft.com/office/drawing/2014/main" id="{CC0F6741-DB00-4D0E-9C44-202A55F7EB0F}"/>
+              </a:ext>
+            </a:extLst>
+          </p:cNvPr>
+          <p:cNvSpPr txBox="1"/>
+          <p:nvPr/>
+        </p:nvSpPr>
+        <p:spPr>
+          <a:xfrm>
+            <a:off x="2050595" y="4559323"/>
+            <a:ext cx="1710419" cy="369332"/>
+          </a:xfrm>
+          <a:prstGeom prst="rect">
+            <a:avLst/>
+          </a:prstGeom>
+          <a:noFill/>
+        </p:spPr>
+        <p:txBody>
+          <a:bodyPr wrap="square" rtlCol="0">
+            <a:spAutoFit/>
+          </a:bodyPr>
+          <a:lstStyle/>
+          <a:p>
+            <a:r>
+              <a:rPr lang="fr-FR" dirty="0" err="1"/>
+              <a:t>writeAppend</a:t>
+            </a:r>
+            <a:r>
+              <a:rPr lang="fr-FR" dirty="0"/>
+              <a:t>()</a:t>
+            </a:r>
+          </a:p>
+        </p:txBody>
+      </p:sp>
+      <p:sp>
+        <p:nvSpPr>
+          <p:cNvPr id="8" name="Flèche : droite 7">
+            <a:extLst>
+              <a:ext uri="{FF2B5EF4-FFF2-40B4-BE49-F238E27FC236}">
+                <a16:creationId xmlns:a16="http://schemas.microsoft.com/office/drawing/2014/main" id="{9E7B56E1-868C-47B8-BA2E-312C8B33E9FA}"/>
+              </a:ext>
+            </a:extLst>
+          </p:cNvPr>
+          <p:cNvSpPr/>
+          <p:nvPr/>
+        </p:nvSpPr>
+        <p:spPr>
+          <a:xfrm>
+            <a:off x="3062967" y="6035382"/>
+            <a:ext cx="640896" cy="319089"/>
+          </a:xfrm>
+          <a:prstGeom prst="rightArrow">
+            <a:avLst/>
+          </a:prstGeom>
+        </p:spPr>
+        <p:style>
+          <a:lnRef idx="2">
+            <a:schemeClr val="accent1">
+              <a:shade val="50000"/>
+            </a:schemeClr>
+          </a:lnRef>
+          <a:fillRef idx="1">
+            <a:schemeClr val="accent1"/>
+          </a:fillRef>
+          <a:effectRef idx="0">
+            <a:schemeClr val="accent1"/>
+          </a:effectRef>
+          <a:fontRef idx="minor">
+            <a:schemeClr val="lt1"/>
+          </a:fontRef>
+        </p:style>
+        <p:txBody>
+          <a:bodyPr rtlCol="0" anchor="ctr"/>
+          <a:lstStyle/>
+          <a:p>
+            <a:pPr algn="ctr"/>
+            <a:endParaRPr lang="fr-FR"/>
+          </a:p>
+        </p:txBody>
+      </p:sp>
+      <p:sp>
+        <p:nvSpPr>
+          <p:cNvPr id="3" name="ZoneTexte 2">
+            <a:extLst>
+              <a:ext uri="{FF2B5EF4-FFF2-40B4-BE49-F238E27FC236}">
+                <a16:creationId xmlns:a16="http://schemas.microsoft.com/office/drawing/2014/main" id="{8B2CF265-77C7-4B2F-8BE0-83759B2491F7}"/>
+              </a:ext>
+            </a:extLst>
+          </p:cNvPr>
+          <p:cNvSpPr txBox="1"/>
+          <p:nvPr/>
+        </p:nvSpPr>
+        <p:spPr>
+          <a:xfrm>
+            <a:off x="2280380" y="5985139"/>
+            <a:ext cx="782587" cy="369332"/>
+          </a:xfrm>
+          <a:prstGeom prst="rect">
+            <a:avLst/>
+          </a:prstGeom>
+          <a:noFill/>
+        </p:spPr>
+        <p:txBody>
+          <a:bodyPr wrap="none" rtlCol="0">
+            <a:spAutoFit/>
+          </a:bodyPr>
+          <a:lstStyle/>
+          <a:p>
+            <a:r>
+              <a:rPr lang="fr-FR" dirty="0"/>
+              <a:t>flush()</a:t>
+            </a:r>
+          </a:p>
+        </p:txBody>
+      </p:sp>
+      <p:sp>
+        <p:nvSpPr>
+          <p:cNvPr id="12" name="Rectangle : carré corné 11">
+            <a:extLst>
+              <a:ext uri="{FF2B5EF4-FFF2-40B4-BE49-F238E27FC236}">
+                <a16:creationId xmlns:a16="http://schemas.microsoft.com/office/drawing/2014/main" id="{EAD264B0-E46F-4E47-B6B1-51C58F519AC1}"/>
+              </a:ext>
+            </a:extLst>
+          </p:cNvPr>
+          <p:cNvSpPr/>
+          <p:nvPr/>
+        </p:nvSpPr>
+        <p:spPr>
+          <a:xfrm>
+            <a:off x="6798128" y="3809488"/>
+            <a:ext cx="1428750" cy="2544983"/>
+          </a:xfrm>
+          <a:prstGeom prst="foldedCorner">
+            <a:avLst>
+              <a:gd name="adj" fmla="val 23143"/>
+            </a:avLst>
+          </a:prstGeom>
+          <a:noFill/>
+        </p:spPr>
+        <p:style>
+          <a:lnRef idx="2">
+            <a:schemeClr val="accent1">
+              <a:shade val="50000"/>
+            </a:schemeClr>
+          </a:lnRef>
+          <a:fillRef idx="1">
+            <a:schemeClr val="accent1"/>
+          </a:fillRef>
+          <a:effectRef idx="0">
+            <a:schemeClr val="accent1"/>
+          </a:effectRef>
+          <a:fontRef idx="minor">
+            <a:schemeClr val="lt1"/>
+          </a:fontRef>
+        </p:style>
+        <p:txBody>
+          <a:bodyPr rtlCol="0" anchor="ctr"/>
+          <a:lstStyle/>
+          <a:p>
+            <a:pPr algn="ctr"/>
+            <a:endParaRPr lang="fr-FR" dirty="0"/>
+          </a:p>
+        </p:txBody>
+      </p:sp>
+      <p:sp>
+        <p:nvSpPr>
+          <p:cNvPr id="6" name="ZoneTexte 5">
+            <a:extLst>
+              <a:ext uri="{FF2B5EF4-FFF2-40B4-BE49-F238E27FC236}">
+                <a16:creationId xmlns:a16="http://schemas.microsoft.com/office/drawing/2014/main" id="{22ABE0A4-71E1-4EFA-8397-CDE94F06016E}"/>
+              </a:ext>
+            </a:extLst>
+          </p:cNvPr>
+          <p:cNvSpPr txBox="1"/>
+          <p:nvPr/>
+        </p:nvSpPr>
+        <p:spPr>
+          <a:xfrm>
+            <a:off x="8509906" y="4814996"/>
+            <a:ext cx="3098733" cy="369332"/>
+          </a:xfrm>
+          <a:prstGeom prst="rect">
+            <a:avLst/>
+          </a:prstGeom>
+          <a:noFill/>
+        </p:spPr>
+        <p:txBody>
+          <a:bodyPr wrap="none" rtlCol="0">
+            <a:spAutoFit/>
+          </a:bodyPr>
+          <a:lstStyle/>
+          <a:p>
+            <a:r>
+              <a:rPr lang="fr-FR" dirty="0" err="1"/>
+              <a:t>After</a:t>
+            </a:r>
+            <a:r>
+              <a:rPr lang="fr-FR" dirty="0"/>
+              <a:t> flush(),  File </a:t>
+            </a:r>
+            <a:r>
+              <a:rPr lang="fr-FR" dirty="0" err="1"/>
+              <a:t>is</a:t>
+            </a:r>
+            <a:r>
+              <a:rPr lang="fr-FR" dirty="0"/>
+              <a:t> </a:t>
+            </a:r>
+            <a:r>
+              <a:rPr lang="fr-FR" dirty="0" err="1"/>
+              <a:t>now</a:t>
+            </a:r>
+            <a:r>
+              <a:rPr lang="fr-FR" dirty="0"/>
+              <a:t> visible</a:t>
+            </a:r>
+          </a:p>
+        </p:txBody>
+      </p:sp>
+      <p:sp>
+        <p:nvSpPr>
+          <p:cNvPr id="13" name="Flèche : droite 12">
+            <a:extLst>
+              <a:ext uri="{FF2B5EF4-FFF2-40B4-BE49-F238E27FC236}">
+                <a16:creationId xmlns:a16="http://schemas.microsoft.com/office/drawing/2014/main" id="{1488B998-406D-43A7-B0FD-0101E23D1F2B}"/>
+              </a:ext>
+            </a:extLst>
+          </p:cNvPr>
+          <p:cNvSpPr/>
+          <p:nvPr/>
+        </p:nvSpPr>
+        <p:spPr>
+          <a:xfrm>
+            <a:off x="3062967" y="2271454"/>
+            <a:ext cx="640896" cy="319089"/>
+          </a:xfrm>
+          <a:prstGeom prst="rightArrow">
+            <a:avLst/>
+          </a:prstGeom>
+        </p:spPr>
+        <p:style>
+          <a:lnRef idx="2">
+            <a:schemeClr val="accent1">
+              <a:shade val="50000"/>
+            </a:schemeClr>
+          </a:lnRef>
+          <a:fillRef idx="1">
+            <a:schemeClr val="accent1"/>
+          </a:fillRef>
+          <a:effectRef idx="0">
+            <a:schemeClr val="accent1"/>
+          </a:effectRef>
+          <a:fontRef idx="minor">
+            <a:schemeClr val="lt1"/>
+          </a:fontRef>
+        </p:style>
+        <p:txBody>
+          <a:bodyPr rtlCol="0" anchor="ctr"/>
+          <a:lstStyle/>
+          <a:p>
+            <a:pPr algn="ctr"/>
+            <a:endParaRPr lang="fr-FR"/>
+          </a:p>
+        </p:txBody>
+      </p:sp>
+      <p:sp>
+        <p:nvSpPr>
+          <p:cNvPr id="14" name="ZoneTexte 13">
+            <a:extLst>
+              <a:ext uri="{FF2B5EF4-FFF2-40B4-BE49-F238E27FC236}">
+                <a16:creationId xmlns:a16="http://schemas.microsoft.com/office/drawing/2014/main" id="{D3861737-5756-4F60-A96D-128C5334212A}"/>
+              </a:ext>
+            </a:extLst>
+          </p:cNvPr>
+          <p:cNvSpPr txBox="1"/>
+          <p:nvPr/>
+        </p:nvSpPr>
+        <p:spPr>
+          <a:xfrm>
+            <a:off x="2224090" y="2227880"/>
+            <a:ext cx="822375" cy="369332"/>
+          </a:xfrm>
+          <a:prstGeom prst="rect">
+            <a:avLst/>
+          </a:prstGeom>
+          <a:noFill/>
+        </p:spPr>
+        <p:txBody>
+          <a:bodyPr wrap="square" rtlCol="0">
+            <a:spAutoFit/>
+          </a:bodyPr>
+          <a:lstStyle/>
+          <a:p>
+            <a:r>
+              <a:rPr lang="fr-FR" dirty="0" err="1"/>
+              <a:t>create</a:t>
+            </a:r>
+            <a:endParaRPr lang="fr-FR" dirty="0"/>
+          </a:p>
+        </p:txBody>
+      </p:sp>
+    </p:spTree>
+    <p:extLst>
+      <p:ext uri="{BB962C8B-B14F-4D97-AF65-F5344CB8AC3E}">
+        <p14:creationId xmlns:p14="http://schemas.microsoft.com/office/powerpoint/2010/main" val="4246416192"/>
+      </p:ext>
+    </p:extLst>
+  </p:cSld>
+  <p:clrMapOvr>
+    <a:masterClrMapping/>
+  </p:clrMapOvr>
+</p:sld>
+</file>
+
+<file path=ppt/slides/slide16.xml><?xml version="1.0" encoding="utf-8"?>
+<p:sld xmlns:a="http://schemas.openxmlformats.org/drawingml/2006/main" xmlns:r="http://schemas.openxmlformats.org/officeDocument/2006/relationships" xmlns:p="http://schemas.openxmlformats.org/presentationml/2006/main">
+  <p:cSld>
+    <p:spTree>
+      <p:nvGrpSpPr>
+        <p:cNvPr id="1" name=""/>
+        <p:cNvGrpSpPr/>
+        <p:nvPr/>
+      </p:nvGrpSpPr>
+      <p:grpSpPr>
+        <a:xfrm>
+          <a:off x="0" y="0"/>
+          <a:ext cx="0" cy="0"/>
+          <a:chOff x="0" y="0"/>
+          <a:chExt cx="0" cy="0"/>
+        </a:xfrm>
+      </p:grpSpPr>
+      <p:sp>
+        <p:nvSpPr>
+          <p:cNvPr id="2" name="Titre 1">
+            <a:extLst>
+              <a:ext uri="{FF2B5EF4-FFF2-40B4-BE49-F238E27FC236}">
+                <a16:creationId xmlns:a16="http://schemas.microsoft.com/office/drawing/2014/main" id="{0700DC1F-8112-4E97-BB63-2E01E3A767A4}"/>
+              </a:ext>
+            </a:extLst>
+          </p:cNvPr>
+          <p:cNvSpPr>
+            <a:spLocks noGrp="1"/>
+          </p:cNvSpPr>
+          <p:nvPr>
+            <p:ph type="title"/>
+          </p:nvPr>
+        </p:nvSpPr>
+        <p:spPr>
+          <a:xfrm>
+            <a:off x="353786" y="-38099"/>
+            <a:ext cx="11658600" cy="979713"/>
+          </a:xfrm>
+        </p:spPr>
+        <p:txBody>
+          <a:bodyPr>
+            <a:normAutofit fontScale="90000"/>
+          </a:bodyPr>
+          <a:lstStyle/>
+          <a:p>
+            <a:r>
+              <a:rPr lang="fr-FR" dirty="0" err="1"/>
+              <a:t>Reads</a:t>
+            </a:r>
+            <a:r>
+              <a:rPr lang="fr-FR" dirty="0"/>
+              <a:t> can </a:t>
+            </a:r>
+            <a:r>
+              <a:rPr lang="fr-FR" dirty="0" err="1"/>
+              <a:t>be</a:t>
+            </a:r>
+            <a:r>
+              <a:rPr lang="fr-FR" dirty="0"/>
+              <a:t> </a:t>
+            </a:r>
+            <a:r>
+              <a:rPr lang="fr-FR" dirty="0" err="1"/>
+              <a:t>Parallelized</a:t>
+            </a:r>
+            <a:r>
+              <a:rPr lang="fr-FR" dirty="0"/>
+              <a:t>/Concurrent  (</a:t>
+            </a:r>
+            <a:r>
+              <a:rPr lang="fr-FR" dirty="0" err="1"/>
+              <a:t>several</a:t>
+            </a:r>
+            <a:r>
+              <a:rPr lang="fr-FR" dirty="0"/>
+              <a:t> Threads)</a:t>
+            </a:r>
+          </a:p>
+        </p:txBody>
+      </p:sp>
+      <p:sp>
+        <p:nvSpPr>
+          <p:cNvPr id="4" name="Rectangle : carré corné 3">
+            <a:extLst>
+              <a:ext uri="{FF2B5EF4-FFF2-40B4-BE49-F238E27FC236}">
+                <a16:creationId xmlns:a16="http://schemas.microsoft.com/office/drawing/2014/main" id="{582D7009-7756-43F3-844E-1E7D19C5D91E}"/>
+              </a:ext>
+            </a:extLst>
+          </p:cNvPr>
+          <p:cNvSpPr/>
+          <p:nvPr/>
+        </p:nvSpPr>
+        <p:spPr>
+          <a:xfrm>
+            <a:off x="3227614" y="1509032"/>
+            <a:ext cx="1428750" cy="2839811"/>
+          </a:xfrm>
+          <a:prstGeom prst="foldedCorner">
+            <a:avLst/>
+          </a:prstGeom>
+          <a:noFill/>
+        </p:spPr>
+        <p:style>
+          <a:lnRef idx="2">
+            <a:schemeClr val="accent1">
+              <a:shade val="50000"/>
+            </a:schemeClr>
+          </a:lnRef>
+          <a:fillRef idx="1">
+            <a:schemeClr val="accent1"/>
+          </a:fillRef>
+          <a:effectRef idx="0">
+            <a:schemeClr val="accent1"/>
+          </a:effectRef>
+          <a:fontRef idx="minor">
+            <a:schemeClr val="lt1"/>
+          </a:fontRef>
+        </p:style>
+        <p:txBody>
+          <a:bodyPr rtlCol="0" anchor="ctr"/>
+          <a:lstStyle/>
+          <a:p>
+            <a:pPr algn="ctr"/>
+            <a:endParaRPr lang="fr-FR" dirty="0"/>
+          </a:p>
+        </p:txBody>
+      </p:sp>
+      <p:sp>
+        <p:nvSpPr>
+          <p:cNvPr id="5" name="Rectangle 4">
+            <a:extLst>
+              <a:ext uri="{FF2B5EF4-FFF2-40B4-BE49-F238E27FC236}">
+                <a16:creationId xmlns:a16="http://schemas.microsoft.com/office/drawing/2014/main" id="{81ACC03E-D128-4174-888E-A3A712034EC6}"/>
+              </a:ext>
+            </a:extLst>
+          </p:cNvPr>
+          <p:cNvSpPr/>
+          <p:nvPr/>
+        </p:nvSpPr>
+        <p:spPr>
+          <a:xfrm>
+            <a:off x="3227614" y="2123394"/>
+            <a:ext cx="1428750" cy="709612"/>
+          </a:xfrm>
+          <a:prstGeom prst="rect">
+            <a:avLst/>
+          </a:prstGeom>
+          <a:solidFill>
+            <a:schemeClr val="accent5">
+              <a:lumMod val="20000"/>
+              <a:lumOff val="80000"/>
+            </a:schemeClr>
+          </a:solidFill>
+        </p:spPr>
+        <p:style>
+          <a:lnRef idx="2">
+            <a:schemeClr val="accent1">
+              <a:shade val="50000"/>
+            </a:schemeClr>
+          </a:lnRef>
+          <a:fillRef idx="1">
+            <a:schemeClr val="accent1"/>
+          </a:fillRef>
+          <a:effectRef idx="0">
+            <a:schemeClr val="accent1"/>
+          </a:effectRef>
+          <a:fontRef idx="minor">
+            <a:schemeClr val="lt1"/>
+          </a:fontRef>
+        </p:style>
+        <p:txBody>
+          <a:bodyPr rtlCol="0" anchor="ctr"/>
+          <a:lstStyle/>
+          <a:p>
+            <a:pPr algn="ctr"/>
+            <a:endParaRPr lang="fr-FR"/>
+          </a:p>
+        </p:txBody>
+      </p:sp>
+      <p:sp>
+        <p:nvSpPr>
+          <p:cNvPr id="6" name="Rectangle 5">
+            <a:extLst>
+              <a:ext uri="{FF2B5EF4-FFF2-40B4-BE49-F238E27FC236}">
+                <a16:creationId xmlns:a16="http://schemas.microsoft.com/office/drawing/2014/main" id="{AB410F92-95DF-4263-8AF8-6DDB6BECF22F}"/>
+              </a:ext>
+            </a:extLst>
+          </p:cNvPr>
+          <p:cNvSpPr/>
+          <p:nvPr/>
+        </p:nvSpPr>
+        <p:spPr>
+          <a:xfrm>
+            <a:off x="6444345" y="2123394"/>
+            <a:ext cx="1428750" cy="709612"/>
+          </a:xfrm>
+          <a:prstGeom prst="rect">
+            <a:avLst/>
+          </a:prstGeom>
+          <a:solidFill>
+            <a:schemeClr val="accent5">
+              <a:lumMod val="20000"/>
+              <a:lumOff val="80000"/>
+            </a:schemeClr>
+          </a:solidFill>
+        </p:spPr>
+        <p:style>
+          <a:lnRef idx="2">
+            <a:schemeClr val="accent1">
+              <a:shade val="50000"/>
+            </a:schemeClr>
+          </a:lnRef>
+          <a:fillRef idx="1">
+            <a:schemeClr val="accent1"/>
+          </a:fillRef>
+          <a:effectRef idx="0">
+            <a:schemeClr val="accent1"/>
+          </a:effectRef>
+          <a:fontRef idx="minor">
+            <a:schemeClr val="lt1"/>
+          </a:fontRef>
+        </p:style>
+        <p:txBody>
+          <a:bodyPr rtlCol="0" anchor="ctr"/>
+          <a:lstStyle/>
+          <a:p>
+            <a:pPr algn="ctr"/>
+            <a:endParaRPr lang="fr-FR"/>
+          </a:p>
+        </p:txBody>
+      </p:sp>
+      <p:sp>
+        <p:nvSpPr>
+          <p:cNvPr id="7" name="Flèche : droite 6">
+            <a:extLst>
+              <a:ext uri="{FF2B5EF4-FFF2-40B4-BE49-F238E27FC236}">
+                <a16:creationId xmlns:a16="http://schemas.microsoft.com/office/drawing/2014/main" id="{0F109F93-2780-4B82-8107-1046BF52EF7F}"/>
+              </a:ext>
+            </a:extLst>
+          </p:cNvPr>
+          <p:cNvSpPr/>
+          <p:nvPr/>
+        </p:nvSpPr>
+        <p:spPr>
+          <a:xfrm>
+            <a:off x="5106761" y="2298925"/>
+            <a:ext cx="640896" cy="319089"/>
+          </a:xfrm>
+          <a:prstGeom prst="rightArrow">
+            <a:avLst/>
+          </a:prstGeom>
+        </p:spPr>
+        <p:style>
+          <a:lnRef idx="2">
+            <a:schemeClr val="accent1">
+              <a:shade val="50000"/>
+            </a:schemeClr>
+          </a:lnRef>
+          <a:fillRef idx="1">
+            <a:schemeClr val="accent1"/>
+          </a:fillRef>
+          <a:effectRef idx="0">
+            <a:schemeClr val="accent1"/>
+          </a:effectRef>
+          <a:fontRef idx="minor">
+            <a:schemeClr val="lt1"/>
+          </a:fontRef>
+        </p:style>
+        <p:txBody>
+          <a:bodyPr rtlCol="0" anchor="ctr"/>
+          <a:lstStyle/>
+          <a:p>
+            <a:pPr algn="ctr"/>
+            <a:endParaRPr lang="fr-FR"/>
+          </a:p>
+        </p:txBody>
+      </p:sp>
+      <p:sp>
+        <p:nvSpPr>
+          <p:cNvPr id="12" name="Flèche : droite 11">
+            <a:extLst>
+              <a:ext uri="{FF2B5EF4-FFF2-40B4-BE49-F238E27FC236}">
+                <a16:creationId xmlns:a16="http://schemas.microsoft.com/office/drawing/2014/main" id="{22D1E937-ED16-4224-96D0-341D52C8461C}"/>
+              </a:ext>
+            </a:extLst>
+          </p:cNvPr>
+          <p:cNvSpPr/>
+          <p:nvPr/>
+        </p:nvSpPr>
+        <p:spPr>
+          <a:xfrm>
+            <a:off x="5093835" y="2754704"/>
+            <a:ext cx="640896" cy="319089"/>
+          </a:xfrm>
+          <a:prstGeom prst="rightArrow">
+            <a:avLst/>
+          </a:prstGeom>
+        </p:spPr>
+        <p:style>
+          <a:lnRef idx="2">
+            <a:schemeClr val="accent1">
+              <a:shade val="50000"/>
+            </a:schemeClr>
+          </a:lnRef>
+          <a:fillRef idx="1">
+            <a:schemeClr val="accent1"/>
+          </a:fillRef>
+          <a:effectRef idx="0">
+            <a:schemeClr val="accent1"/>
+          </a:effectRef>
+          <a:fontRef idx="minor">
+            <a:schemeClr val="lt1"/>
+          </a:fontRef>
+        </p:style>
+        <p:txBody>
+          <a:bodyPr rtlCol="0" anchor="ctr"/>
+          <a:lstStyle/>
+          <a:p>
+            <a:pPr algn="ctr"/>
+            <a:endParaRPr lang="fr-FR"/>
+          </a:p>
+        </p:txBody>
+      </p:sp>
+      <p:sp>
+        <p:nvSpPr>
+          <p:cNvPr id="13" name="Rectangle 12">
+            <a:extLst>
+              <a:ext uri="{FF2B5EF4-FFF2-40B4-BE49-F238E27FC236}">
+                <a16:creationId xmlns:a16="http://schemas.microsoft.com/office/drawing/2014/main" id="{5155A9BA-BC9F-43E4-8AC0-5FC266885543}"/>
+              </a:ext>
+            </a:extLst>
+          </p:cNvPr>
+          <p:cNvSpPr/>
+          <p:nvPr/>
+        </p:nvSpPr>
+        <p:spPr>
+          <a:xfrm>
+            <a:off x="6716486" y="2478200"/>
+            <a:ext cx="1428750" cy="709612"/>
+          </a:xfrm>
+          <a:prstGeom prst="rect">
+            <a:avLst/>
+          </a:prstGeom>
+          <a:solidFill>
+            <a:schemeClr val="accent5">
+              <a:lumMod val="20000"/>
+              <a:lumOff val="80000"/>
+            </a:schemeClr>
+          </a:solidFill>
+        </p:spPr>
+        <p:style>
+          <a:lnRef idx="2">
+            <a:schemeClr val="accent1">
+              <a:shade val="50000"/>
+            </a:schemeClr>
+          </a:lnRef>
+          <a:fillRef idx="1">
+            <a:schemeClr val="accent1"/>
+          </a:fillRef>
+          <a:effectRef idx="0">
+            <a:schemeClr val="accent1"/>
+          </a:effectRef>
+          <a:fontRef idx="minor">
+            <a:schemeClr val="lt1"/>
+          </a:fontRef>
+        </p:style>
+        <p:txBody>
+          <a:bodyPr rtlCol="0" anchor="ctr"/>
+          <a:lstStyle/>
+          <a:p>
+            <a:pPr algn="ctr"/>
+            <a:endParaRPr lang="fr-FR"/>
+          </a:p>
+        </p:txBody>
+      </p:sp>
+      <p:sp>
+        <p:nvSpPr>
+          <p:cNvPr id="14" name="Rectangle 13">
+            <a:extLst>
+              <a:ext uri="{FF2B5EF4-FFF2-40B4-BE49-F238E27FC236}">
+                <a16:creationId xmlns:a16="http://schemas.microsoft.com/office/drawing/2014/main" id="{5376A6A4-3729-48C9-9DD1-0D41117A5C64}"/>
+              </a:ext>
+            </a:extLst>
+          </p:cNvPr>
+          <p:cNvSpPr/>
+          <p:nvPr/>
+        </p:nvSpPr>
+        <p:spPr>
+          <a:xfrm>
+            <a:off x="6417129" y="3334312"/>
+            <a:ext cx="1428750" cy="709612"/>
+          </a:xfrm>
+          <a:prstGeom prst="rect">
+            <a:avLst/>
+          </a:prstGeom>
+          <a:solidFill>
+            <a:schemeClr val="accent5">
+              <a:lumMod val="20000"/>
+              <a:lumOff val="80000"/>
+            </a:schemeClr>
+          </a:solidFill>
+        </p:spPr>
+        <p:style>
+          <a:lnRef idx="2">
+            <a:schemeClr val="accent1">
+              <a:shade val="50000"/>
+            </a:schemeClr>
+          </a:lnRef>
+          <a:fillRef idx="1">
+            <a:schemeClr val="accent1"/>
+          </a:fillRef>
+          <a:effectRef idx="0">
+            <a:schemeClr val="accent1"/>
+          </a:effectRef>
+          <a:fontRef idx="minor">
+            <a:schemeClr val="lt1"/>
+          </a:fontRef>
+        </p:style>
+        <p:txBody>
+          <a:bodyPr rtlCol="0" anchor="ctr"/>
+          <a:lstStyle/>
+          <a:p>
+            <a:pPr algn="ctr"/>
+            <a:endParaRPr lang="fr-FR"/>
+          </a:p>
+        </p:txBody>
+      </p:sp>
+      <p:sp>
+        <p:nvSpPr>
+          <p:cNvPr id="15" name="Flèche : droite 14">
+            <a:extLst>
+              <a:ext uri="{FF2B5EF4-FFF2-40B4-BE49-F238E27FC236}">
+                <a16:creationId xmlns:a16="http://schemas.microsoft.com/office/drawing/2014/main" id="{E8E6A93D-086A-42B8-BB90-B05084BC6B16}"/>
+              </a:ext>
+            </a:extLst>
+          </p:cNvPr>
+          <p:cNvSpPr/>
+          <p:nvPr/>
+        </p:nvSpPr>
+        <p:spPr>
+          <a:xfrm>
+            <a:off x="5103360" y="3529573"/>
+            <a:ext cx="640896" cy="319089"/>
+          </a:xfrm>
+          <a:prstGeom prst="rightArrow">
+            <a:avLst/>
+          </a:prstGeom>
+        </p:spPr>
+        <p:style>
+          <a:lnRef idx="2">
+            <a:schemeClr val="accent1">
+              <a:shade val="50000"/>
+            </a:schemeClr>
+          </a:lnRef>
+          <a:fillRef idx="1">
+            <a:schemeClr val="accent1"/>
+          </a:fillRef>
+          <a:effectRef idx="0">
+            <a:schemeClr val="accent1"/>
+          </a:effectRef>
+          <a:fontRef idx="minor">
+            <a:schemeClr val="lt1"/>
+          </a:fontRef>
+        </p:style>
+        <p:txBody>
+          <a:bodyPr rtlCol="0" anchor="ctr"/>
+          <a:lstStyle/>
+          <a:p>
+            <a:pPr algn="ctr"/>
+            <a:endParaRPr lang="fr-FR"/>
+          </a:p>
+        </p:txBody>
+      </p:sp>
+      <p:sp>
+        <p:nvSpPr>
+          <p:cNvPr id="16" name="Rectangle 15">
+            <a:extLst>
+              <a:ext uri="{FF2B5EF4-FFF2-40B4-BE49-F238E27FC236}">
+                <a16:creationId xmlns:a16="http://schemas.microsoft.com/office/drawing/2014/main" id="{5BDADF20-C511-4FF3-902A-9CA3D786E4A3}"/>
+              </a:ext>
+            </a:extLst>
+          </p:cNvPr>
+          <p:cNvSpPr/>
+          <p:nvPr/>
+        </p:nvSpPr>
+        <p:spPr>
+          <a:xfrm>
+            <a:off x="3323886" y="2426717"/>
+            <a:ext cx="1332478" cy="709612"/>
+          </a:xfrm>
+          <a:prstGeom prst="rect">
+            <a:avLst/>
+          </a:prstGeom>
+          <a:solidFill>
+            <a:schemeClr val="accent5">
+              <a:lumMod val="20000"/>
+              <a:lumOff val="80000"/>
+            </a:schemeClr>
+          </a:solidFill>
+        </p:spPr>
+        <p:style>
+          <a:lnRef idx="2">
+            <a:schemeClr val="accent1">
+              <a:shade val="50000"/>
+            </a:schemeClr>
+          </a:lnRef>
+          <a:fillRef idx="1">
+            <a:schemeClr val="accent1"/>
+          </a:fillRef>
+          <a:effectRef idx="0">
+            <a:schemeClr val="accent1"/>
+          </a:effectRef>
+          <a:fontRef idx="minor">
+            <a:schemeClr val="lt1"/>
+          </a:fontRef>
+        </p:style>
+        <p:txBody>
+          <a:bodyPr rtlCol="0" anchor="ctr"/>
+          <a:lstStyle/>
+          <a:p>
+            <a:pPr algn="ctr"/>
+            <a:endParaRPr lang="fr-FR"/>
+          </a:p>
+        </p:txBody>
+      </p:sp>
+      <p:sp>
+        <p:nvSpPr>
+          <p:cNvPr id="17" name="Rectangle 16">
+            <a:extLst>
+              <a:ext uri="{FF2B5EF4-FFF2-40B4-BE49-F238E27FC236}">
+                <a16:creationId xmlns:a16="http://schemas.microsoft.com/office/drawing/2014/main" id="{6208CF70-DD8E-46E2-A38A-943F2077F42E}"/>
+              </a:ext>
+            </a:extLst>
+          </p:cNvPr>
+          <p:cNvSpPr/>
+          <p:nvPr/>
+        </p:nvSpPr>
+        <p:spPr>
+          <a:xfrm>
+            <a:off x="3227614" y="3254535"/>
+            <a:ext cx="1428750" cy="709612"/>
+          </a:xfrm>
+          <a:prstGeom prst="rect">
+            <a:avLst/>
+          </a:prstGeom>
+          <a:solidFill>
+            <a:schemeClr val="accent5">
+              <a:lumMod val="20000"/>
+              <a:lumOff val="80000"/>
+            </a:schemeClr>
+          </a:solidFill>
+        </p:spPr>
+        <p:style>
+          <a:lnRef idx="2">
+            <a:schemeClr val="accent1">
+              <a:shade val="50000"/>
+            </a:schemeClr>
+          </a:lnRef>
+          <a:fillRef idx="1">
+            <a:schemeClr val="accent1"/>
+          </a:fillRef>
+          <a:effectRef idx="0">
+            <a:schemeClr val="accent1"/>
+          </a:effectRef>
+          <a:fontRef idx="minor">
+            <a:schemeClr val="lt1"/>
+          </a:fontRef>
+        </p:style>
+        <p:txBody>
+          <a:bodyPr rtlCol="0" anchor="ctr"/>
+          <a:lstStyle/>
+          <a:p>
+            <a:pPr algn="ctr"/>
+            <a:endParaRPr lang="fr-FR"/>
+          </a:p>
+        </p:txBody>
+      </p:sp>
+      <p:sp>
+        <p:nvSpPr>
+          <p:cNvPr id="18" name="ZoneTexte 17">
+            <a:extLst>
+              <a:ext uri="{FF2B5EF4-FFF2-40B4-BE49-F238E27FC236}">
+                <a16:creationId xmlns:a16="http://schemas.microsoft.com/office/drawing/2014/main" id="{E087876B-DC4E-45C9-A064-3D6BABD5B3DC}"/>
+              </a:ext>
+            </a:extLst>
+          </p:cNvPr>
+          <p:cNvSpPr txBox="1"/>
+          <p:nvPr/>
+        </p:nvSpPr>
+        <p:spPr>
+          <a:xfrm>
+            <a:off x="2242457" y="5010712"/>
+            <a:ext cx="6031908" cy="1200329"/>
+          </a:xfrm>
+          <a:prstGeom prst="rect">
+            <a:avLst/>
+          </a:prstGeom>
+          <a:noFill/>
+        </p:spPr>
+        <p:txBody>
+          <a:bodyPr wrap="none" rtlCol="0">
+            <a:spAutoFit/>
+          </a:bodyPr>
+          <a:lstStyle/>
+          <a:p>
+            <a:r>
+              <a:rPr lang="fr-FR" dirty="0"/>
+              <a:t>In </a:t>
+            </a:r>
+            <a:r>
+              <a:rPr lang="fr-FR" dirty="0" err="1"/>
+              <a:t>general</a:t>
+            </a:r>
+            <a:r>
+              <a:rPr lang="fr-FR" dirty="0"/>
+              <a:t>,  </a:t>
+            </a:r>
+            <a:r>
+              <a:rPr lang="fr-FR" dirty="0" err="1"/>
+              <a:t>Reads</a:t>
+            </a:r>
+            <a:r>
+              <a:rPr lang="fr-FR" dirty="0"/>
+              <a:t> </a:t>
+            </a:r>
+            <a:r>
+              <a:rPr lang="fr-FR" dirty="0" err="1"/>
+              <a:t>will</a:t>
+            </a:r>
+            <a:r>
+              <a:rPr lang="fr-FR" dirty="0"/>
+              <a:t> </a:t>
+            </a:r>
+            <a:r>
+              <a:rPr lang="fr-FR" dirty="0" err="1"/>
+              <a:t>be</a:t>
+            </a:r>
+            <a:r>
+              <a:rPr lang="fr-FR" dirty="0"/>
+              <a:t> </a:t>
+            </a:r>
+            <a:r>
+              <a:rPr lang="fr-FR" dirty="0" err="1"/>
+              <a:t>aligned</a:t>
+            </a:r>
+            <a:r>
+              <a:rPr lang="fr-FR" dirty="0"/>
+              <a:t> to 128Mo offsets</a:t>
+            </a:r>
+          </a:p>
+          <a:p>
+            <a:endParaRPr lang="fr-FR" dirty="0"/>
+          </a:p>
+          <a:p>
+            <a:endParaRPr lang="fr-FR" dirty="0"/>
+          </a:p>
+          <a:p>
+            <a:r>
+              <a:rPr lang="fr-FR" dirty="0" err="1"/>
+              <a:t>Several</a:t>
+            </a:r>
+            <a:r>
+              <a:rPr lang="fr-FR" dirty="0"/>
+              <a:t> Clients can </a:t>
+            </a:r>
+            <a:r>
+              <a:rPr lang="fr-FR" dirty="0" err="1"/>
+              <a:t>read</a:t>
+            </a:r>
+            <a:r>
+              <a:rPr lang="fr-FR" dirty="0"/>
+              <a:t> the </a:t>
+            </a:r>
+            <a:r>
+              <a:rPr lang="fr-FR" dirty="0" err="1"/>
+              <a:t>same</a:t>
+            </a:r>
+            <a:r>
+              <a:rPr lang="fr-FR" dirty="0"/>
+              <a:t> </a:t>
+            </a:r>
+            <a:r>
+              <a:rPr lang="fr-FR" dirty="0" err="1"/>
+              <a:t>region</a:t>
+            </a:r>
+            <a:r>
+              <a:rPr lang="fr-FR" dirty="0"/>
+              <a:t> in « duplicate </a:t>
+            </a:r>
+            <a:r>
+              <a:rPr lang="fr-FR" dirty="0" err="1"/>
+              <a:t>reads</a:t>
+            </a:r>
+            <a:r>
+              <a:rPr lang="fr-FR" dirty="0"/>
+              <a:t> »</a:t>
+            </a:r>
+          </a:p>
+        </p:txBody>
+      </p:sp>
+      <p:sp>
+        <p:nvSpPr>
+          <p:cNvPr id="19" name="Rectangle 18">
+            <a:extLst>
+              <a:ext uri="{FF2B5EF4-FFF2-40B4-BE49-F238E27FC236}">
+                <a16:creationId xmlns:a16="http://schemas.microsoft.com/office/drawing/2014/main" id="{143AF01B-E9E0-4BE9-BF78-83C645FCAD66}"/>
+              </a:ext>
+            </a:extLst>
+          </p:cNvPr>
+          <p:cNvSpPr/>
+          <p:nvPr/>
+        </p:nvSpPr>
+        <p:spPr>
+          <a:xfrm>
+            <a:off x="9046030" y="2103663"/>
+            <a:ext cx="1428750" cy="709612"/>
+          </a:xfrm>
+          <a:prstGeom prst="rect">
+            <a:avLst/>
+          </a:prstGeom>
+          <a:solidFill>
+            <a:schemeClr val="accent5">
+              <a:lumMod val="20000"/>
+              <a:lumOff val="80000"/>
+            </a:schemeClr>
+          </a:solidFill>
+        </p:spPr>
+        <p:style>
+          <a:lnRef idx="2">
+            <a:schemeClr val="accent1">
+              <a:shade val="50000"/>
+            </a:schemeClr>
+          </a:lnRef>
+          <a:fillRef idx="1">
+            <a:schemeClr val="accent1"/>
+          </a:fillRef>
+          <a:effectRef idx="0">
+            <a:schemeClr val="accent1"/>
+          </a:effectRef>
+          <a:fontRef idx="minor">
+            <a:schemeClr val="lt1"/>
+          </a:fontRef>
+        </p:style>
+        <p:txBody>
+          <a:bodyPr rtlCol="0" anchor="ctr"/>
+          <a:lstStyle/>
+          <a:p>
+            <a:pPr algn="ctr"/>
+            <a:endParaRPr lang="fr-FR"/>
+          </a:p>
+        </p:txBody>
+      </p:sp>
+      <p:sp>
+        <p:nvSpPr>
+          <p:cNvPr id="20" name="Flèche : droite 19">
+            <a:extLst>
+              <a:ext uri="{FF2B5EF4-FFF2-40B4-BE49-F238E27FC236}">
+                <a16:creationId xmlns:a16="http://schemas.microsoft.com/office/drawing/2014/main" id="{38D0E3AE-7EFA-41F7-A6FC-29898C37C120}"/>
+              </a:ext>
+            </a:extLst>
+          </p:cNvPr>
+          <p:cNvSpPr/>
+          <p:nvPr/>
+        </p:nvSpPr>
+        <p:spPr>
+          <a:xfrm rot="19970563">
+            <a:off x="5097117" y="2113549"/>
+            <a:ext cx="726809" cy="319089"/>
+          </a:xfrm>
+          <a:prstGeom prst="rightArrow">
+            <a:avLst/>
+          </a:prstGeom>
+        </p:spPr>
+        <p:style>
+          <a:lnRef idx="2">
+            <a:schemeClr val="accent1">
+              <a:shade val="50000"/>
+            </a:schemeClr>
+          </a:lnRef>
+          <a:fillRef idx="1">
+            <a:schemeClr val="accent1"/>
+          </a:fillRef>
+          <a:effectRef idx="0">
+            <a:schemeClr val="accent1"/>
+          </a:effectRef>
+          <a:fontRef idx="minor">
+            <a:schemeClr val="lt1"/>
+          </a:fontRef>
+        </p:style>
+        <p:txBody>
+          <a:bodyPr rtlCol="0" anchor="ctr"/>
+          <a:lstStyle/>
+          <a:p>
+            <a:pPr algn="ctr"/>
+            <a:endParaRPr lang="fr-FR"/>
+          </a:p>
+        </p:txBody>
+      </p:sp>
+      <p:sp>
+        <p:nvSpPr>
+          <p:cNvPr id="21" name="ZoneTexte 20">
+            <a:extLst>
+              <a:ext uri="{FF2B5EF4-FFF2-40B4-BE49-F238E27FC236}">
+                <a16:creationId xmlns:a16="http://schemas.microsoft.com/office/drawing/2014/main" id="{65BABF77-FD13-4AEC-A67D-3C8DA3EF0A76}"/>
+              </a:ext>
+            </a:extLst>
+          </p:cNvPr>
+          <p:cNvSpPr txBox="1"/>
+          <p:nvPr/>
+        </p:nvSpPr>
+        <p:spPr>
+          <a:xfrm>
+            <a:off x="6350293" y="1734331"/>
+            <a:ext cx="1616853" cy="369332"/>
+          </a:xfrm>
+          <a:prstGeom prst="rect">
+            <a:avLst/>
+          </a:prstGeom>
+          <a:noFill/>
+        </p:spPr>
+        <p:txBody>
+          <a:bodyPr wrap="none" rtlCol="0">
+            <a:spAutoFit/>
+          </a:bodyPr>
+          <a:lstStyle/>
+          <a:p>
+            <a:r>
+              <a:rPr lang="fr-FR" dirty="0"/>
+              <a:t>Read by client1</a:t>
+            </a:r>
+          </a:p>
+        </p:txBody>
+      </p:sp>
+      <p:sp>
+        <p:nvSpPr>
+          <p:cNvPr id="22" name="ZoneTexte 21">
+            <a:extLst>
+              <a:ext uri="{FF2B5EF4-FFF2-40B4-BE49-F238E27FC236}">
+                <a16:creationId xmlns:a16="http://schemas.microsoft.com/office/drawing/2014/main" id="{8E3B2801-09D7-4B65-A707-61F65C837176}"/>
+              </a:ext>
+            </a:extLst>
+          </p:cNvPr>
+          <p:cNvSpPr txBox="1"/>
+          <p:nvPr/>
+        </p:nvSpPr>
+        <p:spPr>
+          <a:xfrm>
+            <a:off x="8951978" y="1725708"/>
+            <a:ext cx="1616853" cy="369332"/>
+          </a:xfrm>
+          <a:prstGeom prst="rect">
+            <a:avLst/>
+          </a:prstGeom>
+          <a:noFill/>
+        </p:spPr>
+        <p:txBody>
+          <a:bodyPr wrap="none" rtlCol="0">
+            <a:spAutoFit/>
+          </a:bodyPr>
+          <a:lstStyle/>
+          <a:p>
+            <a:r>
+              <a:rPr lang="fr-FR" dirty="0"/>
+              <a:t>Read by client2</a:t>
+            </a:r>
+          </a:p>
+        </p:txBody>
+      </p:sp>
+    </p:spTree>
+    <p:extLst>
+      <p:ext uri="{BB962C8B-B14F-4D97-AF65-F5344CB8AC3E}">
+        <p14:creationId xmlns:p14="http://schemas.microsoft.com/office/powerpoint/2010/main" val="4033708457"/>
+      </p:ext>
+    </p:extLst>
+  </p:cSld>
+  <p:clrMapOvr>
+    <a:masterClrMapping/>
+  </p:clrMapOvr>
+</p:sld>
+</file>
+
+<file path=ppt/slides/slide17.xml><?xml version="1.0" encoding="utf-8"?>
+<p:sld xmlns:a="http://schemas.openxmlformats.org/drawingml/2006/main" xmlns:r="http://schemas.openxmlformats.org/officeDocument/2006/relationships" xmlns:p="http://schemas.openxmlformats.org/presentationml/2006/main">
+  <p:cSld>
+    <p:spTree>
+      <p:nvGrpSpPr>
+        <p:cNvPr id="1" name=""/>
+        <p:cNvGrpSpPr/>
+        <p:nvPr/>
+      </p:nvGrpSpPr>
+      <p:grpSpPr>
+        <a:xfrm>
+          <a:off x="0" y="0"/>
+          <a:ext cx="0" cy="0"/>
+          <a:chOff x="0" y="0"/>
+          <a:chExt cx="0" cy="0"/>
+        </a:xfrm>
+      </p:grpSpPr>
+      <p:sp>
+        <p:nvSpPr>
+          <p:cNvPr id="2" name="Titre 1">
+            <a:extLst>
+              <a:ext uri="{FF2B5EF4-FFF2-40B4-BE49-F238E27FC236}">
+                <a16:creationId xmlns:a16="http://schemas.microsoft.com/office/drawing/2014/main" id="{859A4F73-0528-4738-8B05-4E4553DEA83B}"/>
+              </a:ext>
+            </a:extLst>
+          </p:cNvPr>
+          <p:cNvSpPr>
+            <a:spLocks noGrp="1"/>
+          </p:cNvSpPr>
+          <p:nvPr>
+            <p:ph type="title"/>
+          </p:nvPr>
+        </p:nvSpPr>
+        <p:spPr>
+          <a:xfrm>
+            <a:off x="150125" y="365125"/>
+            <a:ext cx="12119212" cy="1325563"/>
+          </a:xfrm>
+        </p:spPr>
+        <p:txBody>
+          <a:bodyPr>
+            <a:normAutofit/>
+          </a:bodyPr>
+          <a:lstStyle/>
+          <a:p>
+            <a:r>
+              <a:rPr lang="fr-FR" dirty="0"/>
+              <a:t>Reader can </a:t>
+            </a:r>
+            <a:r>
+              <a:rPr lang="fr-FR" dirty="0" err="1"/>
+              <a:t>only</a:t>
+            </a:r>
+            <a:r>
+              <a:rPr lang="fr-FR" dirty="0"/>
+              <a:t> </a:t>
+            </a:r>
+            <a:r>
+              <a:rPr lang="fr-FR" dirty="0" err="1"/>
+              <a:t>see</a:t>
+            </a:r>
+            <a:r>
+              <a:rPr lang="fr-FR" dirty="0"/>
+              <a:t> </a:t>
+            </a:r>
+            <a:r>
+              <a:rPr lang="fr-FR" dirty="0" err="1"/>
+              <a:t>Fully</a:t>
+            </a:r>
+            <a:r>
+              <a:rPr lang="fr-FR" dirty="0"/>
+              <a:t> « </a:t>
+            </a:r>
+            <a:r>
+              <a:rPr lang="fr-FR" dirty="0" err="1"/>
+              <a:t>Written+Flushed</a:t>
+            </a:r>
+            <a:r>
+              <a:rPr lang="fr-FR" dirty="0"/>
+              <a:t> » Files,  not </a:t>
+            </a:r>
+            <a:r>
+              <a:rPr lang="fr-FR" dirty="0" err="1"/>
+              <a:t>intermediate</a:t>
+            </a:r>
+            <a:r>
+              <a:rPr lang="fr-FR" dirty="0"/>
+              <a:t> </a:t>
+            </a:r>
+            <a:r>
+              <a:rPr lang="fr-FR" dirty="0" err="1"/>
+              <a:t>write</a:t>
+            </a:r>
+            <a:r>
+              <a:rPr lang="fr-FR" dirty="0"/>
+              <a:t> </a:t>
+            </a:r>
+            <a:r>
+              <a:rPr lang="fr-FR" dirty="0" err="1"/>
+              <a:t>still</a:t>
+            </a:r>
+            <a:r>
+              <a:rPr lang="fr-FR" dirty="0"/>
+              <a:t>-in-</a:t>
+            </a:r>
+            <a:r>
+              <a:rPr lang="fr-FR" dirty="0" err="1"/>
+              <a:t>progress</a:t>
+            </a:r>
+            <a:endParaRPr lang="fr-FR" dirty="0"/>
+          </a:p>
+        </p:txBody>
+      </p:sp>
+      <p:sp>
+        <p:nvSpPr>
+          <p:cNvPr id="4" name="Rectangle : carré corné 3">
+            <a:extLst>
+              <a:ext uri="{FF2B5EF4-FFF2-40B4-BE49-F238E27FC236}">
+                <a16:creationId xmlns:a16="http://schemas.microsoft.com/office/drawing/2014/main" id="{BCC964D0-B6A1-4940-9D7B-C9E7538C43C5}"/>
+              </a:ext>
+            </a:extLst>
+          </p:cNvPr>
+          <p:cNvSpPr/>
+          <p:nvPr/>
+        </p:nvSpPr>
+        <p:spPr>
+          <a:xfrm>
+            <a:off x="3902528" y="2412547"/>
+            <a:ext cx="1428750" cy="699144"/>
+          </a:xfrm>
+          <a:prstGeom prst="foldedCorner">
+            <a:avLst>
+              <a:gd name="adj" fmla="val 23143"/>
+            </a:avLst>
+          </a:prstGeom>
+          <a:pattFill prst="wdUpDiag">
+            <a:fgClr>
+              <a:schemeClr val="accent1"/>
+            </a:fgClr>
+            <a:bgClr>
+              <a:schemeClr val="bg1"/>
+            </a:bgClr>
+          </a:pattFill>
+        </p:spPr>
+        <p:style>
+          <a:lnRef idx="2">
+            <a:schemeClr val="accent1">
+              <a:shade val="50000"/>
+            </a:schemeClr>
+          </a:lnRef>
+          <a:fillRef idx="1">
+            <a:schemeClr val="accent1"/>
+          </a:fillRef>
+          <a:effectRef idx="0">
+            <a:schemeClr val="accent1"/>
+          </a:effectRef>
+          <a:fontRef idx="minor">
+            <a:schemeClr val="lt1"/>
+          </a:fontRef>
+        </p:style>
+        <p:txBody>
+          <a:bodyPr rtlCol="0" anchor="ctr"/>
+          <a:lstStyle/>
+          <a:p>
+            <a:pPr algn="ctr"/>
+            <a:endParaRPr lang="fr-FR" dirty="0"/>
+          </a:p>
+        </p:txBody>
+      </p:sp>
+      <p:sp>
+        <p:nvSpPr>
+          <p:cNvPr id="5" name="Flèche : droite 4">
+            <a:extLst>
+              <a:ext uri="{FF2B5EF4-FFF2-40B4-BE49-F238E27FC236}">
+                <a16:creationId xmlns:a16="http://schemas.microsoft.com/office/drawing/2014/main" id="{282DA952-D239-40E7-B8E6-4079C1581CCC}"/>
+              </a:ext>
+            </a:extLst>
+          </p:cNvPr>
+          <p:cNvSpPr/>
+          <p:nvPr/>
+        </p:nvSpPr>
+        <p:spPr>
+          <a:xfrm>
+            <a:off x="3005816" y="2870515"/>
+            <a:ext cx="640896" cy="319089"/>
+          </a:xfrm>
+          <a:prstGeom prst="rightArrow">
+            <a:avLst/>
+          </a:prstGeom>
+        </p:spPr>
+        <p:style>
+          <a:lnRef idx="2">
+            <a:schemeClr val="accent1">
+              <a:shade val="50000"/>
+            </a:schemeClr>
+          </a:lnRef>
+          <a:fillRef idx="1">
+            <a:schemeClr val="accent1"/>
+          </a:fillRef>
+          <a:effectRef idx="0">
+            <a:schemeClr val="accent1"/>
+          </a:effectRef>
+          <a:fontRef idx="minor">
+            <a:schemeClr val="lt1"/>
+          </a:fontRef>
+        </p:style>
+        <p:txBody>
+          <a:bodyPr rtlCol="0" anchor="ctr"/>
+          <a:lstStyle/>
+          <a:p>
+            <a:pPr algn="ctr"/>
+            <a:endParaRPr lang="fr-FR"/>
+          </a:p>
+        </p:txBody>
+      </p:sp>
+      <p:sp>
+        <p:nvSpPr>
+          <p:cNvPr id="6" name="ZoneTexte 5">
+            <a:extLst>
+              <a:ext uri="{FF2B5EF4-FFF2-40B4-BE49-F238E27FC236}">
+                <a16:creationId xmlns:a16="http://schemas.microsoft.com/office/drawing/2014/main" id="{BA4CF414-90C2-4B4F-A25E-3203430D3552}"/>
+              </a:ext>
+            </a:extLst>
+          </p:cNvPr>
+          <p:cNvSpPr txBox="1"/>
+          <p:nvPr/>
+        </p:nvSpPr>
+        <p:spPr>
+          <a:xfrm>
+            <a:off x="1993444" y="2631854"/>
+            <a:ext cx="1710419" cy="369332"/>
+          </a:xfrm>
+          <a:prstGeom prst="rect">
+            <a:avLst/>
+          </a:prstGeom>
+          <a:noFill/>
+        </p:spPr>
+        <p:txBody>
+          <a:bodyPr wrap="square" rtlCol="0">
+            <a:spAutoFit/>
+          </a:bodyPr>
+          <a:lstStyle/>
+          <a:p>
+            <a:r>
+              <a:rPr lang="fr-FR" dirty="0" err="1"/>
+              <a:t>writeAppend</a:t>
+            </a:r>
+            <a:r>
+              <a:rPr lang="fr-FR" dirty="0"/>
+              <a:t>()</a:t>
+            </a:r>
+          </a:p>
+        </p:txBody>
+      </p:sp>
+      <p:sp>
+        <p:nvSpPr>
+          <p:cNvPr id="7" name="Flèche : droite 6">
+            <a:extLst>
+              <a:ext uri="{FF2B5EF4-FFF2-40B4-BE49-F238E27FC236}">
+                <a16:creationId xmlns:a16="http://schemas.microsoft.com/office/drawing/2014/main" id="{1A2C9452-A22D-4A35-A295-78EA28428AD9}"/>
+              </a:ext>
+            </a:extLst>
+          </p:cNvPr>
+          <p:cNvSpPr/>
+          <p:nvPr/>
+        </p:nvSpPr>
+        <p:spPr>
+          <a:xfrm>
+            <a:off x="3005816" y="3349308"/>
+            <a:ext cx="640896" cy="319089"/>
+          </a:xfrm>
+          <a:prstGeom prst="rightArrow">
+            <a:avLst/>
+          </a:prstGeom>
+        </p:spPr>
+        <p:style>
+          <a:lnRef idx="2">
+            <a:schemeClr val="accent1">
+              <a:shade val="50000"/>
+            </a:schemeClr>
+          </a:lnRef>
+          <a:fillRef idx="1">
+            <a:schemeClr val="accent1"/>
+          </a:fillRef>
+          <a:effectRef idx="0">
+            <a:schemeClr val="accent1"/>
+          </a:effectRef>
+          <a:fontRef idx="minor">
+            <a:schemeClr val="lt1"/>
+          </a:fontRef>
+        </p:style>
+        <p:txBody>
+          <a:bodyPr rtlCol="0" anchor="ctr"/>
+          <a:lstStyle/>
+          <a:p>
+            <a:pPr algn="ctr"/>
+            <a:endParaRPr lang="fr-FR"/>
+          </a:p>
+        </p:txBody>
+      </p:sp>
+      <p:sp>
+        <p:nvSpPr>
+          <p:cNvPr id="8" name="ZoneTexte 7">
+            <a:extLst>
+              <a:ext uri="{FF2B5EF4-FFF2-40B4-BE49-F238E27FC236}">
+                <a16:creationId xmlns:a16="http://schemas.microsoft.com/office/drawing/2014/main" id="{B84CC993-BA82-4953-8F6F-F7CD6E542486}"/>
+              </a:ext>
+            </a:extLst>
+          </p:cNvPr>
+          <p:cNvSpPr txBox="1"/>
+          <p:nvPr/>
+        </p:nvSpPr>
+        <p:spPr>
+          <a:xfrm>
+            <a:off x="2223229" y="3299065"/>
+            <a:ext cx="782587" cy="369332"/>
+          </a:xfrm>
+          <a:prstGeom prst="rect">
+            <a:avLst/>
+          </a:prstGeom>
+          <a:noFill/>
+        </p:spPr>
+        <p:txBody>
+          <a:bodyPr wrap="none" rtlCol="0">
+            <a:spAutoFit/>
+          </a:bodyPr>
+          <a:lstStyle/>
+          <a:p>
+            <a:r>
+              <a:rPr lang="fr-FR" dirty="0"/>
+              <a:t>flush()</a:t>
+            </a:r>
+          </a:p>
+        </p:txBody>
+      </p:sp>
+      <p:sp>
+        <p:nvSpPr>
+          <p:cNvPr id="9" name="Rectangle : carré corné 8">
+            <a:extLst>
+              <a:ext uri="{FF2B5EF4-FFF2-40B4-BE49-F238E27FC236}">
+                <a16:creationId xmlns:a16="http://schemas.microsoft.com/office/drawing/2014/main" id="{EA5C73D8-63A1-4C88-9DB1-549E9C6537FB}"/>
+              </a:ext>
+            </a:extLst>
+          </p:cNvPr>
+          <p:cNvSpPr/>
+          <p:nvPr/>
+        </p:nvSpPr>
+        <p:spPr>
+          <a:xfrm>
+            <a:off x="6825423" y="4073857"/>
+            <a:ext cx="1428750" cy="2062250"/>
+          </a:xfrm>
+          <a:prstGeom prst="foldedCorner">
+            <a:avLst>
+              <a:gd name="adj" fmla="val 23143"/>
+            </a:avLst>
+          </a:prstGeom>
+          <a:noFill/>
+        </p:spPr>
+        <p:style>
+          <a:lnRef idx="2">
+            <a:schemeClr val="accent1">
+              <a:shade val="50000"/>
+            </a:schemeClr>
+          </a:lnRef>
+          <a:fillRef idx="1">
+            <a:schemeClr val="accent1"/>
+          </a:fillRef>
+          <a:effectRef idx="0">
+            <a:schemeClr val="accent1"/>
+          </a:effectRef>
+          <a:fontRef idx="minor">
+            <a:schemeClr val="lt1"/>
+          </a:fontRef>
+        </p:style>
+        <p:txBody>
+          <a:bodyPr rtlCol="0" anchor="ctr"/>
+          <a:lstStyle/>
+          <a:p>
+            <a:pPr algn="ctr"/>
+            <a:endParaRPr lang="fr-FR" dirty="0"/>
+          </a:p>
+        </p:txBody>
+      </p:sp>
+      <p:sp>
+        <p:nvSpPr>
+          <p:cNvPr id="10" name="Flèche : droite 9">
+            <a:extLst>
+              <a:ext uri="{FF2B5EF4-FFF2-40B4-BE49-F238E27FC236}">
+                <a16:creationId xmlns:a16="http://schemas.microsoft.com/office/drawing/2014/main" id="{24A65F69-550B-42D2-9C45-4A97CD6F488F}"/>
+              </a:ext>
+            </a:extLst>
+          </p:cNvPr>
+          <p:cNvSpPr/>
+          <p:nvPr/>
+        </p:nvSpPr>
+        <p:spPr>
+          <a:xfrm>
+            <a:off x="3062967" y="2271454"/>
+            <a:ext cx="640896" cy="319089"/>
+          </a:xfrm>
+          <a:prstGeom prst="rightArrow">
+            <a:avLst/>
+          </a:prstGeom>
+        </p:spPr>
+        <p:style>
+          <a:lnRef idx="2">
+            <a:schemeClr val="accent1">
+              <a:shade val="50000"/>
+            </a:schemeClr>
+          </a:lnRef>
+          <a:fillRef idx="1">
+            <a:schemeClr val="accent1"/>
+          </a:fillRef>
+          <a:effectRef idx="0">
+            <a:schemeClr val="accent1"/>
+          </a:effectRef>
+          <a:fontRef idx="minor">
+            <a:schemeClr val="lt1"/>
+          </a:fontRef>
+        </p:style>
+        <p:txBody>
+          <a:bodyPr rtlCol="0" anchor="ctr"/>
+          <a:lstStyle/>
+          <a:p>
+            <a:pPr algn="ctr"/>
+            <a:endParaRPr lang="fr-FR"/>
+          </a:p>
+        </p:txBody>
+      </p:sp>
+      <p:sp>
+        <p:nvSpPr>
+          <p:cNvPr id="11" name="ZoneTexte 10">
+            <a:extLst>
+              <a:ext uri="{FF2B5EF4-FFF2-40B4-BE49-F238E27FC236}">
+                <a16:creationId xmlns:a16="http://schemas.microsoft.com/office/drawing/2014/main" id="{81AC7ECE-4950-4AC7-8CF6-D2D22220E5A5}"/>
+              </a:ext>
+            </a:extLst>
+          </p:cNvPr>
+          <p:cNvSpPr txBox="1"/>
+          <p:nvPr/>
+        </p:nvSpPr>
+        <p:spPr>
+          <a:xfrm>
+            <a:off x="2224090" y="2227880"/>
+            <a:ext cx="822375" cy="369332"/>
+          </a:xfrm>
+          <a:prstGeom prst="rect">
+            <a:avLst/>
+          </a:prstGeom>
+          <a:noFill/>
+        </p:spPr>
+        <p:txBody>
+          <a:bodyPr wrap="square" rtlCol="0">
+            <a:spAutoFit/>
+          </a:bodyPr>
+          <a:lstStyle/>
+          <a:p>
+            <a:r>
+              <a:rPr lang="fr-FR" dirty="0" err="1"/>
+              <a:t>create</a:t>
+            </a:r>
+            <a:endParaRPr lang="fr-FR" dirty="0"/>
+          </a:p>
+        </p:txBody>
+      </p:sp>
+      <p:sp>
+        <p:nvSpPr>
+          <p:cNvPr id="12" name="Flèche : droite 11">
+            <a:extLst>
+              <a:ext uri="{FF2B5EF4-FFF2-40B4-BE49-F238E27FC236}">
+                <a16:creationId xmlns:a16="http://schemas.microsoft.com/office/drawing/2014/main" id="{DF76D0F9-BF08-49D9-94FA-BCC3B4A5AF72}"/>
+              </a:ext>
+            </a:extLst>
+          </p:cNvPr>
+          <p:cNvSpPr/>
+          <p:nvPr/>
+        </p:nvSpPr>
+        <p:spPr>
+          <a:xfrm>
+            <a:off x="9036760" y="3822430"/>
+            <a:ext cx="640896" cy="319089"/>
+          </a:xfrm>
+          <a:prstGeom prst="rightArrow">
+            <a:avLst/>
+          </a:prstGeom>
+        </p:spPr>
+        <p:style>
+          <a:lnRef idx="2">
+            <a:schemeClr val="accent1">
+              <a:shade val="50000"/>
+            </a:schemeClr>
+          </a:lnRef>
+          <a:fillRef idx="1">
+            <a:schemeClr val="accent1"/>
+          </a:fillRef>
+          <a:effectRef idx="0">
+            <a:schemeClr val="accent1"/>
+          </a:effectRef>
+          <a:fontRef idx="minor">
+            <a:schemeClr val="lt1"/>
+          </a:fontRef>
+        </p:style>
+        <p:txBody>
+          <a:bodyPr rtlCol="0" anchor="ctr"/>
+          <a:lstStyle/>
+          <a:p>
+            <a:pPr algn="ctr"/>
+            <a:endParaRPr lang="fr-FR"/>
+          </a:p>
+        </p:txBody>
+      </p:sp>
+      <p:sp>
+        <p:nvSpPr>
+          <p:cNvPr id="13" name="ZoneTexte 12">
+            <a:extLst>
+              <a:ext uri="{FF2B5EF4-FFF2-40B4-BE49-F238E27FC236}">
+                <a16:creationId xmlns:a16="http://schemas.microsoft.com/office/drawing/2014/main" id="{97CB7BB2-F205-492A-8044-2E4D2D0EC668}"/>
+              </a:ext>
+            </a:extLst>
+          </p:cNvPr>
+          <p:cNvSpPr txBox="1"/>
+          <p:nvPr/>
+        </p:nvSpPr>
+        <p:spPr>
+          <a:xfrm>
+            <a:off x="8254173" y="3238988"/>
+            <a:ext cx="1187313" cy="646331"/>
+          </a:xfrm>
+          <a:prstGeom prst="rect">
+            <a:avLst/>
+          </a:prstGeom>
+          <a:noFill/>
+        </p:spPr>
+        <p:txBody>
+          <a:bodyPr wrap="none" rtlCol="0">
+            <a:spAutoFit/>
+          </a:bodyPr>
+          <a:lstStyle/>
+          <a:p>
+            <a:r>
+              <a:rPr lang="fr-FR" dirty="0"/>
+              <a:t>open()</a:t>
+            </a:r>
+          </a:p>
+          <a:p>
+            <a:r>
+              <a:rPr lang="fr-FR" dirty="0"/>
+              <a:t>=</a:t>
+            </a:r>
+            <a:r>
+              <a:rPr lang="fr-FR" dirty="0" err="1"/>
+              <a:t>readAt</a:t>
+            </a:r>
+            <a:r>
+              <a:rPr lang="fr-FR" dirty="0"/>
+              <a:t>(0)</a:t>
+            </a:r>
+          </a:p>
+        </p:txBody>
+      </p:sp>
+      <p:sp>
+        <p:nvSpPr>
+          <p:cNvPr id="14" name="Flèche : droite 13">
+            <a:extLst>
+              <a:ext uri="{FF2B5EF4-FFF2-40B4-BE49-F238E27FC236}">
+                <a16:creationId xmlns:a16="http://schemas.microsoft.com/office/drawing/2014/main" id="{E0C551B6-F124-4B2D-A3F1-49FB78F3DD28}"/>
+              </a:ext>
+            </a:extLst>
+          </p:cNvPr>
+          <p:cNvSpPr/>
+          <p:nvPr/>
+        </p:nvSpPr>
+        <p:spPr>
+          <a:xfrm>
+            <a:off x="9036760" y="4668601"/>
+            <a:ext cx="640896" cy="319089"/>
+          </a:xfrm>
+          <a:prstGeom prst="rightArrow">
+            <a:avLst/>
+          </a:prstGeom>
+        </p:spPr>
+        <p:style>
+          <a:lnRef idx="2">
+            <a:schemeClr val="accent1">
+              <a:shade val="50000"/>
+            </a:schemeClr>
+          </a:lnRef>
+          <a:fillRef idx="1">
+            <a:schemeClr val="accent1"/>
+          </a:fillRef>
+          <a:effectRef idx="0">
+            <a:schemeClr val="accent1"/>
+          </a:effectRef>
+          <a:fontRef idx="minor">
+            <a:schemeClr val="lt1"/>
+          </a:fontRef>
+        </p:style>
+        <p:txBody>
+          <a:bodyPr rtlCol="0" anchor="ctr"/>
+          <a:lstStyle/>
+          <a:p>
+            <a:pPr algn="ctr"/>
+            <a:endParaRPr lang="fr-FR"/>
+          </a:p>
+        </p:txBody>
+      </p:sp>
+      <p:sp>
+        <p:nvSpPr>
+          <p:cNvPr id="15" name="ZoneTexte 14">
+            <a:extLst>
+              <a:ext uri="{FF2B5EF4-FFF2-40B4-BE49-F238E27FC236}">
+                <a16:creationId xmlns:a16="http://schemas.microsoft.com/office/drawing/2014/main" id="{50E4907D-33E1-48D2-B082-9070F7B222DA}"/>
+              </a:ext>
+            </a:extLst>
+          </p:cNvPr>
+          <p:cNvSpPr txBox="1"/>
+          <p:nvPr/>
+        </p:nvSpPr>
+        <p:spPr>
+          <a:xfrm>
+            <a:off x="8322412" y="4412401"/>
+            <a:ext cx="954877" cy="369332"/>
+          </a:xfrm>
+          <a:prstGeom prst="rect">
+            <a:avLst/>
+          </a:prstGeom>
+          <a:noFill/>
+        </p:spPr>
+        <p:txBody>
+          <a:bodyPr wrap="none" rtlCol="0">
+            <a:spAutoFit/>
+          </a:bodyPr>
+          <a:lstStyle/>
+          <a:p>
+            <a:r>
+              <a:rPr lang="fr-FR" dirty="0" err="1"/>
+              <a:t>readAt</a:t>
+            </a:r>
+            <a:r>
+              <a:rPr lang="fr-FR" dirty="0"/>
+              <a:t>()</a:t>
+            </a:r>
+          </a:p>
+        </p:txBody>
+      </p:sp>
+    </p:spTree>
+    <p:extLst>
+      <p:ext uri="{BB962C8B-B14F-4D97-AF65-F5344CB8AC3E}">
+        <p14:creationId xmlns:p14="http://schemas.microsoft.com/office/powerpoint/2010/main" val="2296253449"/>
+      </p:ext>
+    </p:extLst>
+  </p:cSld>
+  <p:clrMapOvr>
+    <a:masterClrMapping/>
+  </p:clrMapOvr>
+</p:sld>
+</file>
+
+<file path=ppt/slides/slide18.xml><?xml version="1.0" encoding="utf-8"?>
+<p:sld xmlns:a="http://schemas.openxmlformats.org/drawingml/2006/main" xmlns:r="http://schemas.openxmlformats.org/officeDocument/2006/relationships" xmlns:p="http://schemas.openxmlformats.org/presentationml/2006/main">
+  <p:cSld>
+    <p:spTree>
+      <p:nvGrpSpPr>
+        <p:cNvPr id="1" name=""/>
+        <p:cNvGrpSpPr/>
+        <p:nvPr/>
+      </p:nvGrpSpPr>
+      <p:grpSpPr>
+        <a:xfrm>
+          <a:off x="0" y="0"/>
+          <a:ext cx="0" cy="0"/>
+          <a:chOff x="0" y="0"/>
+          <a:chExt cx="0" cy="0"/>
+        </a:xfrm>
+      </p:grpSpPr>
+      <p:sp>
+        <p:nvSpPr>
+          <p:cNvPr id="2" name="Titre 1">
+            <a:extLst>
+              <a:ext uri="{FF2B5EF4-FFF2-40B4-BE49-F238E27FC236}">
+                <a16:creationId xmlns:a16="http://schemas.microsoft.com/office/drawing/2014/main" id="{E8587EA3-B74E-44BF-A653-9689057B2E86}"/>
+              </a:ext>
+            </a:extLst>
+          </p:cNvPr>
+          <p:cNvSpPr>
+            <a:spLocks noGrp="1"/>
+          </p:cNvSpPr>
+          <p:nvPr>
+            <p:ph type="title"/>
+          </p:nvPr>
+        </p:nvSpPr>
+        <p:spPr/>
+        <p:txBody>
+          <a:bodyPr>
+            <a:normAutofit fontScale="90000"/>
+          </a:bodyPr>
+          <a:lstStyle/>
+          <a:p>
+            <a:r>
+              <a:rPr lang="fr-FR" dirty="0" err="1"/>
+              <a:t>See</a:t>
+            </a:r>
+            <a:r>
+              <a:rPr lang="fr-FR" dirty="0"/>
+              <a:t> Hadoop </a:t>
+            </a:r>
+            <a:r>
+              <a:rPr lang="fr-FR" dirty="0" err="1"/>
+              <a:t>FileSystem</a:t>
+            </a:r>
+            <a:r>
+              <a:rPr lang="fr-FR" dirty="0"/>
+              <a:t> Read API:</a:t>
+            </a:r>
+            <a:br>
+              <a:rPr lang="fr-FR" dirty="0"/>
+            </a:br>
+            <a:r>
+              <a:rPr lang="fr-FR" dirty="0" err="1"/>
+              <a:t>FileSystem.open</a:t>
+            </a:r>
+            <a:r>
+              <a:rPr lang="fr-FR" dirty="0"/>
+              <a:t>(Path)  -&gt; </a:t>
+            </a:r>
+            <a:r>
+              <a:rPr lang="fr-FR" dirty="0" err="1"/>
+              <a:t>FSDataInputStream</a:t>
+            </a:r>
+            <a:br>
+              <a:rPr lang="fr-FR" dirty="0"/>
+            </a:br>
+            <a:endParaRPr lang="fr-FR" dirty="0"/>
+          </a:p>
+        </p:txBody>
+      </p:sp>
+      <p:pic>
+        <p:nvPicPr>
+          <p:cNvPr id="5" name="Image 4">
+            <a:extLst>
+              <a:ext uri="{FF2B5EF4-FFF2-40B4-BE49-F238E27FC236}">
+                <a16:creationId xmlns:a16="http://schemas.microsoft.com/office/drawing/2014/main" id="{71D83C11-A5AB-4F0A-B81E-758B13CCCAB8}"/>
+              </a:ext>
+            </a:extLst>
+          </p:cNvPr>
+          <p:cNvPicPr>
+            <a:picLocks noChangeAspect="1"/>
+          </p:cNvPicPr>
+          <p:nvPr/>
+        </p:nvPicPr>
+        <p:blipFill>
+          <a:blip r:embed="rId2"/>
+          <a:stretch>
+            <a:fillRect/>
+          </a:stretch>
+        </p:blipFill>
+        <p:spPr>
+          <a:xfrm>
+            <a:off x="156523" y="1775629"/>
+            <a:ext cx="11966744" cy="4461398"/>
+          </a:xfrm>
+          <a:prstGeom prst="rect">
+            <a:avLst/>
+          </a:prstGeom>
+        </p:spPr>
+      </p:pic>
+    </p:spTree>
+    <p:extLst>
+      <p:ext uri="{BB962C8B-B14F-4D97-AF65-F5344CB8AC3E}">
+        <p14:creationId xmlns:p14="http://schemas.microsoft.com/office/powerpoint/2010/main" val="1163237028"/>
+      </p:ext>
+    </p:extLst>
+  </p:cSld>
+  <p:clrMapOvr>
+    <a:masterClrMapping/>
+  </p:clrMapOvr>
+</p:sld>
+</file>
+
+<file path=ppt/slides/slide19.xml><?xml version="1.0" encoding="utf-8"?>
+<p:sld xmlns:a="http://schemas.openxmlformats.org/drawingml/2006/main" xmlns:r="http://schemas.openxmlformats.org/officeDocument/2006/relationships" xmlns:p="http://schemas.openxmlformats.org/presentationml/2006/main">
+  <p:cSld>
+    <p:spTree>
+      <p:nvGrpSpPr>
+        <p:cNvPr id="1" name=""/>
+        <p:cNvGrpSpPr/>
+        <p:nvPr/>
+      </p:nvGrpSpPr>
+      <p:grpSpPr>
+        <a:xfrm>
+          <a:off x="0" y="0"/>
+          <a:ext cx="0" cy="0"/>
+          <a:chOff x="0" y="0"/>
+          <a:chExt cx="0" cy="0"/>
+        </a:xfrm>
+      </p:grpSpPr>
+      <p:sp>
+        <p:nvSpPr>
+          <p:cNvPr id="2" name="Titre 1">
+            <a:extLst>
+              <a:ext uri="{FF2B5EF4-FFF2-40B4-BE49-F238E27FC236}">
+                <a16:creationId xmlns:a16="http://schemas.microsoft.com/office/drawing/2014/main" id="{FCC97FD1-0AC0-4485-A8D0-A1DEC1E2E2F6}"/>
+              </a:ext>
+            </a:extLst>
+          </p:cNvPr>
+          <p:cNvSpPr>
+            <a:spLocks noGrp="1"/>
+          </p:cNvSpPr>
+          <p:nvPr>
+            <p:ph type="title"/>
+          </p:nvPr>
+        </p:nvSpPr>
+        <p:spPr/>
+        <p:txBody>
+          <a:bodyPr/>
+          <a:lstStyle/>
+          <a:p>
+            <a:r>
+              <a:rPr lang="fr-FR" dirty="0" err="1"/>
+              <a:t>FSDataInputStream</a:t>
+            </a:r>
+            <a:r>
+              <a:rPr lang="fr-FR" dirty="0"/>
+              <a:t> = </a:t>
+            </a:r>
+            <a:r>
+              <a:rPr lang="fr-FR" dirty="0" err="1"/>
+              <a:t>InputStream</a:t>
+            </a:r>
+            <a:r>
+              <a:rPr lang="fr-FR" dirty="0"/>
+              <a:t> + </a:t>
+            </a:r>
+            <a:r>
+              <a:rPr lang="fr-FR" dirty="0" err="1"/>
+              <a:t>Seekable</a:t>
+            </a:r>
+            <a:endParaRPr lang="fr-FR" dirty="0"/>
+          </a:p>
+        </p:txBody>
+      </p:sp>
+      <p:pic>
+        <p:nvPicPr>
+          <p:cNvPr id="5" name="Image 4">
+            <a:extLst>
+              <a:ext uri="{FF2B5EF4-FFF2-40B4-BE49-F238E27FC236}">
+                <a16:creationId xmlns:a16="http://schemas.microsoft.com/office/drawing/2014/main" id="{60D6263D-5524-4AB1-BD17-69F4C800C6A0}"/>
+              </a:ext>
+            </a:extLst>
+          </p:cNvPr>
+          <p:cNvPicPr>
+            <a:picLocks noChangeAspect="1"/>
+          </p:cNvPicPr>
+          <p:nvPr/>
+        </p:nvPicPr>
+        <p:blipFill>
+          <a:blip r:embed="rId2"/>
+          <a:stretch>
+            <a:fillRect/>
+          </a:stretch>
+        </p:blipFill>
+        <p:spPr>
+          <a:xfrm>
+            <a:off x="92561" y="2142699"/>
+            <a:ext cx="11425860" cy="3573426"/>
+          </a:xfrm>
+          <a:prstGeom prst="rect">
+            <a:avLst/>
+          </a:prstGeom>
+        </p:spPr>
+      </p:pic>
+    </p:spTree>
+    <p:extLst>
+      <p:ext uri="{BB962C8B-B14F-4D97-AF65-F5344CB8AC3E}">
+        <p14:creationId xmlns:p14="http://schemas.microsoft.com/office/powerpoint/2010/main" val="3819431378"/>
+      </p:ext>
+    </p:extLst>
+  </p:cSld>
+  <p:clrMapOvr>
+    <a:masterClrMapping/>
+  </p:clrMapOvr>
+</p:sld>
+</file>
+
 <file path=ppt/slides/slide2.xml><?xml version="1.0" encoding="utf-8"?>
 <p:sld xmlns:a="http://schemas.openxmlformats.org/drawingml/2006/main" xmlns:r="http://schemas.openxmlformats.org/officeDocument/2006/relationships" xmlns:p="http://schemas.openxmlformats.org/presentationml/2006/main">
   <p:cSld>
@@ -4719,6 +9142,4089 @@
     <p:extLst>
       <p:ext uri="{BB962C8B-B14F-4D97-AF65-F5344CB8AC3E}">
         <p14:creationId xmlns:p14="http://schemas.microsoft.com/office/powerpoint/2010/main" val="3559626840"/>
+      </p:ext>
+    </p:extLst>
+  </p:cSld>
+  <p:clrMapOvr>
+    <a:masterClrMapping/>
+  </p:clrMapOvr>
+</p:sld>
+</file>
+
+<file path=ppt/slides/slide20.xml><?xml version="1.0" encoding="utf-8"?>
+<p:sld xmlns:a="http://schemas.openxmlformats.org/drawingml/2006/main" xmlns:r="http://schemas.openxmlformats.org/officeDocument/2006/relationships" xmlns:p="http://schemas.openxmlformats.org/presentationml/2006/main">
+  <p:cSld>
+    <p:spTree>
+      <p:nvGrpSpPr>
+        <p:cNvPr id="1" name=""/>
+        <p:cNvGrpSpPr/>
+        <p:nvPr/>
+      </p:nvGrpSpPr>
+      <p:grpSpPr>
+        <a:xfrm>
+          <a:off x="0" y="0"/>
+          <a:ext cx="0" cy="0"/>
+          <a:chOff x="0" y="0"/>
+          <a:chExt cx="0" cy="0"/>
+        </a:xfrm>
+      </p:grpSpPr>
+      <p:sp>
+        <p:nvSpPr>
+          <p:cNvPr id="2" name="Titre 1">
+            <a:extLst>
+              <a:ext uri="{FF2B5EF4-FFF2-40B4-BE49-F238E27FC236}">
+                <a16:creationId xmlns:a16="http://schemas.microsoft.com/office/drawing/2014/main" id="{E7955A5A-AD9B-4554-88F3-170F6FCC6678}"/>
+              </a:ext>
+            </a:extLst>
+          </p:cNvPr>
+          <p:cNvSpPr>
+            <a:spLocks noGrp="1"/>
+          </p:cNvSpPr>
+          <p:nvPr>
+            <p:ph type="title"/>
+          </p:nvPr>
+        </p:nvSpPr>
+        <p:spPr>
+          <a:xfrm>
+            <a:off x="838200" y="122830"/>
+            <a:ext cx="10515600" cy="962168"/>
+          </a:xfrm>
+        </p:spPr>
+        <p:txBody>
+          <a:bodyPr/>
+          <a:lstStyle/>
+          <a:p>
+            <a:r>
+              <a:rPr lang="fr-FR" dirty="0" err="1"/>
+              <a:t>See</a:t>
+            </a:r>
+            <a:r>
+              <a:rPr lang="fr-FR" dirty="0"/>
+              <a:t> Hadoop </a:t>
+            </a:r>
+            <a:r>
+              <a:rPr lang="fr-FR" dirty="0" err="1"/>
+              <a:t>FileSystem</a:t>
+            </a:r>
+            <a:r>
+              <a:rPr lang="fr-FR" dirty="0"/>
+              <a:t> Write API: </a:t>
+            </a:r>
+            <a:r>
+              <a:rPr lang="fr-FR" dirty="0" err="1"/>
+              <a:t>create</a:t>
+            </a:r>
+            <a:r>
+              <a:rPr lang="fr-FR" dirty="0"/>
+              <a:t>()</a:t>
+            </a:r>
+          </a:p>
+        </p:txBody>
+      </p:sp>
+      <p:pic>
+        <p:nvPicPr>
+          <p:cNvPr id="5" name="Image 4">
+            <a:extLst>
+              <a:ext uri="{FF2B5EF4-FFF2-40B4-BE49-F238E27FC236}">
+                <a16:creationId xmlns:a16="http://schemas.microsoft.com/office/drawing/2014/main" id="{9FBFCDA6-9EDB-4EEE-8B20-3062614BB806}"/>
+              </a:ext>
+            </a:extLst>
+          </p:cNvPr>
+          <p:cNvPicPr>
+            <a:picLocks noChangeAspect="1"/>
+          </p:cNvPicPr>
+          <p:nvPr/>
+        </p:nvPicPr>
+        <p:blipFill>
+          <a:blip r:embed="rId2"/>
+          <a:stretch>
+            <a:fillRect/>
+          </a:stretch>
+        </p:blipFill>
+        <p:spPr>
+          <a:xfrm>
+            <a:off x="2511188" y="927389"/>
+            <a:ext cx="8124335" cy="5942547"/>
+          </a:xfrm>
+          <a:prstGeom prst="rect">
+            <a:avLst/>
+          </a:prstGeom>
+        </p:spPr>
+      </p:pic>
+    </p:spTree>
+    <p:extLst>
+      <p:ext uri="{BB962C8B-B14F-4D97-AF65-F5344CB8AC3E}">
+        <p14:creationId xmlns:p14="http://schemas.microsoft.com/office/powerpoint/2010/main" val="4033051230"/>
+      </p:ext>
+    </p:extLst>
+  </p:cSld>
+  <p:clrMapOvr>
+    <a:masterClrMapping/>
+  </p:clrMapOvr>
+</p:sld>
+</file>
+
+<file path=ppt/slides/slide21.xml><?xml version="1.0" encoding="utf-8"?>
+<p:sld xmlns:a="http://schemas.openxmlformats.org/drawingml/2006/main" xmlns:r="http://schemas.openxmlformats.org/officeDocument/2006/relationships" xmlns:p="http://schemas.openxmlformats.org/presentationml/2006/main">
+  <p:cSld>
+    <p:spTree>
+      <p:nvGrpSpPr>
+        <p:cNvPr id="1" name=""/>
+        <p:cNvGrpSpPr/>
+        <p:nvPr/>
+      </p:nvGrpSpPr>
+      <p:grpSpPr>
+        <a:xfrm>
+          <a:off x="0" y="0"/>
+          <a:ext cx="0" cy="0"/>
+          <a:chOff x="0" y="0"/>
+          <a:chExt cx="0" cy="0"/>
+        </a:xfrm>
+      </p:grpSpPr>
+      <p:sp>
+        <p:nvSpPr>
+          <p:cNvPr id="2" name="Titre 1">
+            <a:extLst>
+              <a:ext uri="{FF2B5EF4-FFF2-40B4-BE49-F238E27FC236}">
+                <a16:creationId xmlns:a16="http://schemas.microsoft.com/office/drawing/2014/main" id="{0EB3B90C-05BD-47EA-BBC7-036D8EF6C4C8}"/>
+              </a:ext>
+            </a:extLst>
+          </p:cNvPr>
+          <p:cNvSpPr>
+            <a:spLocks noGrp="1"/>
+          </p:cNvSpPr>
+          <p:nvPr>
+            <p:ph type="title"/>
+          </p:nvPr>
+        </p:nvSpPr>
+        <p:spPr/>
+        <p:txBody>
+          <a:bodyPr/>
+          <a:lstStyle/>
+          <a:p>
+            <a:r>
+              <a:rPr lang="fr-FR" dirty="0" err="1"/>
+              <a:t>See</a:t>
+            </a:r>
+            <a:r>
+              <a:rPr lang="fr-FR" dirty="0"/>
+              <a:t> </a:t>
+            </a:r>
+            <a:r>
+              <a:rPr lang="fr-FR" dirty="0" err="1"/>
+              <a:t>FSDataOutputStream</a:t>
+            </a:r>
+            <a:r>
+              <a:rPr lang="fr-FR" dirty="0"/>
+              <a:t> = </a:t>
+            </a:r>
+            <a:r>
+              <a:rPr lang="fr-FR" dirty="0" err="1"/>
+              <a:t>only</a:t>
+            </a:r>
+            <a:r>
+              <a:rPr lang="fr-FR" dirty="0"/>
+              <a:t> </a:t>
+            </a:r>
+            <a:r>
+              <a:rPr lang="fr-FR" dirty="0" err="1"/>
+              <a:t>write+flush</a:t>
+            </a:r>
+            <a:br>
+              <a:rPr lang="fr-FR" dirty="0"/>
+            </a:br>
+            <a:r>
+              <a:rPr lang="fr-FR" dirty="0"/>
+              <a:t>       (and </a:t>
+            </a:r>
+            <a:r>
+              <a:rPr lang="fr-FR" dirty="0" err="1"/>
+              <a:t>optionnaly</a:t>
+            </a:r>
+            <a:r>
+              <a:rPr lang="fr-FR" dirty="0"/>
+              <a:t> « </a:t>
+            </a:r>
+            <a:r>
+              <a:rPr lang="fr-FR" dirty="0" err="1"/>
+              <a:t>dropBehind</a:t>
+            </a:r>
+            <a:r>
+              <a:rPr lang="fr-FR" dirty="0"/>
+              <a:t>() »</a:t>
+            </a:r>
+          </a:p>
+        </p:txBody>
+      </p:sp>
+      <p:pic>
+        <p:nvPicPr>
+          <p:cNvPr id="5" name="Image 4">
+            <a:extLst>
+              <a:ext uri="{FF2B5EF4-FFF2-40B4-BE49-F238E27FC236}">
+                <a16:creationId xmlns:a16="http://schemas.microsoft.com/office/drawing/2014/main" id="{A1CF1460-50C7-494C-9013-6BE8D0D4CED6}"/>
+              </a:ext>
+            </a:extLst>
+          </p:cNvPr>
+          <p:cNvPicPr>
+            <a:picLocks noChangeAspect="1"/>
+          </p:cNvPicPr>
+          <p:nvPr/>
+        </p:nvPicPr>
+        <p:blipFill>
+          <a:blip r:embed="rId2"/>
+          <a:stretch>
+            <a:fillRect/>
+          </a:stretch>
+        </p:blipFill>
+        <p:spPr>
+          <a:xfrm>
+            <a:off x="59529" y="2545307"/>
+            <a:ext cx="12067169" cy="3500651"/>
+          </a:xfrm>
+          <a:prstGeom prst="rect">
+            <a:avLst/>
+          </a:prstGeom>
+        </p:spPr>
+      </p:pic>
+    </p:spTree>
+    <p:extLst>
+      <p:ext uri="{BB962C8B-B14F-4D97-AF65-F5344CB8AC3E}">
+        <p14:creationId xmlns:p14="http://schemas.microsoft.com/office/powerpoint/2010/main" val="3182535481"/>
+      </p:ext>
+    </p:extLst>
+  </p:cSld>
+  <p:clrMapOvr>
+    <a:masterClrMapping/>
+  </p:clrMapOvr>
+</p:sld>
+</file>
+
+<file path=ppt/slides/slide22.xml><?xml version="1.0" encoding="utf-8"?>
+<p:sld xmlns:a="http://schemas.openxmlformats.org/drawingml/2006/main" xmlns:r="http://schemas.openxmlformats.org/officeDocument/2006/relationships" xmlns:p="http://schemas.openxmlformats.org/presentationml/2006/main">
+  <p:cSld>
+    <p:spTree>
+      <p:nvGrpSpPr>
+        <p:cNvPr id="1" name=""/>
+        <p:cNvGrpSpPr/>
+        <p:nvPr/>
+      </p:nvGrpSpPr>
+      <p:grpSpPr>
+        <a:xfrm>
+          <a:off x="0" y="0"/>
+          <a:ext cx="0" cy="0"/>
+          <a:chOff x="0" y="0"/>
+          <a:chExt cx="0" cy="0"/>
+        </a:xfrm>
+      </p:grpSpPr>
+      <p:sp>
+        <p:nvSpPr>
+          <p:cNvPr id="2" name="Titre 1">
+            <a:extLst>
+              <a:ext uri="{FF2B5EF4-FFF2-40B4-BE49-F238E27FC236}">
+                <a16:creationId xmlns:a16="http://schemas.microsoft.com/office/drawing/2014/main" id="{1B587121-03A3-45FE-A9A2-8AB10B2C2FD6}"/>
+              </a:ext>
+            </a:extLst>
+          </p:cNvPr>
+          <p:cNvSpPr>
+            <a:spLocks noGrp="1"/>
+          </p:cNvSpPr>
+          <p:nvPr>
+            <p:ph type="title"/>
+          </p:nvPr>
+        </p:nvSpPr>
+        <p:spPr>
+          <a:xfrm>
+            <a:off x="1090683" y="2453233"/>
+            <a:ext cx="10515600" cy="2589615"/>
+          </a:xfrm>
+        </p:spPr>
+        <p:txBody>
+          <a:bodyPr>
+            <a:normAutofit/>
+          </a:bodyPr>
+          <a:lstStyle/>
+          <a:p>
+            <a:r>
+              <a:rPr lang="fr-FR" dirty="0"/>
+              <a:t>NO  </a:t>
+            </a:r>
+            <a:r>
+              <a:rPr lang="fr-FR" dirty="0" err="1"/>
+              <a:t>write</a:t>
+            </a:r>
+            <a:r>
+              <a:rPr lang="fr-FR" dirty="0"/>
+              <a:t> </a:t>
+            </a:r>
+            <a:r>
+              <a:rPr lang="fr-FR" dirty="0" err="1"/>
+              <a:t>lseek</a:t>
+            </a:r>
+            <a:r>
+              <a:rPr lang="fr-FR" dirty="0"/>
+              <a:t>() </a:t>
+            </a:r>
+            <a:br>
+              <a:rPr lang="fr-FR" dirty="0"/>
+            </a:br>
+            <a:r>
+              <a:rPr lang="fr-FR" dirty="0"/>
+              <a:t>=&gt;</a:t>
+            </a:r>
+            <a:br>
+              <a:rPr lang="fr-FR" dirty="0"/>
+            </a:br>
+            <a:r>
+              <a:rPr lang="fr-FR" dirty="0"/>
+              <a:t>NO Hope of « </a:t>
+            </a:r>
+            <a:r>
+              <a:rPr lang="fr-FR" dirty="0" err="1"/>
+              <a:t>backporting</a:t>
+            </a:r>
+            <a:r>
+              <a:rPr lang="fr-FR" dirty="0"/>
+              <a:t> » standard </a:t>
+            </a:r>
+            <a:r>
+              <a:rPr lang="fr-FR" dirty="0" err="1"/>
+              <a:t>Databases</a:t>
+            </a:r>
+            <a:r>
+              <a:rPr lang="fr-FR" dirty="0"/>
+              <a:t> (</a:t>
+            </a:r>
+            <a:r>
+              <a:rPr lang="fr-FR" dirty="0" err="1"/>
+              <a:t>Postgresql,Redis</a:t>
+            </a:r>
+            <a:r>
+              <a:rPr lang="fr-FR" dirty="0"/>
+              <a:t>,…)  to Hadoop !</a:t>
+            </a:r>
+          </a:p>
+        </p:txBody>
+      </p:sp>
+    </p:spTree>
+    <p:extLst>
+      <p:ext uri="{BB962C8B-B14F-4D97-AF65-F5344CB8AC3E}">
+        <p14:creationId xmlns:p14="http://schemas.microsoft.com/office/powerpoint/2010/main" val="3836172471"/>
+      </p:ext>
+    </p:extLst>
+  </p:cSld>
+  <p:clrMapOvr>
+    <a:masterClrMapping/>
+  </p:clrMapOvr>
+</p:sld>
+</file>
+
+<file path=ppt/slides/slide23.xml><?xml version="1.0" encoding="utf-8"?>
+<p:sld xmlns:a="http://schemas.openxmlformats.org/drawingml/2006/main" xmlns:r="http://schemas.openxmlformats.org/officeDocument/2006/relationships" xmlns:p="http://schemas.openxmlformats.org/presentationml/2006/main">
+  <p:cSld>
+    <p:spTree>
+      <p:nvGrpSpPr>
+        <p:cNvPr id="1" name=""/>
+        <p:cNvGrpSpPr/>
+        <p:nvPr/>
+      </p:nvGrpSpPr>
+      <p:grpSpPr>
+        <a:xfrm>
+          <a:off x="0" y="0"/>
+          <a:ext cx="0" cy="0"/>
+          <a:chOff x="0" y="0"/>
+          <a:chExt cx="0" cy="0"/>
+        </a:xfrm>
+      </p:grpSpPr>
+      <p:sp>
+        <p:nvSpPr>
+          <p:cNvPr id="2" name="Titre 1">
+            <a:extLst>
+              <a:ext uri="{FF2B5EF4-FFF2-40B4-BE49-F238E27FC236}">
+                <a16:creationId xmlns:a16="http://schemas.microsoft.com/office/drawing/2014/main" id="{BC7A485A-BF1F-4850-8EFD-E84A742612CF}"/>
+              </a:ext>
+            </a:extLst>
+          </p:cNvPr>
+          <p:cNvSpPr>
+            <a:spLocks noGrp="1"/>
+          </p:cNvSpPr>
+          <p:nvPr>
+            <p:ph type="title"/>
+          </p:nvPr>
+        </p:nvSpPr>
+        <p:spPr/>
+        <p:txBody>
+          <a:bodyPr/>
+          <a:lstStyle/>
+          <a:p>
+            <a:r>
+              <a:rPr lang="fr-FR" dirty="0"/>
+              <a:t>Notice… « MMAP » File</a:t>
+            </a:r>
+          </a:p>
+        </p:txBody>
+      </p:sp>
+      <p:sp>
+        <p:nvSpPr>
+          <p:cNvPr id="4" name="ZoneTexte 3">
+            <a:extLst>
+              <a:ext uri="{FF2B5EF4-FFF2-40B4-BE49-F238E27FC236}">
+                <a16:creationId xmlns:a16="http://schemas.microsoft.com/office/drawing/2014/main" id="{AA8D1F9A-D0E0-4F0A-8194-D79677B877C3}"/>
+              </a:ext>
+            </a:extLst>
+          </p:cNvPr>
+          <p:cNvSpPr txBox="1"/>
+          <p:nvPr/>
+        </p:nvSpPr>
+        <p:spPr>
+          <a:xfrm>
+            <a:off x="2149522" y="1951631"/>
+            <a:ext cx="9150825" cy="3970318"/>
+          </a:xfrm>
+          <a:prstGeom prst="rect">
+            <a:avLst/>
+          </a:prstGeom>
+          <a:noFill/>
+        </p:spPr>
+        <p:txBody>
+          <a:bodyPr wrap="square" rtlCol="0">
+            <a:spAutoFit/>
+          </a:bodyPr>
+          <a:lstStyle/>
+          <a:p>
+            <a:r>
+              <a:rPr lang="fr-FR" dirty="0"/>
+              <a:t>Most </a:t>
+            </a:r>
+            <a:r>
+              <a:rPr lang="fr-FR" dirty="0" err="1"/>
+              <a:t>databases</a:t>
+            </a:r>
+            <a:r>
+              <a:rPr lang="fr-FR" dirty="0"/>
+              <a:t>  use   Memory-</a:t>
+            </a:r>
+            <a:r>
+              <a:rPr lang="fr-FR" dirty="0" err="1"/>
+              <a:t>Mapped</a:t>
+            </a:r>
+            <a:r>
+              <a:rPr lang="fr-FR" dirty="0"/>
+              <a:t>-Files, </a:t>
+            </a:r>
+          </a:p>
+          <a:p>
+            <a:endParaRPr lang="fr-FR" dirty="0"/>
+          </a:p>
+          <a:p>
+            <a:r>
+              <a:rPr lang="fr-FR" dirty="0" err="1"/>
+              <a:t>directly</a:t>
+            </a:r>
+            <a:r>
+              <a:rPr lang="fr-FR" dirty="0"/>
+              <a:t> visible as </a:t>
+            </a:r>
+            <a:r>
+              <a:rPr lang="fr-FR" dirty="0" err="1"/>
+              <a:t>virtual</a:t>
+            </a:r>
+            <a:r>
+              <a:rPr lang="fr-FR" dirty="0"/>
+              <a:t> Memory </a:t>
+            </a:r>
+            <a:r>
+              <a:rPr lang="fr-FR" dirty="0" err="1"/>
+              <a:t>from</a:t>
+            </a:r>
+            <a:r>
+              <a:rPr lang="fr-FR" dirty="0"/>
+              <a:t> the Linux OS</a:t>
+            </a:r>
+          </a:p>
+          <a:p>
+            <a:endParaRPr lang="fr-FR" dirty="0"/>
+          </a:p>
+          <a:p>
+            <a:r>
+              <a:rPr lang="fr-FR" dirty="0" err="1"/>
+              <a:t>faster</a:t>
+            </a:r>
+            <a:r>
+              <a:rPr lang="fr-FR" dirty="0"/>
+              <a:t> </a:t>
+            </a:r>
+            <a:r>
+              <a:rPr lang="fr-FR" dirty="0" err="1"/>
+              <a:t>than</a:t>
+            </a:r>
+            <a:r>
+              <a:rPr lang="fr-FR" dirty="0"/>
+              <a:t> </a:t>
+            </a:r>
+            <a:r>
+              <a:rPr lang="fr-FR" dirty="0" err="1"/>
+              <a:t>sequential</a:t>
+            </a:r>
+            <a:r>
+              <a:rPr lang="fr-FR" dirty="0"/>
+              <a:t> </a:t>
+            </a:r>
+            <a:r>
+              <a:rPr lang="fr-FR" dirty="0" err="1"/>
+              <a:t>reading</a:t>
+            </a:r>
+            <a:r>
+              <a:rPr lang="fr-FR" dirty="0"/>
+              <a:t> files   (</a:t>
+            </a:r>
+            <a:r>
+              <a:rPr lang="fr-FR" dirty="0" err="1"/>
+              <a:t>reading</a:t>
+            </a:r>
+            <a:r>
+              <a:rPr lang="fr-FR" dirty="0"/>
+              <a:t> per block / pages)</a:t>
+            </a:r>
+          </a:p>
+          <a:p>
+            <a:endParaRPr lang="fr-FR" dirty="0"/>
+          </a:p>
+          <a:p>
+            <a:r>
+              <a:rPr lang="fr-FR" dirty="0" err="1"/>
+              <a:t>Then</a:t>
+            </a:r>
+            <a:r>
+              <a:rPr lang="fr-FR" dirty="0"/>
+              <a:t> Flush()  </a:t>
+            </a:r>
+            <a:r>
+              <a:rPr lang="fr-FR" dirty="0" err="1"/>
+              <a:t>dirty</a:t>
+            </a:r>
+            <a:r>
+              <a:rPr lang="fr-FR" dirty="0"/>
+              <a:t> pages</a:t>
+            </a:r>
+          </a:p>
+          <a:p>
+            <a:endParaRPr lang="fr-FR" dirty="0"/>
+          </a:p>
+          <a:p>
+            <a:r>
+              <a:rPr lang="fr-FR" dirty="0"/>
+              <a:t>….</a:t>
+            </a:r>
+          </a:p>
+          <a:p>
+            <a:endParaRPr lang="fr-FR" dirty="0"/>
+          </a:p>
+          <a:p>
+            <a:r>
+              <a:rPr lang="fr-FR" dirty="0"/>
+              <a:t>Not </a:t>
+            </a:r>
+            <a:r>
+              <a:rPr lang="fr-FR" dirty="0" err="1"/>
+              <a:t>strictly</a:t>
+            </a:r>
+            <a:r>
+              <a:rPr lang="fr-FR" dirty="0"/>
+              <a:t> </a:t>
+            </a:r>
+            <a:r>
+              <a:rPr lang="fr-FR" dirty="0" err="1"/>
+              <a:t>necessary</a:t>
+            </a:r>
+            <a:r>
+              <a:rPr lang="fr-FR" dirty="0"/>
+              <a:t>, but OS </a:t>
+            </a:r>
+            <a:r>
+              <a:rPr lang="fr-FR" dirty="0" err="1"/>
+              <a:t>optim</a:t>
+            </a:r>
+            <a:r>
+              <a:rPr lang="fr-FR" dirty="0"/>
+              <a:t> for </a:t>
+            </a:r>
+            <a:r>
+              <a:rPr lang="fr-FR" dirty="0" err="1"/>
+              <a:t>disk</a:t>
+            </a:r>
+            <a:r>
+              <a:rPr lang="fr-FR" dirty="0"/>
+              <a:t> </a:t>
+            </a:r>
+            <a:r>
+              <a:rPr lang="fr-FR" dirty="0" err="1"/>
+              <a:t>access</a:t>
+            </a:r>
+            <a:endParaRPr lang="fr-FR" dirty="0"/>
+          </a:p>
+          <a:p>
+            <a:endParaRPr lang="fr-FR" dirty="0"/>
+          </a:p>
+          <a:p>
+            <a:r>
+              <a:rPr lang="fr-FR" dirty="0" err="1"/>
+              <a:t>Some</a:t>
+            </a:r>
+            <a:r>
+              <a:rPr lang="fr-FR" dirty="0"/>
+              <a:t> </a:t>
+            </a:r>
+            <a:r>
+              <a:rPr lang="fr-FR" dirty="0" err="1"/>
+              <a:t>database</a:t>
+            </a:r>
+            <a:r>
+              <a:rPr lang="fr-FR" dirty="0"/>
+              <a:t>  (like Oracle)  </a:t>
+            </a:r>
+            <a:r>
+              <a:rPr lang="fr-FR" dirty="0" err="1"/>
+              <a:t>prefer</a:t>
+            </a:r>
+            <a:r>
+              <a:rPr lang="fr-FR" dirty="0"/>
+              <a:t> direct root </a:t>
+            </a:r>
+            <a:r>
+              <a:rPr lang="fr-FR" dirty="0" err="1"/>
+              <a:t>access</a:t>
+            </a:r>
+            <a:r>
+              <a:rPr lang="fr-FR" dirty="0"/>
+              <a:t> to « /dev/</a:t>
+            </a:r>
+            <a:r>
+              <a:rPr lang="fr-FR" dirty="0" err="1"/>
+              <a:t>sda</a:t>
+            </a:r>
+            <a:r>
+              <a:rPr lang="fr-FR" dirty="0"/>
+              <a:t> »  block </a:t>
+            </a:r>
+            <a:r>
+              <a:rPr lang="fr-FR" dirty="0" err="1"/>
+              <a:t>devices</a:t>
+            </a:r>
+            <a:endParaRPr lang="fr-FR" dirty="0"/>
+          </a:p>
+          <a:p>
+            <a:r>
+              <a:rPr lang="fr-FR" dirty="0"/>
+              <a:t>(No </a:t>
+            </a:r>
+            <a:r>
+              <a:rPr lang="fr-FR" dirty="0" err="1"/>
+              <a:t>FileSystem</a:t>
+            </a:r>
+            <a:r>
+              <a:rPr lang="fr-FR" dirty="0"/>
+              <a:t> abstraction)</a:t>
+            </a:r>
+          </a:p>
+        </p:txBody>
+      </p:sp>
+    </p:spTree>
+    <p:extLst>
+      <p:ext uri="{BB962C8B-B14F-4D97-AF65-F5344CB8AC3E}">
+        <p14:creationId xmlns:p14="http://schemas.microsoft.com/office/powerpoint/2010/main" val="2453039624"/>
+      </p:ext>
+    </p:extLst>
+  </p:cSld>
+  <p:clrMapOvr>
+    <a:masterClrMapping/>
+  </p:clrMapOvr>
+</p:sld>
+</file>
+
+<file path=ppt/slides/slide24.xml><?xml version="1.0" encoding="utf-8"?>
+<p:sld xmlns:a="http://schemas.openxmlformats.org/drawingml/2006/main" xmlns:r="http://schemas.openxmlformats.org/officeDocument/2006/relationships" xmlns:p="http://schemas.openxmlformats.org/presentationml/2006/main">
+  <p:cSld>
+    <p:spTree>
+      <p:nvGrpSpPr>
+        <p:cNvPr id="1" name=""/>
+        <p:cNvGrpSpPr/>
+        <p:nvPr/>
+      </p:nvGrpSpPr>
+      <p:grpSpPr>
+        <a:xfrm>
+          <a:off x="0" y="0"/>
+          <a:ext cx="0" cy="0"/>
+          <a:chOff x="0" y="0"/>
+          <a:chExt cx="0" cy="0"/>
+        </a:xfrm>
+      </p:grpSpPr>
+      <p:sp>
+        <p:nvSpPr>
+          <p:cNvPr id="2" name="Titre 1">
+            <a:extLst>
+              <a:ext uri="{FF2B5EF4-FFF2-40B4-BE49-F238E27FC236}">
+                <a16:creationId xmlns:a16="http://schemas.microsoft.com/office/drawing/2014/main" id="{4D4B3A35-DD79-4920-AFE7-F0F418DDEFBB}"/>
+              </a:ext>
+            </a:extLst>
+          </p:cNvPr>
+          <p:cNvSpPr>
+            <a:spLocks noGrp="1"/>
+          </p:cNvSpPr>
+          <p:nvPr>
+            <p:ph type="title"/>
+          </p:nvPr>
+        </p:nvSpPr>
+        <p:spPr>
+          <a:xfrm>
+            <a:off x="838200" y="0"/>
+            <a:ext cx="10515600" cy="646331"/>
+          </a:xfrm>
+        </p:spPr>
+        <p:txBody>
+          <a:bodyPr>
+            <a:normAutofit fontScale="90000"/>
+          </a:bodyPr>
+          <a:lstStyle/>
+          <a:p>
+            <a:r>
+              <a:rPr lang="fr-FR" dirty="0" err="1"/>
+              <a:t>Updades</a:t>
+            </a:r>
+            <a:r>
+              <a:rPr lang="fr-FR" dirty="0"/>
+              <a:t> </a:t>
+            </a:r>
+            <a:r>
+              <a:rPr lang="fr-FR" dirty="0" err="1"/>
+              <a:t>Strategy</a:t>
+            </a:r>
+            <a:r>
+              <a:rPr lang="fr-FR" dirty="0"/>
+              <a:t> : </a:t>
+            </a:r>
+            <a:r>
+              <a:rPr lang="fr-FR" dirty="0" err="1"/>
+              <a:t>Overwrite</a:t>
+            </a:r>
+            <a:r>
+              <a:rPr lang="fr-FR" dirty="0"/>
+              <a:t> per Partition(=</a:t>
+            </a:r>
+            <a:r>
+              <a:rPr lang="fr-FR" dirty="0" err="1"/>
+              <a:t>Dir</a:t>
+            </a:r>
+            <a:r>
+              <a:rPr lang="fr-FR" dirty="0"/>
+              <a:t>)</a:t>
+            </a:r>
+          </a:p>
+        </p:txBody>
+      </p:sp>
+      <p:sp>
+        <p:nvSpPr>
+          <p:cNvPr id="5" name="Rectangle : carré corné 4">
+            <a:extLst>
+              <a:ext uri="{FF2B5EF4-FFF2-40B4-BE49-F238E27FC236}">
+                <a16:creationId xmlns:a16="http://schemas.microsoft.com/office/drawing/2014/main" id="{8E658C59-683F-444F-9E99-1BCF3192AD26}"/>
+              </a:ext>
+            </a:extLst>
+          </p:cNvPr>
+          <p:cNvSpPr/>
+          <p:nvPr/>
+        </p:nvSpPr>
+        <p:spPr>
+          <a:xfrm>
+            <a:off x="421141" y="2082241"/>
+            <a:ext cx="1190625" cy="826966"/>
+          </a:xfrm>
+          <a:prstGeom prst="foldedCorner">
+            <a:avLst/>
+          </a:prstGeom>
+          <a:noFill/>
+        </p:spPr>
+        <p:style>
+          <a:lnRef idx="2">
+            <a:schemeClr val="accent1">
+              <a:shade val="50000"/>
+            </a:schemeClr>
+          </a:lnRef>
+          <a:fillRef idx="1">
+            <a:schemeClr val="accent1"/>
+          </a:fillRef>
+          <a:effectRef idx="0">
+            <a:schemeClr val="accent1"/>
+          </a:effectRef>
+          <a:fontRef idx="minor">
+            <a:schemeClr val="lt1"/>
+          </a:fontRef>
+        </p:style>
+        <p:txBody>
+          <a:bodyPr rtlCol="0" anchor="ctr"/>
+          <a:lstStyle/>
+          <a:p>
+            <a:pPr algn="ctr"/>
+            <a:endParaRPr lang="fr-FR" dirty="0"/>
+          </a:p>
+        </p:txBody>
+      </p:sp>
+      <p:sp>
+        <p:nvSpPr>
+          <p:cNvPr id="7" name="Rectangle : coins arrondis 6">
+            <a:extLst>
+              <a:ext uri="{FF2B5EF4-FFF2-40B4-BE49-F238E27FC236}">
+                <a16:creationId xmlns:a16="http://schemas.microsoft.com/office/drawing/2014/main" id="{6EFE435E-813F-4A8F-8A6F-E73A296E1912}"/>
+              </a:ext>
+            </a:extLst>
+          </p:cNvPr>
+          <p:cNvSpPr/>
+          <p:nvPr/>
+        </p:nvSpPr>
+        <p:spPr>
+          <a:xfrm>
+            <a:off x="630691" y="2536136"/>
+            <a:ext cx="595313" cy="154701"/>
+          </a:xfrm>
+          <a:prstGeom prst="roundRect">
+            <a:avLst/>
+          </a:prstGeom>
+        </p:spPr>
+        <p:style>
+          <a:lnRef idx="2">
+            <a:schemeClr val="accent1">
+              <a:shade val="50000"/>
+            </a:schemeClr>
+          </a:lnRef>
+          <a:fillRef idx="1">
+            <a:schemeClr val="accent1"/>
+          </a:fillRef>
+          <a:effectRef idx="0">
+            <a:schemeClr val="accent1"/>
+          </a:effectRef>
+          <a:fontRef idx="minor">
+            <a:schemeClr val="lt1"/>
+          </a:fontRef>
+        </p:style>
+        <p:txBody>
+          <a:bodyPr rtlCol="0" anchor="ctr"/>
+          <a:lstStyle/>
+          <a:p>
+            <a:pPr algn="ctr"/>
+            <a:endParaRPr lang="fr-FR"/>
+          </a:p>
+        </p:txBody>
+      </p:sp>
+      <p:sp>
+        <p:nvSpPr>
+          <p:cNvPr id="8" name="Rectangle : coins arrondis 7">
+            <a:extLst>
+              <a:ext uri="{FF2B5EF4-FFF2-40B4-BE49-F238E27FC236}">
+                <a16:creationId xmlns:a16="http://schemas.microsoft.com/office/drawing/2014/main" id="{332A2867-00CE-4887-9A97-1E7E5A616CB6}"/>
+              </a:ext>
+            </a:extLst>
+          </p:cNvPr>
+          <p:cNvSpPr/>
+          <p:nvPr/>
+        </p:nvSpPr>
+        <p:spPr>
+          <a:xfrm>
+            <a:off x="149338" y="1891393"/>
+            <a:ext cx="1880848" cy="2803071"/>
+          </a:xfrm>
+          <a:prstGeom prst="roundRect">
+            <a:avLst/>
+          </a:prstGeom>
+          <a:noFill/>
+        </p:spPr>
+        <p:style>
+          <a:lnRef idx="2">
+            <a:schemeClr val="accent1">
+              <a:shade val="50000"/>
+            </a:schemeClr>
+          </a:lnRef>
+          <a:fillRef idx="1">
+            <a:schemeClr val="accent1"/>
+          </a:fillRef>
+          <a:effectRef idx="0">
+            <a:schemeClr val="accent1"/>
+          </a:effectRef>
+          <a:fontRef idx="minor">
+            <a:schemeClr val="lt1"/>
+          </a:fontRef>
+        </p:style>
+        <p:txBody>
+          <a:bodyPr rtlCol="0" anchor="ctr"/>
+          <a:lstStyle/>
+          <a:p>
+            <a:pPr algn="ctr"/>
+            <a:endParaRPr lang="fr-FR"/>
+          </a:p>
+        </p:txBody>
+      </p:sp>
+      <p:sp>
+        <p:nvSpPr>
+          <p:cNvPr id="9" name="ZoneTexte 8">
+            <a:extLst>
+              <a:ext uri="{FF2B5EF4-FFF2-40B4-BE49-F238E27FC236}">
+                <a16:creationId xmlns:a16="http://schemas.microsoft.com/office/drawing/2014/main" id="{90A0D1C4-12EC-4521-BACE-0BE5E86F4940}"/>
+              </a:ext>
+            </a:extLst>
+          </p:cNvPr>
+          <p:cNvSpPr txBox="1"/>
+          <p:nvPr/>
+        </p:nvSpPr>
+        <p:spPr>
+          <a:xfrm>
+            <a:off x="0" y="1571279"/>
+            <a:ext cx="1816523" cy="369332"/>
+          </a:xfrm>
+          <a:prstGeom prst="rect">
+            <a:avLst/>
+          </a:prstGeom>
+          <a:noFill/>
+        </p:spPr>
+        <p:txBody>
+          <a:bodyPr wrap="none" rtlCol="0">
+            <a:spAutoFit/>
+          </a:bodyPr>
+          <a:lstStyle/>
+          <a:p>
+            <a:r>
+              <a:rPr lang="fr-FR" dirty="0"/>
+              <a:t>/</a:t>
+            </a:r>
+            <a:r>
+              <a:rPr lang="fr-FR" dirty="0" err="1"/>
+              <a:t>dir_partition</a:t>
+            </a:r>
+            <a:r>
+              <a:rPr lang="fr-FR" dirty="0"/>
+              <a:t>=XX</a:t>
+            </a:r>
+          </a:p>
+        </p:txBody>
+      </p:sp>
+      <p:sp>
+        <p:nvSpPr>
+          <p:cNvPr id="10" name="Rectangle : carré corné 9">
+            <a:extLst>
+              <a:ext uri="{FF2B5EF4-FFF2-40B4-BE49-F238E27FC236}">
+                <a16:creationId xmlns:a16="http://schemas.microsoft.com/office/drawing/2014/main" id="{CD8805B1-D5AA-4AED-AD18-E329BBE79FD4}"/>
+              </a:ext>
+            </a:extLst>
+          </p:cNvPr>
+          <p:cNvSpPr/>
+          <p:nvPr/>
+        </p:nvSpPr>
+        <p:spPr>
+          <a:xfrm>
+            <a:off x="421141" y="3050837"/>
+            <a:ext cx="1190625" cy="462527"/>
+          </a:xfrm>
+          <a:prstGeom prst="foldedCorner">
+            <a:avLst/>
+          </a:prstGeom>
+          <a:noFill/>
+        </p:spPr>
+        <p:style>
+          <a:lnRef idx="2">
+            <a:schemeClr val="accent1">
+              <a:shade val="50000"/>
+            </a:schemeClr>
+          </a:lnRef>
+          <a:fillRef idx="1">
+            <a:schemeClr val="accent1"/>
+          </a:fillRef>
+          <a:effectRef idx="0">
+            <a:schemeClr val="accent1"/>
+          </a:effectRef>
+          <a:fontRef idx="minor">
+            <a:schemeClr val="lt1"/>
+          </a:fontRef>
+        </p:style>
+        <p:txBody>
+          <a:bodyPr rtlCol="0" anchor="ctr"/>
+          <a:lstStyle/>
+          <a:p>
+            <a:pPr algn="ctr"/>
+            <a:endParaRPr lang="fr-FR" dirty="0"/>
+          </a:p>
+        </p:txBody>
+      </p:sp>
+      <p:sp>
+        <p:nvSpPr>
+          <p:cNvPr id="11" name="Rectangle : carré corné 10">
+            <a:extLst>
+              <a:ext uri="{FF2B5EF4-FFF2-40B4-BE49-F238E27FC236}">
+                <a16:creationId xmlns:a16="http://schemas.microsoft.com/office/drawing/2014/main" id="{C65DFAC4-5AD2-49A5-A4E3-D51D8414A799}"/>
+              </a:ext>
+            </a:extLst>
+          </p:cNvPr>
+          <p:cNvSpPr/>
+          <p:nvPr/>
+        </p:nvSpPr>
+        <p:spPr>
+          <a:xfrm>
+            <a:off x="421140" y="3703980"/>
+            <a:ext cx="1190625" cy="462527"/>
+          </a:xfrm>
+          <a:prstGeom prst="foldedCorner">
+            <a:avLst/>
+          </a:prstGeom>
+          <a:noFill/>
+        </p:spPr>
+        <p:style>
+          <a:lnRef idx="2">
+            <a:schemeClr val="accent1">
+              <a:shade val="50000"/>
+            </a:schemeClr>
+          </a:lnRef>
+          <a:fillRef idx="1">
+            <a:schemeClr val="accent1"/>
+          </a:fillRef>
+          <a:effectRef idx="0">
+            <a:schemeClr val="accent1"/>
+          </a:effectRef>
+          <a:fontRef idx="minor">
+            <a:schemeClr val="lt1"/>
+          </a:fontRef>
+        </p:style>
+        <p:txBody>
+          <a:bodyPr rtlCol="0" anchor="ctr"/>
+          <a:lstStyle/>
+          <a:p>
+            <a:pPr algn="ctr"/>
+            <a:endParaRPr lang="fr-FR" dirty="0"/>
+          </a:p>
+        </p:txBody>
+      </p:sp>
+      <p:sp>
+        <p:nvSpPr>
+          <p:cNvPr id="15" name="Rectangle : coins arrondis 14">
+            <a:extLst>
+              <a:ext uri="{FF2B5EF4-FFF2-40B4-BE49-F238E27FC236}">
+                <a16:creationId xmlns:a16="http://schemas.microsoft.com/office/drawing/2014/main" id="{7A5F11DD-2F35-40BA-8CA4-0FB1544F20F7}"/>
+              </a:ext>
+            </a:extLst>
+          </p:cNvPr>
+          <p:cNvSpPr/>
+          <p:nvPr/>
+        </p:nvSpPr>
+        <p:spPr>
+          <a:xfrm>
+            <a:off x="149338" y="5468474"/>
+            <a:ext cx="1880848" cy="1082352"/>
+          </a:xfrm>
+          <a:prstGeom prst="roundRect">
+            <a:avLst/>
+          </a:prstGeom>
+          <a:noFill/>
+        </p:spPr>
+        <p:style>
+          <a:lnRef idx="2">
+            <a:schemeClr val="accent1">
+              <a:shade val="50000"/>
+            </a:schemeClr>
+          </a:lnRef>
+          <a:fillRef idx="1">
+            <a:schemeClr val="accent1"/>
+          </a:fillRef>
+          <a:effectRef idx="0">
+            <a:schemeClr val="accent1"/>
+          </a:effectRef>
+          <a:fontRef idx="minor">
+            <a:schemeClr val="lt1"/>
+          </a:fontRef>
+        </p:style>
+        <p:txBody>
+          <a:bodyPr rtlCol="0" anchor="ctr"/>
+          <a:lstStyle/>
+          <a:p>
+            <a:pPr algn="ctr"/>
+            <a:endParaRPr lang="fr-FR"/>
+          </a:p>
+        </p:txBody>
+      </p:sp>
+      <p:sp>
+        <p:nvSpPr>
+          <p:cNvPr id="16" name="ZoneTexte 15">
+            <a:extLst>
+              <a:ext uri="{FF2B5EF4-FFF2-40B4-BE49-F238E27FC236}">
+                <a16:creationId xmlns:a16="http://schemas.microsoft.com/office/drawing/2014/main" id="{F6776AD0-919C-48A8-ACF3-0470460BF191}"/>
+              </a:ext>
+            </a:extLst>
+          </p:cNvPr>
+          <p:cNvSpPr txBox="1"/>
+          <p:nvPr/>
+        </p:nvSpPr>
+        <p:spPr>
+          <a:xfrm>
+            <a:off x="0" y="5148359"/>
+            <a:ext cx="1800493" cy="369332"/>
+          </a:xfrm>
+          <a:prstGeom prst="rect">
+            <a:avLst/>
+          </a:prstGeom>
+          <a:noFill/>
+        </p:spPr>
+        <p:txBody>
+          <a:bodyPr wrap="none" rtlCol="0">
+            <a:spAutoFit/>
+          </a:bodyPr>
+          <a:lstStyle/>
+          <a:p>
+            <a:r>
+              <a:rPr lang="fr-FR" dirty="0"/>
+              <a:t>/</a:t>
+            </a:r>
+            <a:r>
+              <a:rPr lang="fr-FR" dirty="0" err="1"/>
+              <a:t>dir_partition</a:t>
+            </a:r>
+            <a:r>
+              <a:rPr lang="fr-FR" dirty="0"/>
+              <a:t>=YY</a:t>
+            </a:r>
+          </a:p>
+        </p:txBody>
+      </p:sp>
+      <p:sp>
+        <p:nvSpPr>
+          <p:cNvPr id="17" name="Rectangle : carré corné 16">
+            <a:extLst>
+              <a:ext uri="{FF2B5EF4-FFF2-40B4-BE49-F238E27FC236}">
+                <a16:creationId xmlns:a16="http://schemas.microsoft.com/office/drawing/2014/main" id="{638AED80-EA6C-4607-8634-F831F8977057}"/>
+              </a:ext>
+            </a:extLst>
+          </p:cNvPr>
+          <p:cNvSpPr/>
+          <p:nvPr/>
+        </p:nvSpPr>
+        <p:spPr>
+          <a:xfrm>
+            <a:off x="435087" y="5654428"/>
+            <a:ext cx="1190625" cy="462527"/>
+          </a:xfrm>
+          <a:prstGeom prst="foldedCorner">
+            <a:avLst/>
+          </a:prstGeom>
+          <a:noFill/>
+        </p:spPr>
+        <p:style>
+          <a:lnRef idx="2">
+            <a:schemeClr val="accent1">
+              <a:shade val="50000"/>
+            </a:schemeClr>
+          </a:lnRef>
+          <a:fillRef idx="1">
+            <a:schemeClr val="accent1"/>
+          </a:fillRef>
+          <a:effectRef idx="0">
+            <a:schemeClr val="accent1"/>
+          </a:effectRef>
+          <a:fontRef idx="minor">
+            <a:schemeClr val="lt1"/>
+          </a:fontRef>
+        </p:style>
+        <p:txBody>
+          <a:bodyPr rtlCol="0" anchor="ctr"/>
+          <a:lstStyle/>
+          <a:p>
+            <a:pPr algn="ctr"/>
+            <a:endParaRPr lang="fr-FR" dirty="0"/>
+          </a:p>
+        </p:txBody>
+      </p:sp>
+      <p:sp>
+        <p:nvSpPr>
+          <p:cNvPr id="18" name="Flèche : droite 17">
+            <a:extLst>
+              <a:ext uri="{FF2B5EF4-FFF2-40B4-BE49-F238E27FC236}">
+                <a16:creationId xmlns:a16="http://schemas.microsoft.com/office/drawing/2014/main" id="{BF8A18DA-D27A-45D8-A803-EEE059FFDDF5}"/>
+              </a:ext>
+            </a:extLst>
+          </p:cNvPr>
+          <p:cNvSpPr/>
+          <p:nvPr/>
+        </p:nvSpPr>
+        <p:spPr>
+          <a:xfrm>
+            <a:off x="2443241" y="1418218"/>
+            <a:ext cx="1371599" cy="625929"/>
+          </a:xfrm>
+          <a:prstGeom prst="rightArrow">
+            <a:avLst/>
+          </a:prstGeom>
+        </p:spPr>
+        <p:style>
+          <a:lnRef idx="2">
+            <a:schemeClr val="accent1">
+              <a:shade val="50000"/>
+            </a:schemeClr>
+          </a:lnRef>
+          <a:fillRef idx="1">
+            <a:schemeClr val="accent1"/>
+          </a:fillRef>
+          <a:effectRef idx="0">
+            <a:schemeClr val="accent1"/>
+          </a:effectRef>
+          <a:fontRef idx="minor">
+            <a:schemeClr val="lt1"/>
+          </a:fontRef>
+        </p:style>
+        <p:txBody>
+          <a:bodyPr rtlCol="0" anchor="ctr"/>
+          <a:lstStyle/>
+          <a:p>
+            <a:pPr algn="ctr"/>
+            <a:endParaRPr lang="fr-FR"/>
+          </a:p>
+        </p:txBody>
+      </p:sp>
+      <p:sp>
+        <p:nvSpPr>
+          <p:cNvPr id="19" name="ZoneTexte 18">
+            <a:extLst>
+              <a:ext uri="{FF2B5EF4-FFF2-40B4-BE49-F238E27FC236}">
+                <a16:creationId xmlns:a16="http://schemas.microsoft.com/office/drawing/2014/main" id="{AA529F61-203F-4640-8253-EC053276C5CB}"/>
+              </a:ext>
+            </a:extLst>
+          </p:cNvPr>
+          <p:cNvSpPr txBox="1"/>
+          <p:nvPr/>
+        </p:nvSpPr>
+        <p:spPr>
+          <a:xfrm>
+            <a:off x="1672908" y="820164"/>
+            <a:ext cx="4283865" cy="646331"/>
+          </a:xfrm>
+          <a:prstGeom prst="rect">
+            <a:avLst/>
+          </a:prstGeom>
+          <a:noFill/>
+        </p:spPr>
+        <p:txBody>
+          <a:bodyPr wrap="none" rtlCol="0">
+            <a:spAutoFit/>
+          </a:bodyPr>
+          <a:lstStyle/>
+          <a:p>
+            <a:r>
+              <a:rPr lang="fr-FR" dirty="0"/>
+              <a:t>.</a:t>
+            </a:r>
+            <a:r>
+              <a:rPr lang="fr-FR" dirty="0" err="1"/>
+              <a:t>map</a:t>
+            </a:r>
+            <a:r>
+              <a:rPr lang="fr-FR" dirty="0"/>
+              <a:t>()  transformation of data in 1 Partition</a:t>
+            </a:r>
+          </a:p>
+          <a:p>
+            <a:r>
+              <a:rPr lang="fr-FR" dirty="0"/>
+              <a:t>=  FULL UPDATE COPY of a Directory</a:t>
+            </a:r>
+          </a:p>
+        </p:txBody>
+      </p:sp>
+      <p:sp>
+        <p:nvSpPr>
+          <p:cNvPr id="20" name="Rectangle : carré corné 19">
+            <a:extLst>
+              <a:ext uri="{FF2B5EF4-FFF2-40B4-BE49-F238E27FC236}">
+                <a16:creationId xmlns:a16="http://schemas.microsoft.com/office/drawing/2014/main" id="{EA8D5F83-5B06-458E-9A3E-366C9D04BD51}"/>
+              </a:ext>
+            </a:extLst>
+          </p:cNvPr>
+          <p:cNvSpPr/>
+          <p:nvPr/>
+        </p:nvSpPr>
+        <p:spPr>
+          <a:xfrm>
+            <a:off x="4437006" y="2044147"/>
+            <a:ext cx="1190625" cy="826966"/>
+          </a:xfrm>
+          <a:prstGeom prst="foldedCorner">
+            <a:avLst/>
+          </a:prstGeom>
+          <a:noFill/>
+        </p:spPr>
+        <p:style>
+          <a:lnRef idx="2">
+            <a:schemeClr val="accent1">
+              <a:shade val="50000"/>
+            </a:schemeClr>
+          </a:lnRef>
+          <a:fillRef idx="1">
+            <a:schemeClr val="accent1"/>
+          </a:fillRef>
+          <a:effectRef idx="0">
+            <a:schemeClr val="accent1"/>
+          </a:effectRef>
+          <a:fontRef idx="minor">
+            <a:schemeClr val="lt1"/>
+          </a:fontRef>
+        </p:style>
+        <p:txBody>
+          <a:bodyPr rtlCol="0" anchor="ctr"/>
+          <a:lstStyle/>
+          <a:p>
+            <a:pPr algn="ctr"/>
+            <a:endParaRPr lang="fr-FR" dirty="0"/>
+          </a:p>
+        </p:txBody>
+      </p:sp>
+      <p:sp>
+        <p:nvSpPr>
+          <p:cNvPr id="21" name="Rectangle : coins arrondis 20">
+            <a:extLst>
+              <a:ext uri="{FF2B5EF4-FFF2-40B4-BE49-F238E27FC236}">
+                <a16:creationId xmlns:a16="http://schemas.microsoft.com/office/drawing/2014/main" id="{DEB1EDB6-7D2F-4F0A-B3D9-4CAE2FE08887}"/>
+              </a:ext>
+            </a:extLst>
+          </p:cNvPr>
+          <p:cNvSpPr/>
+          <p:nvPr/>
+        </p:nvSpPr>
+        <p:spPr>
+          <a:xfrm>
+            <a:off x="4646556" y="2498042"/>
+            <a:ext cx="595313" cy="154701"/>
+          </a:xfrm>
+          <a:prstGeom prst="roundRect">
+            <a:avLst/>
+          </a:prstGeom>
+        </p:spPr>
+        <p:style>
+          <a:lnRef idx="2">
+            <a:schemeClr val="accent1">
+              <a:shade val="50000"/>
+            </a:schemeClr>
+          </a:lnRef>
+          <a:fillRef idx="1">
+            <a:schemeClr val="accent1"/>
+          </a:fillRef>
+          <a:effectRef idx="0">
+            <a:schemeClr val="accent1"/>
+          </a:effectRef>
+          <a:fontRef idx="minor">
+            <a:schemeClr val="lt1"/>
+          </a:fontRef>
+        </p:style>
+        <p:txBody>
+          <a:bodyPr rtlCol="0" anchor="ctr"/>
+          <a:lstStyle/>
+          <a:p>
+            <a:pPr algn="ctr"/>
+            <a:endParaRPr lang="fr-FR"/>
+          </a:p>
+        </p:txBody>
+      </p:sp>
+      <p:sp>
+        <p:nvSpPr>
+          <p:cNvPr id="22" name="Rectangle : coins arrondis 21">
+            <a:extLst>
+              <a:ext uri="{FF2B5EF4-FFF2-40B4-BE49-F238E27FC236}">
+                <a16:creationId xmlns:a16="http://schemas.microsoft.com/office/drawing/2014/main" id="{8903FB5C-6209-4BEF-8216-D6851F6604EC}"/>
+              </a:ext>
+            </a:extLst>
+          </p:cNvPr>
+          <p:cNvSpPr/>
+          <p:nvPr/>
+        </p:nvSpPr>
+        <p:spPr>
+          <a:xfrm>
+            <a:off x="4165203" y="1853299"/>
+            <a:ext cx="1880848" cy="2803071"/>
+          </a:xfrm>
+          <a:prstGeom prst="roundRect">
+            <a:avLst/>
+          </a:prstGeom>
+          <a:noFill/>
+        </p:spPr>
+        <p:style>
+          <a:lnRef idx="2">
+            <a:schemeClr val="accent1">
+              <a:shade val="50000"/>
+            </a:schemeClr>
+          </a:lnRef>
+          <a:fillRef idx="1">
+            <a:schemeClr val="accent1"/>
+          </a:fillRef>
+          <a:effectRef idx="0">
+            <a:schemeClr val="accent1"/>
+          </a:effectRef>
+          <a:fontRef idx="minor">
+            <a:schemeClr val="lt1"/>
+          </a:fontRef>
+        </p:style>
+        <p:txBody>
+          <a:bodyPr rtlCol="0" anchor="ctr"/>
+          <a:lstStyle/>
+          <a:p>
+            <a:pPr algn="ctr"/>
+            <a:endParaRPr lang="fr-FR"/>
+          </a:p>
+        </p:txBody>
+      </p:sp>
+      <p:sp>
+        <p:nvSpPr>
+          <p:cNvPr id="23" name="ZoneTexte 22">
+            <a:extLst>
+              <a:ext uri="{FF2B5EF4-FFF2-40B4-BE49-F238E27FC236}">
+                <a16:creationId xmlns:a16="http://schemas.microsoft.com/office/drawing/2014/main" id="{7ED32320-0EC7-470D-A069-A936F9F7E66B}"/>
+              </a:ext>
+            </a:extLst>
+          </p:cNvPr>
+          <p:cNvSpPr txBox="1"/>
+          <p:nvPr/>
+        </p:nvSpPr>
+        <p:spPr>
+          <a:xfrm>
+            <a:off x="4015865" y="1533185"/>
+            <a:ext cx="1816523" cy="369332"/>
+          </a:xfrm>
+          <a:prstGeom prst="rect">
+            <a:avLst/>
+          </a:prstGeom>
+          <a:noFill/>
+        </p:spPr>
+        <p:txBody>
+          <a:bodyPr wrap="none" rtlCol="0">
+            <a:spAutoFit/>
+          </a:bodyPr>
+          <a:lstStyle/>
+          <a:p>
+            <a:r>
+              <a:rPr lang="fr-FR" dirty="0"/>
+              <a:t>/</a:t>
+            </a:r>
+            <a:r>
+              <a:rPr lang="fr-FR" dirty="0" err="1"/>
+              <a:t>dir_partition</a:t>
+            </a:r>
+            <a:r>
+              <a:rPr lang="fr-FR" dirty="0"/>
+              <a:t>=XX</a:t>
+            </a:r>
+          </a:p>
+        </p:txBody>
+      </p:sp>
+      <p:sp>
+        <p:nvSpPr>
+          <p:cNvPr id="24" name="Rectangle : carré corné 23">
+            <a:extLst>
+              <a:ext uri="{FF2B5EF4-FFF2-40B4-BE49-F238E27FC236}">
+                <a16:creationId xmlns:a16="http://schemas.microsoft.com/office/drawing/2014/main" id="{D68FD34C-F82E-46E8-888A-3FA94C30F52A}"/>
+              </a:ext>
+            </a:extLst>
+          </p:cNvPr>
+          <p:cNvSpPr/>
+          <p:nvPr/>
+        </p:nvSpPr>
+        <p:spPr>
+          <a:xfrm>
+            <a:off x="4437006" y="3012743"/>
+            <a:ext cx="1190625" cy="462527"/>
+          </a:xfrm>
+          <a:prstGeom prst="foldedCorner">
+            <a:avLst/>
+          </a:prstGeom>
+          <a:noFill/>
+        </p:spPr>
+        <p:style>
+          <a:lnRef idx="2">
+            <a:schemeClr val="accent1">
+              <a:shade val="50000"/>
+            </a:schemeClr>
+          </a:lnRef>
+          <a:fillRef idx="1">
+            <a:schemeClr val="accent1"/>
+          </a:fillRef>
+          <a:effectRef idx="0">
+            <a:schemeClr val="accent1"/>
+          </a:effectRef>
+          <a:fontRef idx="minor">
+            <a:schemeClr val="lt1"/>
+          </a:fontRef>
+        </p:style>
+        <p:txBody>
+          <a:bodyPr rtlCol="0" anchor="ctr"/>
+          <a:lstStyle/>
+          <a:p>
+            <a:pPr algn="ctr"/>
+            <a:endParaRPr lang="fr-FR" dirty="0"/>
+          </a:p>
+        </p:txBody>
+      </p:sp>
+      <p:sp>
+        <p:nvSpPr>
+          <p:cNvPr id="25" name="Rectangle : carré corné 24">
+            <a:extLst>
+              <a:ext uri="{FF2B5EF4-FFF2-40B4-BE49-F238E27FC236}">
+                <a16:creationId xmlns:a16="http://schemas.microsoft.com/office/drawing/2014/main" id="{228BD1AA-532A-4577-BEAC-F003A5EE3BFB}"/>
+              </a:ext>
+            </a:extLst>
+          </p:cNvPr>
+          <p:cNvSpPr/>
+          <p:nvPr/>
+        </p:nvSpPr>
+        <p:spPr>
+          <a:xfrm>
+            <a:off x="4437005" y="3665886"/>
+            <a:ext cx="1190625" cy="462527"/>
+          </a:xfrm>
+          <a:prstGeom prst="foldedCorner">
+            <a:avLst/>
+          </a:prstGeom>
+          <a:noFill/>
+        </p:spPr>
+        <p:style>
+          <a:lnRef idx="2">
+            <a:schemeClr val="accent1">
+              <a:shade val="50000"/>
+            </a:schemeClr>
+          </a:lnRef>
+          <a:fillRef idx="1">
+            <a:schemeClr val="accent1"/>
+          </a:fillRef>
+          <a:effectRef idx="0">
+            <a:schemeClr val="accent1"/>
+          </a:effectRef>
+          <a:fontRef idx="minor">
+            <a:schemeClr val="lt1"/>
+          </a:fontRef>
+        </p:style>
+        <p:txBody>
+          <a:bodyPr rtlCol="0" anchor="ctr"/>
+          <a:lstStyle/>
+          <a:p>
+            <a:pPr algn="ctr"/>
+            <a:endParaRPr lang="fr-FR" dirty="0"/>
+          </a:p>
+        </p:txBody>
+      </p:sp>
+      <p:sp>
+        <p:nvSpPr>
+          <p:cNvPr id="29" name="Rectangle : carré corné 28">
+            <a:extLst>
+              <a:ext uri="{FF2B5EF4-FFF2-40B4-BE49-F238E27FC236}">
+                <a16:creationId xmlns:a16="http://schemas.microsoft.com/office/drawing/2014/main" id="{010C29EE-9341-4CE8-8012-D4BCDB6F9561}"/>
+              </a:ext>
+            </a:extLst>
+          </p:cNvPr>
+          <p:cNvSpPr/>
+          <p:nvPr/>
+        </p:nvSpPr>
+        <p:spPr>
+          <a:xfrm>
+            <a:off x="6907969" y="2593060"/>
+            <a:ext cx="1190625" cy="826966"/>
+          </a:xfrm>
+          <a:prstGeom prst="foldedCorner">
+            <a:avLst/>
+          </a:prstGeom>
+          <a:noFill/>
+        </p:spPr>
+        <p:style>
+          <a:lnRef idx="2">
+            <a:schemeClr val="accent1">
+              <a:shade val="50000"/>
+            </a:schemeClr>
+          </a:lnRef>
+          <a:fillRef idx="1">
+            <a:schemeClr val="accent1"/>
+          </a:fillRef>
+          <a:effectRef idx="0">
+            <a:schemeClr val="accent1"/>
+          </a:effectRef>
+          <a:fontRef idx="minor">
+            <a:schemeClr val="lt1"/>
+          </a:fontRef>
+        </p:style>
+        <p:txBody>
+          <a:bodyPr rtlCol="0" anchor="ctr"/>
+          <a:lstStyle/>
+          <a:p>
+            <a:pPr algn="ctr"/>
+            <a:endParaRPr lang="fr-FR" dirty="0"/>
+          </a:p>
+        </p:txBody>
+      </p:sp>
+      <p:sp>
+        <p:nvSpPr>
+          <p:cNvPr id="30" name="Rectangle : coins arrondis 29">
+            <a:extLst>
+              <a:ext uri="{FF2B5EF4-FFF2-40B4-BE49-F238E27FC236}">
+                <a16:creationId xmlns:a16="http://schemas.microsoft.com/office/drawing/2014/main" id="{3C7D81EF-E0CD-46BB-9A1D-BFAAB06268EE}"/>
+              </a:ext>
+            </a:extLst>
+          </p:cNvPr>
+          <p:cNvSpPr/>
+          <p:nvPr/>
+        </p:nvSpPr>
+        <p:spPr>
+          <a:xfrm>
+            <a:off x="7117519" y="3046955"/>
+            <a:ext cx="595313" cy="154701"/>
+          </a:xfrm>
+          <a:prstGeom prst="roundRect">
+            <a:avLst/>
+          </a:prstGeom>
+        </p:spPr>
+        <p:style>
+          <a:lnRef idx="2">
+            <a:schemeClr val="accent1">
+              <a:shade val="50000"/>
+            </a:schemeClr>
+          </a:lnRef>
+          <a:fillRef idx="1">
+            <a:schemeClr val="accent1"/>
+          </a:fillRef>
+          <a:effectRef idx="0">
+            <a:schemeClr val="accent1"/>
+          </a:effectRef>
+          <a:fontRef idx="minor">
+            <a:schemeClr val="lt1"/>
+          </a:fontRef>
+        </p:style>
+        <p:txBody>
+          <a:bodyPr rtlCol="0" anchor="ctr"/>
+          <a:lstStyle/>
+          <a:p>
+            <a:pPr algn="ctr"/>
+            <a:endParaRPr lang="fr-FR"/>
+          </a:p>
+        </p:txBody>
+      </p:sp>
+      <p:sp>
+        <p:nvSpPr>
+          <p:cNvPr id="31" name="Rectangle : coins arrondis 30">
+            <a:extLst>
+              <a:ext uri="{FF2B5EF4-FFF2-40B4-BE49-F238E27FC236}">
+                <a16:creationId xmlns:a16="http://schemas.microsoft.com/office/drawing/2014/main" id="{AFA38247-F340-4E53-A5F3-ED4963E1F6C3}"/>
+              </a:ext>
+            </a:extLst>
+          </p:cNvPr>
+          <p:cNvSpPr/>
+          <p:nvPr/>
+        </p:nvSpPr>
+        <p:spPr>
+          <a:xfrm>
+            <a:off x="6636166" y="2402212"/>
+            <a:ext cx="1880848" cy="2803071"/>
+          </a:xfrm>
+          <a:prstGeom prst="roundRect">
+            <a:avLst/>
+          </a:prstGeom>
+          <a:noFill/>
+        </p:spPr>
+        <p:style>
+          <a:lnRef idx="2">
+            <a:schemeClr val="accent1">
+              <a:shade val="50000"/>
+            </a:schemeClr>
+          </a:lnRef>
+          <a:fillRef idx="1">
+            <a:schemeClr val="accent1"/>
+          </a:fillRef>
+          <a:effectRef idx="0">
+            <a:schemeClr val="accent1"/>
+          </a:effectRef>
+          <a:fontRef idx="minor">
+            <a:schemeClr val="lt1"/>
+          </a:fontRef>
+        </p:style>
+        <p:txBody>
+          <a:bodyPr rtlCol="0" anchor="ctr"/>
+          <a:lstStyle/>
+          <a:p>
+            <a:pPr algn="ctr"/>
+            <a:endParaRPr lang="fr-FR"/>
+          </a:p>
+        </p:txBody>
+      </p:sp>
+      <p:sp>
+        <p:nvSpPr>
+          <p:cNvPr id="32" name="ZoneTexte 31">
+            <a:extLst>
+              <a:ext uri="{FF2B5EF4-FFF2-40B4-BE49-F238E27FC236}">
+                <a16:creationId xmlns:a16="http://schemas.microsoft.com/office/drawing/2014/main" id="{9B7A41AF-1F94-4BB7-B517-B325C4314ED3}"/>
+              </a:ext>
+            </a:extLst>
+          </p:cNvPr>
+          <p:cNvSpPr txBox="1"/>
+          <p:nvPr/>
+        </p:nvSpPr>
+        <p:spPr>
+          <a:xfrm>
+            <a:off x="6486828" y="2082098"/>
+            <a:ext cx="2571794" cy="369332"/>
+          </a:xfrm>
+          <a:prstGeom prst="rect">
+            <a:avLst/>
+          </a:prstGeom>
+          <a:noFill/>
+        </p:spPr>
+        <p:txBody>
+          <a:bodyPr wrap="none" rtlCol="0">
+            <a:spAutoFit/>
+          </a:bodyPr>
+          <a:lstStyle/>
+          <a:p>
+            <a:r>
+              <a:rPr lang="fr-FR" b="1" dirty="0"/>
+              <a:t>/_</a:t>
+            </a:r>
+            <a:r>
+              <a:rPr lang="fr-FR" b="1" dirty="0" err="1"/>
+              <a:t>temporary</a:t>
+            </a:r>
+            <a:r>
+              <a:rPr lang="fr-FR" dirty="0"/>
+              <a:t>/{</a:t>
+            </a:r>
+            <a:r>
+              <a:rPr lang="fr-FR" dirty="0" err="1"/>
+              <a:t>attemptid</a:t>
+            </a:r>
+            <a:r>
+              <a:rPr lang="fr-FR" dirty="0"/>
+              <a:t>}</a:t>
+            </a:r>
+          </a:p>
+        </p:txBody>
+      </p:sp>
+      <p:sp>
+        <p:nvSpPr>
+          <p:cNvPr id="33" name="Rectangle : carré corné 32">
+            <a:extLst>
+              <a:ext uri="{FF2B5EF4-FFF2-40B4-BE49-F238E27FC236}">
+                <a16:creationId xmlns:a16="http://schemas.microsoft.com/office/drawing/2014/main" id="{1003907C-627B-4D8E-A3B1-D2218482627D}"/>
+              </a:ext>
+            </a:extLst>
+          </p:cNvPr>
+          <p:cNvSpPr/>
+          <p:nvPr/>
+        </p:nvSpPr>
+        <p:spPr>
+          <a:xfrm>
+            <a:off x="6907969" y="3561656"/>
+            <a:ext cx="1190625" cy="462527"/>
+          </a:xfrm>
+          <a:prstGeom prst="foldedCorner">
+            <a:avLst/>
+          </a:prstGeom>
+          <a:noFill/>
+        </p:spPr>
+        <p:style>
+          <a:lnRef idx="2">
+            <a:schemeClr val="accent1">
+              <a:shade val="50000"/>
+            </a:schemeClr>
+          </a:lnRef>
+          <a:fillRef idx="1">
+            <a:schemeClr val="accent1"/>
+          </a:fillRef>
+          <a:effectRef idx="0">
+            <a:schemeClr val="accent1"/>
+          </a:effectRef>
+          <a:fontRef idx="minor">
+            <a:schemeClr val="lt1"/>
+          </a:fontRef>
+        </p:style>
+        <p:txBody>
+          <a:bodyPr rtlCol="0" anchor="ctr"/>
+          <a:lstStyle/>
+          <a:p>
+            <a:pPr algn="ctr"/>
+            <a:endParaRPr lang="fr-FR" dirty="0"/>
+          </a:p>
+        </p:txBody>
+      </p:sp>
+      <p:sp>
+        <p:nvSpPr>
+          <p:cNvPr id="34" name="Rectangle : carré corné 33">
+            <a:extLst>
+              <a:ext uri="{FF2B5EF4-FFF2-40B4-BE49-F238E27FC236}">
+                <a16:creationId xmlns:a16="http://schemas.microsoft.com/office/drawing/2014/main" id="{4F063CB7-B55A-476F-ACB5-04D2A286C06D}"/>
+              </a:ext>
+            </a:extLst>
+          </p:cNvPr>
+          <p:cNvSpPr/>
+          <p:nvPr/>
+        </p:nvSpPr>
+        <p:spPr>
+          <a:xfrm>
+            <a:off x="6907968" y="4214799"/>
+            <a:ext cx="1190625" cy="462527"/>
+          </a:xfrm>
+          <a:prstGeom prst="foldedCorner">
+            <a:avLst/>
+          </a:prstGeom>
+          <a:noFill/>
+        </p:spPr>
+        <p:style>
+          <a:lnRef idx="2">
+            <a:schemeClr val="accent1">
+              <a:shade val="50000"/>
+            </a:schemeClr>
+          </a:lnRef>
+          <a:fillRef idx="1">
+            <a:schemeClr val="accent1"/>
+          </a:fillRef>
+          <a:effectRef idx="0">
+            <a:schemeClr val="accent1"/>
+          </a:effectRef>
+          <a:fontRef idx="minor">
+            <a:schemeClr val="lt1"/>
+          </a:fontRef>
+        </p:style>
+        <p:txBody>
+          <a:bodyPr rtlCol="0" anchor="ctr"/>
+          <a:lstStyle/>
+          <a:p>
+            <a:pPr algn="ctr"/>
+            <a:endParaRPr lang="fr-FR" dirty="0"/>
+          </a:p>
+        </p:txBody>
+      </p:sp>
+      <p:sp>
+        <p:nvSpPr>
+          <p:cNvPr id="38" name="Rectangle : coins arrondis 37">
+            <a:extLst>
+              <a:ext uri="{FF2B5EF4-FFF2-40B4-BE49-F238E27FC236}">
+                <a16:creationId xmlns:a16="http://schemas.microsoft.com/office/drawing/2014/main" id="{724D7F48-E85A-4504-A4F8-697D3F961FE7}"/>
+              </a:ext>
+            </a:extLst>
+          </p:cNvPr>
+          <p:cNvSpPr/>
+          <p:nvPr/>
+        </p:nvSpPr>
+        <p:spPr>
+          <a:xfrm>
+            <a:off x="4199234" y="5525398"/>
+            <a:ext cx="1880848" cy="1082352"/>
+          </a:xfrm>
+          <a:prstGeom prst="roundRect">
+            <a:avLst/>
+          </a:prstGeom>
+          <a:noFill/>
+        </p:spPr>
+        <p:style>
+          <a:lnRef idx="2">
+            <a:schemeClr val="accent1">
+              <a:shade val="50000"/>
+            </a:schemeClr>
+          </a:lnRef>
+          <a:fillRef idx="1">
+            <a:schemeClr val="accent1"/>
+          </a:fillRef>
+          <a:effectRef idx="0">
+            <a:schemeClr val="accent1"/>
+          </a:effectRef>
+          <a:fontRef idx="minor">
+            <a:schemeClr val="lt1"/>
+          </a:fontRef>
+        </p:style>
+        <p:txBody>
+          <a:bodyPr rtlCol="0" anchor="ctr"/>
+          <a:lstStyle/>
+          <a:p>
+            <a:pPr algn="ctr"/>
+            <a:endParaRPr lang="fr-FR"/>
+          </a:p>
+        </p:txBody>
+      </p:sp>
+      <p:sp>
+        <p:nvSpPr>
+          <p:cNvPr id="39" name="ZoneTexte 38">
+            <a:extLst>
+              <a:ext uri="{FF2B5EF4-FFF2-40B4-BE49-F238E27FC236}">
+                <a16:creationId xmlns:a16="http://schemas.microsoft.com/office/drawing/2014/main" id="{2D3C3F25-9ED8-4F8F-9047-AD6F85C07481}"/>
+              </a:ext>
+            </a:extLst>
+          </p:cNvPr>
+          <p:cNvSpPr txBox="1"/>
+          <p:nvPr/>
+        </p:nvSpPr>
+        <p:spPr>
+          <a:xfrm>
+            <a:off x="4049896" y="5205283"/>
+            <a:ext cx="1800493" cy="369332"/>
+          </a:xfrm>
+          <a:prstGeom prst="rect">
+            <a:avLst/>
+          </a:prstGeom>
+          <a:noFill/>
+        </p:spPr>
+        <p:txBody>
+          <a:bodyPr wrap="none" rtlCol="0">
+            <a:spAutoFit/>
+          </a:bodyPr>
+          <a:lstStyle/>
+          <a:p>
+            <a:r>
+              <a:rPr lang="fr-FR" dirty="0"/>
+              <a:t>/</a:t>
+            </a:r>
+            <a:r>
+              <a:rPr lang="fr-FR" dirty="0" err="1"/>
+              <a:t>dir_partition</a:t>
+            </a:r>
+            <a:r>
+              <a:rPr lang="fr-FR" dirty="0"/>
+              <a:t>=YY</a:t>
+            </a:r>
+          </a:p>
+        </p:txBody>
+      </p:sp>
+      <p:sp>
+        <p:nvSpPr>
+          <p:cNvPr id="40" name="Rectangle : carré corné 39">
+            <a:extLst>
+              <a:ext uri="{FF2B5EF4-FFF2-40B4-BE49-F238E27FC236}">
+                <a16:creationId xmlns:a16="http://schemas.microsoft.com/office/drawing/2014/main" id="{FB95FBC7-8EE4-4912-B2B5-EDF4F8DE4E49}"/>
+              </a:ext>
+            </a:extLst>
+          </p:cNvPr>
+          <p:cNvSpPr/>
+          <p:nvPr/>
+        </p:nvSpPr>
+        <p:spPr>
+          <a:xfrm>
+            <a:off x="4484983" y="5711352"/>
+            <a:ext cx="1190625" cy="462527"/>
+          </a:xfrm>
+          <a:prstGeom prst="foldedCorner">
+            <a:avLst/>
+          </a:prstGeom>
+          <a:noFill/>
+        </p:spPr>
+        <p:style>
+          <a:lnRef idx="2">
+            <a:schemeClr val="accent1">
+              <a:shade val="50000"/>
+            </a:schemeClr>
+          </a:lnRef>
+          <a:fillRef idx="1">
+            <a:schemeClr val="accent1"/>
+          </a:fillRef>
+          <a:effectRef idx="0">
+            <a:schemeClr val="accent1"/>
+          </a:effectRef>
+          <a:fontRef idx="minor">
+            <a:schemeClr val="lt1"/>
+          </a:fontRef>
+        </p:style>
+        <p:txBody>
+          <a:bodyPr rtlCol="0" anchor="ctr"/>
+          <a:lstStyle/>
+          <a:p>
+            <a:pPr algn="ctr"/>
+            <a:endParaRPr lang="fr-FR" dirty="0"/>
+          </a:p>
+        </p:txBody>
+      </p:sp>
+      <p:sp>
+        <p:nvSpPr>
+          <p:cNvPr id="41" name="Croix 40">
+            <a:extLst>
+              <a:ext uri="{FF2B5EF4-FFF2-40B4-BE49-F238E27FC236}">
+                <a16:creationId xmlns:a16="http://schemas.microsoft.com/office/drawing/2014/main" id="{9844D84F-37A4-402D-A2A0-847353FCC698}"/>
+              </a:ext>
+            </a:extLst>
+          </p:cNvPr>
+          <p:cNvSpPr/>
+          <p:nvPr/>
+        </p:nvSpPr>
+        <p:spPr>
+          <a:xfrm>
+            <a:off x="6113220" y="1834571"/>
+            <a:ext cx="518947" cy="515706"/>
+          </a:xfrm>
+          <a:prstGeom prst="plus">
+            <a:avLst>
+              <a:gd name="adj" fmla="val 40831"/>
+            </a:avLst>
+          </a:prstGeom>
+        </p:spPr>
+        <p:style>
+          <a:lnRef idx="2">
+            <a:schemeClr val="accent1">
+              <a:shade val="50000"/>
+            </a:schemeClr>
+          </a:lnRef>
+          <a:fillRef idx="1">
+            <a:schemeClr val="accent1"/>
+          </a:fillRef>
+          <a:effectRef idx="0">
+            <a:schemeClr val="accent1"/>
+          </a:effectRef>
+          <a:fontRef idx="minor">
+            <a:schemeClr val="lt1"/>
+          </a:fontRef>
+        </p:style>
+        <p:txBody>
+          <a:bodyPr rtlCol="0" anchor="ctr"/>
+          <a:lstStyle/>
+          <a:p>
+            <a:pPr algn="ctr"/>
+            <a:endParaRPr lang="fr-FR"/>
+          </a:p>
+        </p:txBody>
+      </p:sp>
+      <p:sp>
+        <p:nvSpPr>
+          <p:cNvPr id="42" name="Flèche : droite 41">
+            <a:extLst>
+              <a:ext uri="{FF2B5EF4-FFF2-40B4-BE49-F238E27FC236}">
+                <a16:creationId xmlns:a16="http://schemas.microsoft.com/office/drawing/2014/main" id="{05E75123-6F05-432D-934D-D4182AD47F03}"/>
+              </a:ext>
+            </a:extLst>
+          </p:cNvPr>
+          <p:cNvSpPr/>
+          <p:nvPr/>
+        </p:nvSpPr>
+        <p:spPr>
+          <a:xfrm>
+            <a:off x="8112739" y="1466495"/>
+            <a:ext cx="1371599" cy="625929"/>
+          </a:xfrm>
+          <a:prstGeom prst="rightArrow">
+            <a:avLst/>
+          </a:prstGeom>
+        </p:spPr>
+        <p:style>
+          <a:lnRef idx="2">
+            <a:schemeClr val="accent1">
+              <a:shade val="50000"/>
+            </a:schemeClr>
+          </a:lnRef>
+          <a:fillRef idx="1">
+            <a:schemeClr val="accent1"/>
+          </a:fillRef>
+          <a:effectRef idx="0">
+            <a:schemeClr val="accent1"/>
+          </a:effectRef>
+          <a:fontRef idx="minor">
+            <a:schemeClr val="lt1"/>
+          </a:fontRef>
+        </p:style>
+        <p:txBody>
+          <a:bodyPr rtlCol="0" anchor="ctr"/>
+          <a:lstStyle/>
+          <a:p>
+            <a:pPr algn="ctr"/>
+            <a:endParaRPr lang="fr-FR"/>
+          </a:p>
+        </p:txBody>
+      </p:sp>
+      <p:sp>
+        <p:nvSpPr>
+          <p:cNvPr id="43" name="Rectangle : carré corné 42">
+            <a:extLst>
+              <a:ext uri="{FF2B5EF4-FFF2-40B4-BE49-F238E27FC236}">
+                <a16:creationId xmlns:a16="http://schemas.microsoft.com/office/drawing/2014/main" id="{705D8119-0C5B-4DB6-887D-C42EE49A934C}"/>
+              </a:ext>
+            </a:extLst>
+          </p:cNvPr>
+          <p:cNvSpPr/>
+          <p:nvPr/>
+        </p:nvSpPr>
+        <p:spPr>
+          <a:xfrm>
+            <a:off x="10059585" y="1965335"/>
+            <a:ext cx="1190625" cy="826966"/>
+          </a:xfrm>
+          <a:prstGeom prst="foldedCorner">
+            <a:avLst/>
+          </a:prstGeom>
+          <a:noFill/>
+        </p:spPr>
+        <p:style>
+          <a:lnRef idx="2">
+            <a:schemeClr val="accent1">
+              <a:shade val="50000"/>
+            </a:schemeClr>
+          </a:lnRef>
+          <a:fillRef idx="1">
+            <a:schemeClr val="accent1"/>
+          </a:fillRef>
+          <a:effectRef idx="0">
+            <a:schemeClr val="accent1"/>
+          </a:effectRef>
+          <a:fontRef idx="minor">
+            <a:schemeClr val="lt1"/>
+          </a:fontRef>
+        </p:style>
+        <p:txBody>
+          <a:bodyPr rtlCol="0" anchor="ctr"/>
+          <a:lstStyle/>
+          <a:p>
+            <a:pPr algn="ctr"/>
+            <a:endParaRPr lang="fr-FR" dirty="0"/>
+          </a:p>
+        </p:txBody>
+      </p:sp>
+      <p:sp>
+        <p:nvSpPr>
+          <p:cNvPr id="44" name="Rectangle : coins arrondis 43">
+            <a:extLst>
+              <a:ext uri="{FF2B5EF4-FFF2-40B4-BE49-F238E27FC236}">
+                <a16:creationId xmlns:a16="http://schemas.microsoft.com/office/drawing/2014/main" id="{1D174CF9-B0EA-4111-9B17-BDF74742AA82}"/>
+              </a:ext>
+            </a:extLst>
+          </p:cNvPr>
+          <p:cNvSpPr/>
+          <p:nvPr/>
+        </p:nvSpPr>
+        <p:spPr>
+          <a:xfrm>
+            <a:off x="10269135" y="2419230"/>
+            <a:ext cx="595313" cy="154701"/>
+          </a:xfrm>
+          <a:prstGeom prst="roundRect">
+            <a:avLst/>
+          </a:prstGeom>
+        </p:spPr>
+        <p:style>
+          <a:lnRef idx="2">
+            <a:schemeClr val="accent1">
+              <a:shade val="50000"/>
+            </a:schemeClr>
+          </a:lnRef>
+          <a:fillRef idx="1">
+            <a:schemeClr val="accent1"/>
+          </a:fillRef>
+          <a:effectRef idx="0">
+            <a:schemeClr val="accent1"/>
+          </a:effectRef>
+          <a:fontRef idx="minor">
+            <a:schemeClr val="lt1"/>
+          </a:fontRef>
+        </p:style>
+        <p:txBody>
+          <a:bodyPr rtlCol="0" anchor="ctr"/>
+          <a:lstStyle/>
+          <a:p>
+            <a:pPr algn="ctr"/>
+            <a:endParaRPr lang="fr-FR"/>
+          </a:p>
+        </p:txBody>
+      </p:sp>
+      <p:sp>
+        <p:nvSpPr>
+          <p:cNvPr id="45" name="Rectangle : coins arrondis 44">
+            <a:extLst>
+              <a:ext uri="{FF2B5EF4-FFF2-40B4-BE49-F238E27FC236}">
+                <a16:creationId xmlns:a16="http://schemas.microsoft.com/office/drawing/2014/main" id="{96E84326-A8CF-44C1-8B04-E30C1958A02B}"/>
+              </a:ext>
+            </a:extLst>
+          </p:cNvPr>
+          <p:cNvSpPr/>
+          <p:nvPr/>
+        </p:nvSpPr>
+        <p:spPr>
+          <a:xfrm>
+            <a:off x="9787782" y="1774487"/>
+            <a:ext cx="2390090" cy="2919977"/>
+          </a:xfrm>
+          <a:prstGeom prst="roundRect">
+            <a:avLst/>
+          </a:prstGeom>
+          <a:noFill/>
+        </p:spPr>
+        <p:style>
+          <a:lnRef idx="2">
+            <a:schemeClr val="accent1">
+              <a:shade val="50000"/>
+            </a:schemeClr>
+          </a:lnRef>
+          <a:fillRef idx="1">
+            <a:schemeClr val="accent1"/>
+          </a:fillRef>
+          <a:effectRef idx="0">
+            <a:schemeClr val="accent1"/>
+          </a:effectRef>
+          <a:fontRef idx="minor">
+            <a:schemeClr val="lt1"/>
+          </a:fontRef>
+        </p:style>
+        <p:txBody>
+          <a:bodyPr rtlCol="0" anchor="ctr"/>
+          <a:lstStyle/>
+          <a:p>
+            <a:pPr algn="ctr"/>
+            <a:endParaRPr lang="fr-FR"/>
+          </a:p>
+        </p:txBody>
+      </p:sp>
+      <p:sp>
+        <p:nvSpPr>
+          <p:cNvPr id="46" name="ZoneTexte 45">
+            <a:extLst>
+              <a:ext uri="{FF2B5EF4-FFF2-40B4-BE49-F238E27FC236}">
+                <a16:creationId xmlns:a16="http://schemas.microsoft.com/office/drawing/2014/main" id="{A2127AE3-8ECA-49EC-9B53-E3DDD44754F8}"/>
+              </a:ext>
+            </a:extLst>
+          </p:cNvPr>
+          <p:cNvSpPr txBox="1"/>
+          <p:nvPr/>
+        </p:nvSpPr>
+        <p:spPr>
+          <a:xfrm>
+            <a:off x="9638444" y="1454373"/>
+            <a:ext cx="1816523" cy="369332"/>
+          </a:xfrm>
+          <a:prstGeom prst="rect">
+            <a:avLst/>
+          </a:prstGeom>
+          <a:noFill/>
+        </p:spPr>
+        <p:txBody>
+          <a:bodyPr wrap="none" rtlCol="0">
+            <a:spAutoFit/>
+          </a:bodyPr>
+          <a:lstStyle/>
+          <a:p>
+            <a:r>
+              <a:rPr lang="fr-FR" dirty="0"/>
+              <a:t>/</a:t>
+            </a:r>
+            <a:r>
+              <a:rPr lang="fr-FR" dirty="0" err="1"/>
+              <a:t>dir_partition</a:t>
+            </a:r>
+            <a:r>
+              <a:rPr lang="fr-FR" dirty="0"/>
+              <a:t>=XX</a:t>
+            </a:r>
+          </a:p>
+        </p:txBody>
+      </p:sp>
+      <p:sp>
+        <p:nvSpPr>
+          <p:cNvPr id="47" name="Rectangle : carré corné 46">
+            <a:extLst>
+              <a:ext uri="{FF2B5EF4-FFF2-40B4-BE49-F238E27FC236}">
+                <a16:creationId xmlns:a16="http://schemas.microsoft.com/office/drawing/2014/main" id="{D419A359-1A92-4542-A627-98CB9AE3DFFF}"/>
+              </a:ext>
+            </a:extLst>
+          </p:cNvPr>
+          <p:cNvSpPr/>
+          <p:nvPr/>
+        </p:nvSpPr>
+        <p:spPr>
+          <a:xfrm>
+            <a:off x="10059585" y="2933931"/>
+            <a:ext cx="1190625" cy="462527"/>
+          </a:xfrm>
+          <a:prstGeom prst="foldedCorner">
+            <a:avLst/>
+          </a:prstGeom>
+          <a:noFill/>
+        </p:spPr>
+        <p:style>
+          <a:lnRef idx="2">
+            <a:schemeClr val="accent1">
+              <a:shade val="50000"/>
+            </a:schemeClr>
+          </a:lnRef>
+          <a:fillRef idx="1">
+            <a:schemeClr val="accent1"/>
+          </a:fillRef>
+          <a:effectRef idx="0">
+            <a:schemeClr val="accent1"/>
+          </a:effectRef>
+          <a:fontRef idx="minor">
+            <a:schemeClr val="lt1"/>
+          </a:fontRef>
+        </p:style>
+        <p:txBody>
+          <a:bodyPr rtlCol="0" anchor="ctr"/>
+          <a:lstStyle/>
+          <a:p>
+            <a:pPr algn="ctr"/>
+            <a:endParaRPr lang="fr-FR" dirty="0"/>
+          </a:p>
+        </p:txBody>
+      </p:sp>
+      <p:sp>
+        <p:nvSpPr>
+          <p:cNvPr id="48" name="Rectangle : carré corné 47">
+            <a:extLst>
+              <a:ext uri="{FF2B5EF4-FFF2-40B4-BE49-F238E27FC236}">
+                <a16:creationId xmlns:a16="http://schemas.microsoft.com/office/drawing/2014/main" id="{717451B2-B030-4080-8BC8-3FFF56F98FD5}"/>
+              </a:ext>
+            </a:extLst>
+          </p:cNvPr>
+          <p:cNvSpPr/>
+          <p:nvPr/>
+        </p:nvSpPr>
+        <p:spPr>
+          <a:xfrm>
+            <a:off x="10059584" y="3587074"/>
+            <a:ext cx="1190625" cy="462527"/>
+          </a:xfrm>
+          <a:prstGeom prst="foldedCorner">
+            <a:avLst/>
+          </a:prstGeom>
+          <a:noFill/>
+        </p:spPr>
+        <p:style>
+          <a:lnRef idx="2">
+            <a:schemeClr val="accent1">
+              <a:shade val="50000"/>
+            </a:schemeClr>
+          </a:lnRef>
+          <a:fillRef idx="1">
+            <a:schemeClr val="accent1"/>
+          </a:fillRef>
+          <a:effectRef idx="0">
+            <a:schemeClr val="accent1"/>
+          </a:effectRef>
+          <a:fontRef idx="minor">
+            <a:schemeClr val="lt1"/>
+          </a:fontRef>
+        </p:style>
+        <p:txBody>
+          <a:bodyPr rtlCol="0" anchor="ctr"/>
+          <a:lstStyle/>
+          <a:p>
+            <a:pPr algn="ctr"/>
+            <a:endParaRPr lang="fr-FR" dirty="0"/>
+          </a:p>
+        </p:txBody>
+      </p:sp>
+      <p:sp>
+        <p:nvSpPr>
+          <p:cNvPr id="49" name="Signe de multiplication 48">
+            <a:extLst>
+              <a:ext uri="{FF2B5EF4-FFF2-40B4-BE49-F238E27FC236}">
+                <a16:creationId xmlns:a16="http://schemas.microsoft.com/office/drawing/2014/main" id="{54C255EB-8547-4494-8D80-D82BBF018B9A}"/>
+              </a:ext>
+            </a:extLst>
+          </p:cNvPr>
+          <p:cNvSpPr/>
+          <p:nvPr/>
+        </p:nvSpPr>
+        <p:spPr>
+          <a:xfrm>
+            <a:off x="10269135" y="1791554"/>
+            <a:ext cx="719137" cy="714375"/>
+          </a:xfrm>
+          <a:prstGeom prst="mathMultiply">
+            <a:avLst>
+              <a:gd name="adj1" fmla="val 10853"/>
+            </a:avLst>
+          </a:prstGeom>
+          <a:solidFill>
+            <a:srgbClr val="FF0000"/>
+          </a:solidFill>
+        </p:spPr>
+        <p:style>
+          <a:lnRef idx="2">
+            <a:schemeClr val="accent1">
+              <a:shade val="50000"/>
+            </a:schemeClr>
+          </a:lnRef>
+          <a:fillRef idx="1">
+            <a:schemeClr val="accent1"/>
+          </a:fillRef>
+          <a:effectRef idx="0">
+            <a:schemeClr val="accent1"/>
+          </a:effectRef>
+          <a:fontRef idx="minor">
+            <a:schemeClr val="lt1"/>
+          </a:fontRef>
+        </p:style>
+        <p:txBody>
+          <a:bodyPr rtlCol="0" anchor="ctr"/>
+          <a:lstStyle/>
+          <a:p>
+            <a:pPr algn="ctr"/>
+            <a:endParaRPr lang="fr-FR"/>
+          </a:p>
+        </p:txBody>
+      </p:sp>
+      <p:sp>
+        <p:nvSpPr>
+          <p:cNvPr id="50" name="Signe de multiplication 49">
+            <a:extLst>
+              <a:ext uri="{FF2B5EF4-FFF2-40B4-BE49-F238E27FC236}">
+                <a16:creationId xmlns:a16="http://schemas.microsoft.com/office/drawing/2014/main" id="{66CD7F51-BEED-4445-BC36-221608C5A712}"/>
+              </a:ext>
+            </a:extLst>
+          </p:cNvPr>
+          <p:cNvSpPr/>
+          <p:nvPr/>
+        </p:nvSpPr>
+        <p:spPr>
+          <a:xfrm>
+            <a:off x="10269135" y="2643792"/>
+            <a:ext cx="719137" cy="714375"/>
+          </a:xfrm>
+          <a:prstGeom prst="mathMultiply">
+            <a:avLst>
+              <a:gd name="adj1" fmla="val 10853"/>
+            </a:avLst>
+          </a:prstGeom>
+          <a:solidFill>
+            <a:srgbClr val="FF0000"/>
+          </a:solidFill>
+        </p:spPr>
+        <p:style>
+          <a:lnRef idx="2">
+            <a:schemeClr val="accent1">
+              <a:shade val="50000"/>
+            </a:schemeClr>
+          </a:lnRef>
+          <a:fillRef idx="1">
+            <a:schemeClr val="accent1"/>
+          </a:fillRef>
+          <a:effectRef idx="0">
+            <a:schemeClr val="accent1"/>
+          </a:effectRef>
+          <a:fontRef idx="minor">
+            <a:schemeClr val="lt1"/>
+          </a:fontRef>
+        </p:style>
+        <p:txBody>
+          <a:bodyPr rtlCol="0" anchor="ctr"/>
+          <a:lstStyle/>
+          <a:p>
+            <a:pPr algn="ctr"/>
+            <a:endParaRPr lang="fr-FR"/>
+          </a:p>
+        </p:txBody>
+      </p:sp>
+      <p:sp>
+        <p:nvSpPr>
+          <p:cNvPr id="51" name="Signe de multiplication 50">
+            <a:extLst>
+              <a:ext uri="{FF2B5EF4-FFF2-40B4-BE49-F238E27FC236}">
+                <a16:creationId xmlns:a16="http://schemas.microsoft.com/office/drawing/2014/main" id="{89915F68-A03A-4A43-AB46-DE0D761EB9D6}"/>
+              </a:ext>
+            </a:extLst>
+          </p:cNvPr>
+          <p:cNvSpPr/>
+          <p:nvPr/>
+        </p:nvSpPr>
+        <p:spPr>
+          <a:xfrm>
+            <a:off x="10268456" y="3428028"/>
+            <a:ext cx="719137" cy="714375"/>
+          </a:xfrm>
+          <a:prstGeom prst="mathMultiply">
+            <a:avLst>
+              <a:gd name="adj1" fmla="val 10853"/>
+            </a:avLst>
+          </a:prstGeom>
+          <a:solidFill>
+            <a:srgbClr val="FF0000"/>
+          </a:solidFill>
+        </p:spPr>
+        <p:style>
+          <a:lnRef idx="2">
+            <a:schemeClr val="accent1">
+              <a:shade val="50000"/>
+            </a:schemeClr>
+          </a:lnRef>
+          <a:fillRef idx="1">
+            <a:schemeClr val="accent1"/>
+          </a:fillRef>
+          <a:effectRef idx="0">
+            <a:schemeClr val="accent1"/>
+          </a:effectRef>
+          <a:fontRef idx="minor">
+            <a:schemeClr val="lt1"/>
+          </a:fontRef>
+        </p:style>
+        <p:txBody>
+          <a:bodyPr rtlCol="0" anchor="ctr"/>
+          <a:lstStyle/>
+          <a:p>
+            <a:pPr algn="ctr"/>
+            <a:endParaRPr lang="fr-FR"/>
+          </a:p>
+        </p:txBody>
+      </p:sp>
+      <p:sp>
+        <p:nvSpPr>
+          <p:cNvPr id="55" name="Rectangle : carré corné 54">
+            <a:extLst>
+              <a:ext uri="{FF2B5EF4-FFF2-40B4-BE49-F238E27FC236}">
+                <a16:creationId xmlns:a16="http://schemas.microsoft.com/office/drawing/2014/main" id="{6C12D7E8-41AE-4838-96FA-32A03BD2A1BD}"/>
+              </a:ext>
+            </a:extLst>
+          </p:cNvPr>
+          <p:cNvSpPr/>
+          <p:nvPr/>
+        </p:nvSpPr>
+        <p:spPr>
+          <a:xfrm>
+            <a:off x="10925848" y="2261267"/>
+            <a:ext cx="1190625" cy="826966"/>
+          </a:xfrm>
+          <a:prstGeom prst="foldedCorner">
+            <a:avLst/>
+          </a:prstGeom>
+          <a:noFill/>
+        </p:spPr>
+        <p:style>
+          <a:lnRef idx="2">
+            <a:schemeClr val="accent1">
+              <a:shade val="50000"/>
+            </a:schemeClr>
+          </a:lnRef>
+          <a:fillRef idx="1">
+            <a:schemeClr val="accent1"/>
+          </a:fillRef>
+          <a:effectRef idx="0">
+            <a:schemeClr val="accent1"/>
+          </a:effectRef>
+          <a:fontRef idx="minor">
+            <a:schemeClr val="lt1"/>
+          </a:fontRef>
+        </p:style>
+        <p:txBody>
+          <a:bodyPr rtlCol="0" anchor="ctr"/>
+          <a:lstStyle/>
+          <a:p>
+            <a:pPr algn="ctr"/>
+            <a:endParaRPr lang="fr-FR" dirty="0"/>
+          </a:p>
+        </p:txBody>
+      </p:sp>
+      <p:sp>
+        <p:nvSpPr>
+          <p:cNvPr id="56" name="Rectangle : coins arrondis 55">
+            <a:extLst>
+              <a:ext uri="{FF2B5EF4-FFF2-40B4-BE49-F238E27FC236}">
+                <a16:creationId xmlns:a16="http://schemas.microsoft.com/office/drawing/2014/main" id="{B1C54592-9C48-4B87-84EB-2DA425A5F7EA}"/>
+              </a:ext>
+            </a:extLst>
+          </p:cNvPr>
+          <p:cNvSpPr/>
+          <p:nvPr/>
+        </p:nvSpPr>
+        <p:spPr>
+          <a:xfrm>
+            <a:off x="11135398" y="2715162"/>
+            <a:ext cx="595313" cy="154701"/>
+          </a:xfrm>
+          <a:prstGeom prst="roundRect">
+            <a:avLst/>
+          </a:prstGeom>
+        </p:spPr>
+        <p:style>
+          <a:lnRef idx="2">
+            <a:schemeClr val="accent1">
+              <a:shade val="50000"/>
+            </a:schemeClr>
+          </a:lnRef>
+          <a:fillRef idx="1">
+            <a:schemeClr val="accent1"/>
+          </a:fillRef>
+          <a:effectRef idx="0">
+            <a:schemeClr val="accent1"/>
+          </a:effectRef>
+          <a:fontRef idx="minor">
+            <a:schemeClr val="lt1"/>
+          </a:fontRef>
+        </p:style>
+        <p:txBody>
+          <a:bodyPr rtlCol="0" anchor="ctr"/>
+          <a:lstStyle/>
+          <a:p>
+            <a:pPr algn="ctr"/>
+            <a:endParaRPr lang="fr-FR"/>
+          </a:p>
+        </p:txBody>
+      </p:sp>
+      <p:sp>
+        <p:nvSpPr>
+          <p:cNvPr id="57" name="Rectangle : carré corné 56">
+            <a:extLst>
+              <a:ext uri="{FF2B5EF4-FFF2-40B4-BE49-F238E27FC236}">
+                <a16:creationId xmlns:a16="http://schemas.microsoft.com/office/drawing/2014/main" id="{F5B1AD92-BD0A-4B44-B027-92A2361CAC54}"/>
+              </a:ext>
+            </a:extLst>
+          </p:cNvPr>
+          <p:cNvSpPr/>
+          <p:nvPr/>
+        </p:nvSpPr>
+        <p:spPr>
+          <a:xfrm>
+            <a:off x="10925848" y="3229863"/>
+            <a:ext cx="1190625" cy="462527"/>
+          </a:xfrm>
+          <a:prstGeom prst="foldedCorner">
+            <a:avLst/>
+          </a:prstGeom>
+          <a:noFill/>
+        </p:spPr>
+        <p:style>
+          <a:lnRef idx="2">
+            <a:schemeClr val="accent1">
+              <a:shade val="50000"/>
+            </a:schemeClr>
+          </a:lnRef>
+          <a:fillRef idx="1">
+            <a:schemeClr val="accent1"/>
+          </a:fillRef>
+          <a:effectRef idx="0">
+            <a:schemeClr val="accent1"/>
+          </a:effectRef>
+          <a:fontRef idx="minor">
+            <a:schemeClr val="lt1"/>
+          </a:fontRef>
+        </p:style>
+        <p:txBody>
+          <a:bodyPr rtlCol="0" anchor="ctr"/>
+          <a:lstStyle/>
+          <a:p>
+            <a:pPr algn="ctr"/>
+            <a:endParaRPr lang="fr-FR" dirty="0"/>
+          </a:p>
+        </p:txBody>
+      </p:sp>
+      <p:sp>
+        <p:nvSpPr>
+          <p:cNvPr id="58" name="Rectangle : carré corné 57">
+            <a:extLst>
+              <a:ext uri="{FF2B5EF4-FFF2-40B4-BE49-F238E27FC236}">
+                <a16:creationId xmlns:a16="http://schemas.microsoft.com/office/drawing/2014/main" id="{1A672719-B463-4321-97AD-EEC53DCAE20D}"/>
+              </a:ext>
+            </a:extLst>
+          </p:cNvPr>
+          <p:cNvSpPr/>
+          <p:nvPr/>
+        </p:nvSpPr>
+        <p:spPr>
+          <a:xfrm>
+            <a:off x="10925847" y="3883006"/>
+            <a:ext cx="1190625" cy="462527"/>
+          </a:xfrm>
+          <a:prstGeom prst="foldedCorner">
+            <a:avLst/>
+          </a:prstGeom>
+          <a:noFill/>
+        </p:spPr>
+        <p:style>
+          <a:lnRef idx="2">
+            <a:schemeClr val="accent1">
+              <a:shade val="50000"/>
+            </a:schemeClr>
+          </a:lnRef>
+          <a:fillRef idx="1">
+            <a:schemeClr val="accent1"/>
+          </a:fillRef>
+          <a:effectRef idx="0">
+            <a:schemeClr val="accent1"/>
+          </a:effectRef>
+          <a:fontRef idx="minor">
+            <a:schemeClr val="lt1"/>
+          </a:fontRef>
+        </p:style>
+        <p:txBody>
+          <a:bodyPr rtlCol="0" anchor="ctr"/>
+          <a:lstStyle/>
+          <a:p>
+            <a:pPr algn="ctr"/>
+            <a:endParaRPr lang="fr-FR" dirty="0"/>
+          </a:p>
+        </p:txBody>
+      </p:sp>
+      <p:sp>
+        <p:nvSpPr>
+          <p:cNvPr id="59" name="Flèche : courbe vers le bas 58">
+            <a:extLst>
+              <a:ext uri="{FF2B5EF4-FFF2-40B4-BE49-F238E27FC236}">
+                <a16:creationId xmlns:a16="http://schemas.microsoft.com/office/drawing/2014/main" id="{F7AD6C7C-59CD-45BE-84F8-37E3FB8DF489}"/>
+              </a:ext>
+            </a:extLst>
+          </p:cNvPr>
+          <p:cNvSpPr/>
+          <p:nvPr/>
+        </p:nvSpPr>
+        <p:spPr>
+          <a:xfrm rot="20566595">
+            <a:off x="8302302" y="2677692"/>
+            <a:ext cx="1080089" cy="296168"/>
+          </a:xfrm>
+          <a:prstGeom prst="curvedDownArrow">
+            <a:avLst/>
+          </a:prstGeom>
+        </p:spPr>
+        <p:style>
+          <a:lnRef idx="2">
+            <a:schemeClr val="accent1">
+              <a:shade val="50000"/>
+            </a:schemeClr>
+          </a:lnRef>
+          <a:fillRef idx="1">
+            <a:schemeClr val="accent1"/>
+          </a:fillRef>
+          <a:effectRef idx="0">
+            <a:schemeClr val="accent1"/>
+          </a:effectRef>
+          <a:fontRef idx="minor">
+            <a:schemeClr val="lt1"/>
+          </a:fontRef>
+        </p:style>
+        <p:txBody>
+          <a:bodyPr rtlCol="0" anchor="ctr"/>
+          <a:lstStyle/>
+          <a:p>
+            <a:pPr algn="ctr"/>
+            <a:endParaRPr lang="fr-FR">
+              <a:solidFill>
+                <a:schemeClr val="tx1"/>
+              </a:solidFill>
+            </a:endParaRPr>
+          </a:p>
+        </p:txBody>
+      </p:sp>
+      <p:sp>
+        <p:nvSpPr>
+          <p:cNvPr id="61" name="Flèche : courbe vers le bas 60">
+            <a:extLst>
+              <a:ext uri="{FF2B5EF4-FFF2-40B4-BE49-F238E27FC236}">
+                <a16:creationId xmlns:a16="http://schemas.microsoft.com/office/drawing/2014/main" id="{C3E94D87-050E-4A7F-9586-F1DC54EBD715}"/>
+              </a:ext>
+            </a:extLst>
+          </p:cNvPr>
+          <p:cNvSpPr/>
+          <p:nvPr/>
+        </p:nvSpPr>
+        <p:spPr>
+          <a:xfrm rot="20566595">
+            <a:off x="8290993" y="3396849"/>
+            <a:ext cx="1080089" cy="296168"/>
+          </a:xfrm>
+          <a:prstGeom prst="curvedDownArrow">
+            <a:avLst/>
+          </a:prstGeom>
+        </p:spPr>
+        <p:style>
+          <a:lnRef idx="2">
+            <a:schemeClr val="accent1">
+              <a:shade val="50000"/>
+            </a:schemeClr>
+          </a:lnRef>
+          <a:fillRef idx="1">
+            <a:schemeClr val="accent1"/>
+          </a:fillRef>
+          <a:effectRef idx="0">
+            <a:schemeClr val="accent1"/>
+          </a:effectRef>
+          <a:fontRef idx="minor">
+            <a:schemeClr val="lt1"/>
+          </a:fontRef>
+        </p:style>
+        <p:txBody>
+          <a:bodyPr rtlCol="0" anchor="ctr"/>
+          <a:lstStyle/>
+          <a:p>
+            <a:pPr algn="ctr"/>
+            <a:endParaRPr lang="fr-FR">
+              <a:solidFill>
+                <a:schemeClr val="tx1"/>
+              </a:solidFill>
+            </a:endParaRPr>
+          </a:p>
+        </p:txBody>
+      </p:sp>
+      <p:sp>
+        <p:nvSpPr>
+          <p:cNvPr id="62" name="Flèche : courbe vers le bas 61">
+            <a:extLst>
+              <a:ext uri="{FF2B5EF4-FFF2-40B4-BE49-F238E27FC236}">
+                <a16:creationId xmlns:a16="http://schemas.microsoft.com/office/drawing/2014/main" id="{D9251067-BA98-4D94-A805-4B4833EE19C2}"/>
+              </a:ext>
+            </a:extLst>
+          </p:cNvPr>
+          <p:cNvSpPr/>
+          <p:nvPr/>
+        </p:nvSpPr>
+        <p:spPr>
+          <a:xfrm rot="20566595">
+            <a:off x="8302301" y="4066715"/>
+            <a:ext cx="1080089" cy="296168"/>
+          </a:xfrm>
+          <a:prstGeom prst="curvedDownArrow">
+            <a:avLst/>
+          </a:prstGeom>
+        </p:spPr>
+        <p:style>
+          <a:lnRef idx="2">
+            <a:schemeClr val="accent1">
+              <a:shade val="50000"/>
+            </a:schemeClr>
+          </a:lnRef>
+          <a:fillRef idx="1">
+            <a:schemeClr val="accent1"/>
+          </a:fillRef>
+          <a:effectRef idx="0">
+            <a:schemeClr val="accent1"/>
+          </a:effectRef>
+          <a:fontRef idx="minor">
+            <a:schemeClr val="lt1"/>
+          </a:fontRef>
+        </p:style>
+        <p:txBody>
+          <a:bodyPr rtlCol="0" anchor="ctr"/>
+          <a:lstStyle/>
+          <a:p>
+            <a:pPr algn="ctr"/>
+            <a:endParaRPr lang="fr-FR">
+              <a:solidFill>
+                <a:schemeClr val="tx1"/>
+              </a:solidFill>
+            </a:endParaRPr>
+          </a:p>
+        </p:txBody>
+      </p:sp>
+      <p:sp>
+        <p:nvSpPr>
+          <p:cNvPr id="63" name="ZoneTexte 62">
+            <a:extLst>
+              <a:ext uri="{FF2B5EF4-FFF2-40B4-BE49-F238E27FC236}">
+                <a16:creationId xmlns:a16="http://schemas.microsoft.com/office/drawing/2014/main" id="{85E844C0-8530-43EB-BDD6-BC459240E832}"/>
+              </a:ext>
+            </a:extLst>
+          </p:cNvPr>
+          <p:cNvSpPr txBox="1"/>
+          <p:nvPr/>
+        </p:nvSpPr>
+        <p:spPr>
+          <a:xfrm>
+            <a:off x="7248780" y="770825"/>
+            <a:ext cx="3519361" cy="646331"/>
+          </a:xfrm>
+          <a:prstGeom prst="rect">
+            <a:avLst/>
+          </a:prstGeom>
+          <a:noFill/>
+        </p:spPr>
+        <p:txBody>
+          <a:bodyPr wrap="none" rtlCol="0">
+            <a:spAutoFit/>
+          </a:bodyPr>
+          <a:lstStyle/>
+          <a:p>
+            <a:r>
+              <a:rPr lang="fr-FR" dirty="0" err="1"/>
+              <a:t>Overwrite</a:t>
+            </a:r>
+            <a:r>
+              <a:rPr lang="fr-FR" dirty="0"/>
+              <a:t>: </a:t>
+            </a:r>
+            <a:r>
+              <a:rPr lang="fr-FR" dirty="0" err="1"/>
+              <a:t>delete</a:t>
+            </a:r>
+            <a:r>
+              <a:rPr lang="fr-FR" dirty="0"/>
+              <a:t> OLD files,</a:t>
+            </a:r>
+          </a:p>
+          <a:p>
+            <a:r>
+              <a:rPr lang="fr-FR" dirty="0"/>
+              <a:t>Rename _</a:t>
+            </a:r>
+            <a:r>
+              <a:rPr lang="fr-FR" dirty="0" err="1"/>
+              <a:t>temporary</a:t>
+            </a:r>
+            <a:r>
+              <a:rPr lang="fr-FR" dirty="0"/>
+              <a:t>/* to NEW files</a:t>
+            </a:r>
+          </a:p>
+        </p:txBody>
+      </p:sp>
+      <p:sp>
+        <p:nvSpPr>
+          <p:cNvPr id="64" name="Rectangle : coins arrondis 63">
+            <a:extLst>
+              <a:ext uri="{FF2B5EF4-FFF2-40B4-BE49-F238E27FC236}">
+                <a16:creationId xmlns:a16="http://schemas.microsoft.com/office/drawing/2014/main" id="{7C6E1148-557C-49DE-AF93-D40663212CC6}"/>
+              </a:ext>
+            </a:extLst>
+          </p:cNvPr>
+          <p:cNvSpPr/>
+          <p:nvPr/>
+        </p:nvSpPr>
+        <p:spPr>
+          <a:xfrm>
+            <a:off x="9787782" y="5435223"/>
+            <a:ext cx="1880848" cy="1082352"/>
+          </a:xfrm>
+          <a:prstGeom prst="roundRect">
+            <a:avLst/>
+          </a:prstGeom>
+          <a:noFill/>
+        </p:spPr>
+        <p:style>
+          <a:lnRef idx="2">
+            <a:schemeClr val="accent1">
+              <a:shade val="50000"/>
+            </a:schemeClr>
+          </a:lnRef>
+          <a:fillRef idx="1">
+            <a:schemeClr val="accent1"/>
+          </a:fillRef>
+          <a:effectRef idx="0">
+            <a:schemeClr val="accent1"/>
+          </a:effectRef>
+          <a:fontRef idx="minor">
+            <a:schemeClr val="lt1"/>
+          </a:fontRef>
+        </p:style>
+        <p:txBody>
+          <a:bodyPr rtlCol="0" anchor="ctr"/>
+          <a:lstStyle/>
+          <a:p>
+            <a:pPr algn="ctr"/>
+            <a:endParaRPr lang="fr-FR"/>
+          </a:p>
+        </p:txBody>
+      </p:sp>
+      <p:sp>
+        <p:nvSpPr>
+          <p:cNvPr id="65" name="ZoneTexte 64">
+            <a:extLst>
+              <a:ext uri="{FF2B5EF4-FFF2-40B4-BE49-F238E27FC236}">
+                <a16:creationId xmlns:a16="http://schemas.microsoft.com/office/drawing/2014/main" id="{54FAD421-3786-43CF-B8C6-169BB20C0EF0}"/>
+              </a:ext>
+            </a:extLst>
+          </p:cNvPr>
+          <p:cNvSpPr txBox="1"/>
+          <p:nvPr/>
+        </p:nvSpPr>
+        <p:spPr>
+          <a:xfrm>
+            <a:off x="9638444" y="5115108"/>
+            <a:ext cx="1800493" cy="369332"/>
+          </a:xfrm>
+          <a:prstGeom prst="rect">
+            <a:avLst/>
+          </a:prstGeom>
+          <a:noFill/>
+        </p:spPr>
+        <p:txBody>
+          <a:bodyPr wrap="none" rtlCol="0">
+            <a:spAutoFit/>
+          </a:bodyPr>
+          <a:lstStyle/>
+          <a:p>
+            <a:r>
+              <a:rPr lang="fr-FR" dirty="0"/>
+              <a:t>/</a:t>
+            </a:r>
+            <a:r>
+              <a:rPr lang="fr-FR" dirty="0" err="1"/>
+              <a:t>dir_partition</a:t>
+            </a:r>
+            <a:r>
+              <a:rPr lang="fr-FR" dirty="0"/>
+              <a:t>=YY</a:t>
+            </a:r>
+          </a:p>
+        </p:txBody>
+      </p:sp>
+      <p:sp>
+        <p:nvSpPr>
+          <p:cNvPr id="66" name="Rectangle : carré corné 65">
+            <a:extLst>
+              <a:ext uri="{FF2B5EF4-FFF2-40B4-BE49-F238E27FC236}">
+                <a16:creationId xmlns:a16="http://schemas.microsoft.com/office/drawing/2014/main" id="{18AF939E-2F8A-4BEF-9318-593E73DB645F}"/>
+              </a:ext>
+            </a:extLst>
+          </p:cNvPr>
+          <p:cNvSpPr/>
+          <p:nvPr/>
+        </p:nvSpPr>
+        <p:spPr>
+          <a:xfrm>
+            <a:off x="10073531" y="5621177"/>
+            <a:ext cx="1190625" cy="462527"/>
+          </a:xfrm>
+          <a:prstGeom prst="foldedCorner">
+            <a:avLst/>
+          </a:prstGeom>
+          <a:noFill/>
+        </p:spPr>
+        <p:style>
+          <a:lnRef idx="2">
+            <a:schemeClr val="accent1">
+              <a:shade val="50000"/>
+            </a:schemeClr>
+          </a:lnRef>
+          <a:fillRef idx="1">
+            <a:schemeClr val="accent1"/>
+          </a:fillRef>
+          <a:effectRef idx="0">
+            <a:schemeClr val="accent1"/>
+          </a:effectRef>
+          <a:fontRef idx="minor">
+            <a:schemeClr val="lt1"/>
+          </a:fontRef>
+        </p:style>
+        <p:txBody>
+          <a:bodyPr rtlCol="0" anchor="ctr"/>
+          <a:lstStyle/>
+          <a:p>
+            <a:pPr algn="ctr"/>
+            <a:endParaRPr lang="fr-FR" dirty="0"/>
+          </a:p>
+        </p:txBody>
+      </p:sp>
+      <p:sp>
+        <p:nvSpPr>
+          <p:cNvPr id="69" name="Flèche : droite 68">
+            <a:extLst>
+              <a:ext uri="{FF2B5EF4-FFF2-40B4-BE49-F238E27FC236}">
+                <a16:creationId xmlns:a16="http://schemas.microsoft.com/office/drawing/2014/main" id="{BB38C1AA-D13F-41CC-A9C7-2A69F01308F5}"/>
+              </a:ext>
+            </a:extLst>
+          </p:cNvPr>
+          <p:cNvSpPr/>
+          <p:nvPr/>
+        </p:nvSpPr>
+        <p:spPr>
+          <a:xfrm>
+            <a:off x="6346525" y="2744561"/>
+            <a:ext cx="557664" cy="404993"/>
+          </a:xfrm>
+          <a:prstGeom prst="rightArrow">
+            <a:avLst/>
+          </a:prstGeom>
+        </p:spPr>
+        <p:style>
+          <a:lnRef idx="2">
+            <a:schemeClr val="accent1">
+              <a:shade val="50000"/>
+            </a:schemeClr>
+          </a:lnRef>
+          <a:fillRef idx="1">
+            <a:schemeClr val="accent1"/>
+          </a:fillRef>
+          <a:effectRef idx="0">
+            <a:schemeClr val="accent1"/>
+          </a:effectRef>
+          <a:fontRef idx="minor">
+            <a:schemeClr val="lt1"/>
+          </a:fontRef>
+        </p:style>
+        <p:txBody>
+          <a:bodyPr rtlCol="0" anchor="ctr"/>
+          <a:lstStyle/>
+          <a:p>
+            <a:pPr algn="ctr"/>
+            <a:endParaRPr lang="fr-FR"/>
+          </a:p>
+        </p:txBody>
+      </p:sp>
+      <p:sp>
+        <p:nvSpPr>
+          <p:cNvPr id="70" name="Flèche : droite 69">
+            <a:extLst>
+              <a:ext uri="{FF2B5EF4-FFF2-40B4-BE49-F238E27FC236}">
+                <a16:creationId xmlns:a16="http://schemas.microsoft.com/office/drawing/2014/main" id="{B6570875-5CB6-4904-92F4-546C00D05A6E}"/>
+              </a:ext>
+            </a:extLst>
+          </p:cNvPr>
+          <p:cNvSpPr/>
+          <p:nvPr/>
+        </p:nvSpPr>
+        <p:spPr>
+          <a:xfrm>
+            <a:off x="6353335" y="3582718"/>
+            <a:ext cx="557664" cy="404993"/>
+          </a:xfrm>
+          <a:prstGeom prst="rightArrow">
+            <a:avLst/>
+          </a:prstGeom>
+        </p:spPr>
+        <p:style>
+          <a:lnRef idx="2">
+            <a:schemeClr val="accent1">
+              <a:shade val="50000"/>
+            </a:schemeClr>
+          </a:lnRef>
+          <a:fillRef idx="1">
+            <a:schemeClr val="accent1"/>
+          </a:fillRef>
+          <a:effectRef idx="0">
+            <a:schemeClr val="accent1"/>
+          </a:effectRef>
+          <a:fontRef idx="minor">
+            <a:schemeClr val="lt1"/>
+          </a:fontRef>
+        </p:style>
+        <p:txBody>
+          <a:bodyPr rtlCol="0" anchor="ctr"/>
+          <a:lstStyle/>
+          <a:p>
+            <a:pPr algn="ctr"/>
+            <a:endParaRPr lang="fr-FR"/>
+          </a:p>
+        </p:txBody>
+      </p:sp>
+      <p:sp>
+        <p:nvSpPr>
+          <p:cNvPr id="71" name="Flèche : droite 70">
+            <a:extLst>
+              <a:ext uri="{FF2B5EF4-FFF2-40B4-BE49-F238E27FC236}">
+                <a16:creationId xmlns:a16="http://schemas.microsoft.com/office/drawing/2014/main" id="{FCA2794B-91FF-4131-B2DA-28C90576DDF8}"/>
+              </a:ext>
+            </a:extLst>
+          </p:cNvPr>
+          <p:cNvSpPr/>
+          <p:nvPr/>
+        </p:nvSpPr>
+        <p:spPr>
+          <a:xfrm>
+            <a:off x="6353335" y="4214799"/>
+            <a:ext cx="557664" cy="404993"/>
+          </a:xfrm>
+          <a:prstGeom prst="rightArrow">
+            <a:avLst/>
+          </a:prstGeom>
+        </p:spPr>
+        <p:style>
+          <a:lnRef idx="2">
+            <a:schemeClr val="accent1">
+              <a:shade val="50000"/>
+            </a:schemeClr>
+          </a:lnRef>
+          <a:fillRef idx="1">
+            <a:schemeClr val="accent1"/>
+          </a:fillRef>
+          <a:effectRef idx="0">
+            <a:schemeClr val="accent1"/>
+          </a:effectRef>
+          <a:fontRef idx="minor">
+            <a:schemeClr val="lt1"/>
+          </a:fontRef>
+        </p:style>
+        <p:txBody>
+          <a:bodyPr rtlCol="0" anchor="ctr"/>
+          <a:lstStyle/>
+          <a:p>
+            <a:pPr algn="ctr"/>
+            <a:endParaRPr lang="fr-FR"/>
+          </a:p>
+        </p:txBody>
+      </p:sp>
+      <p:sp>
+        <p:nvSpPr>
+          <p:cNvPr id="72" name="ZoneTexte 71">
+            <a:extLst>
+              <a:ext uri="{FF2B5EF4-FFF2-40B4-BE49-F238E27FC236}">
+                <a16:creationId xmlns:a16="http://schemas.microsoft.com/office/drawing/2014/main" id="{D0BC6C33-B457-47AD-ABE5-DC2C94D1303B}"/>
+              </a:ext>
+            </a:extLst>
+          </p:cNvPr>
+          <p:cNvSpPr txBox="1"/>
+          <p:nvPr/>
+        </p:nvSpPr>
+        <p:spPr>
+          <a:xfrm>
+            <a:off x="385775" y="2214733"/>
+            <a:ext cx="2030171" cy="369332"/>
+          </a:xfrm>
+          <a:prstGeom prst="rect">
+            <a:avLst/>
+          </a:prstGeom>
+          <a:noFill/>
+        </p:spPr>
+        <p:txBody>
+          <a:bodyPr wrap="none" rtlCol="0">
+            <a:spAutoFit/>
+          </a:bodyPr>
+          <a:lstStyle/>
+          <a:p>
+            <a:r>
+              <a:rPr lang="fr-FR" dirty="0"/>
+              <a:t>Object to </a:t>
+            </a:r>
+            <a:r>
+              <a:rPr lang="fr-FR" dirty="0" err="1"/>
+              <a:t>transform</a:t>
+            </a:r>
+            <a:endParaRPr lang="fr-FR" dirty="0"/>
+          </a:p>
+        </p:txBody>
+      </p:sp>
+      <p:sp>
+        <p:nvSpPr>
+          <p:cNvPr id="73" name="ZoneTexte 72">
+            <a:extLst>
+              <a:ext uri="{FF2B5EF4-FFF2-40B4-BE49-F238E27FC236}">
+                <a16:creationId xmlns:a16="http://schemas.microsoft.com/office/drawing/2014/main" id="{42BA3FEF-88D5-4395-B774-AE5780ECC9E8}"/>
+              </a:ext>
+            </a:extLst>
+          </p:cNvPr>
+          <p:cNvSpPr txBox="1"/>
+          <p:nvPr/>
+        </p:nvSpPr>
+        <p:spPr>
+          <a:xfrm>
+            <a:off x="6577024" y="5187994"/>
+            <a:ext cx="2894447" cy="646331"/>
+          </a:xfrm>
+          <a:prstGeom prst="rect">
+            <a:avLst/>
+          </a:prstGeom>
+          <a:noFill/>
+        </p:spPr>
+        <p:txBody>
+          <a:bodyPr wrap="none" rtlCol="0">
+            <a:spAutoFit/>
+          </a:bodyPr>
+          <a:lstStyle/>
+          <a:p>
+            <a:r>
+              <a:rPr lang="fr-FR" dirty="0" err="1"/>
+              <a:t>Fully</a:t>
+            </a:r>
+            <a:r>
+              <a:rPr lang="fr-FR" dirty="0"/>
+              <a:t> </a:t>
+            </a:r>
+            <a:r>
+              <a:rPr lang="fr-FR" dirty="0" err="1"/>
+              <a:t>transformed</a:t>
+            </a:r>
+            <a:r>
+              <a:rPr lang="fr-FR" dirty="0"/>
+              <a:t> </a:t>
+            </a:r>
+            <a:br>
+              <a:rPr lang="fr-FR" dirty="0"/>
+            </a:br>
+            <a:r>
+              <a:rPr lang="fr-FR" dirty="0" err="1"/>
+              <a:t>partitioned</a:t>
+            </a:r>
+            <a:r>
+              <a:rPr lang="fr-FR" dirty="0"/>
+              <a:t> Data + re-</a:t>
+            </a:r>
+            <a:r>
+              <a:rPr lang="fr-FR" dirty="0" err="1"/>
+              <a:t>written</a:t>
+            </a:r>
+            <a:endParaRPr lang="fr-FR" dirty="0"/>
+          </a:p>
+        </p:txBody>
+      </p:sp>
+    </p:spTree>
+    <p:extLst>
+      <p:ext uri="{BB962C8B-B14F-4D97-AF65-F5344CB8AC3E}">
+        <p14:creationId xmlns:p14="http://schemas.microsoft.com/office/powerpoint/2010/main" val="3045294231"/>
+      </p:ext>
+    </p:extLst>
+  </p:cSld>
+  <p:clrMapOvr>
+    <a:masterClrMapping/>
+  </p:clrMapOvr>
+</p:sld>
+</file>
+
+<file path=ppt/slides/slide25.xml><?xml version="1.0" encoding="utf-8"?>
+<p:sld xmlns:a="http://schemas.openxmlformats.org/drawingml/2006/main" xmlns:r="http://schemas.openxmlformats.org/officeDocument/2006/relationships" xmlns:p="http://schemas.openxmlformats.org/presentationml/2006/main">
+  <p:cSld>
+    <p:spTree>
+      <p:nvGrpSpPr>
+        <p:cNvPr id="1" name=""/>
+        <p:cNvGrpSpPr/>
+        <p:nvPr/>
+      </p:nvGrpSpPr>
+      <p:grpSpPr>
+        <a:xfrm>
+          <a:off x="0" y="0"/>
+          <a:ext cx="0" cy="0"/>
+          <a:chOff x="0" y="0"/>
+          <a:chExt cx="0" cy="0"/>
+        </a:xfrm>
+      </p:grpSpPr>
+      <p:sp>
+        <p:nvSpPr>
+          <p:cNvPr id="2" name="Titre 1">
+            <a:extLst>
+              <a:ext uri="{FF2B5EF4-FFF2-40B4-BE49-F238E27FC236}">
+                <a16:creationId xmlns:a16="http://schemas.microsoft.com/office/drawing/2014/main" id="{AE107538-F799-478E-BB99-71B03EC31850}"/>
+              </a:ext>
+            </a:extLst>
+          </p:cNvPr>
+          <p:cNvSpPr>
+            <a:spLocks noGrp="1"/>
+          </p:cNvSpPr>
+          <p:nvPr>
+            <p:ph type="title"/>
+          </p:nvPr>
+        </p:nvSpPr>
+        <p:spPr>
+          <a:xfrm>
+            <a:off x="838199" y="0"/>
+            <a:ext cx="11199125" cy="866634"/>
+          </a:xfrm>
+        </p:spPr>
+        <p:txBody>
+          <a:bodyPr>
+            <a:normAutofit fontScale="90000"/>
+          </a:bodyPr>
+          <a:lstStyle/>
+          <a:p>
+            <a:r>
+              <a:rPr lang="fr-FR" dirty="0"/>
+              <a:t>Iceberg </a:t>
+            </a:r>
+            <a:r>
+              <a:rPr lang="fr-FR" dirty="0" err="1"/>
+              <a:t>Strategy</a:t>
+            </a:r>
+            <a:r>
+              <a:rPr lang="fr-FR" dirty="0"/>
+              <a:t> for Updates … like Git commit-blobs</a:t>
+            </a:r>
+          </a:p>
+        </p:txBody>
+      </p:sp>
+      <p:pic>
+        <p:nvPicPr>
+          <p:cNvPr id="5" name="Image 4">
+            <a:extLst>
+              <a:ext uri="{FF2B5EF4-FFF2-40B4-BE49-F238E27FC236}">
+                <a16:creationId xmlns:a16="http://schemas.microsoft.com/office/drawing/2014/main" id="{57DC8D84-ED47-46E9-BEA0-3E3AB9D6DACD}"/>
+              </a:ext>
+            </a:extLst>
+          </p:cNvPr>
+          <p:cNvPicPr>
+            <a:picLocks noChangeAspect="1"/>
+          </p:cNvPicPr>
+          <p:nvPr/>
+        </p:nvPicPr>
+        <p:blipFill>
+          <a:blip r:embed="rId2"/>
+          <a:stretch>
+            <a:fillRect/>
+          </a:stretch>
+        </p:blipFill>
+        <p:spPr>
+          <a:xfrm>
+            <a:off x="3141688" y="723152"/>
+            <a:ext cx="5661117" cy="6011806"/>
+          </a:xfrm>
+          <a:prstGeom prst="rect">
+            <a:avLst/>
+          </a:prstGeom>
+        </p:spPr>
+      </p:pic>
+      <p:sp>
+        <p:nvSpPr>
+          <p:cNvPr id="7" name="ZoneTexte 6">
+            <a:extLst>
+              <a:ext uri="{FF2B5EF4-FFF2-40B4-BE49-F238E27FC236}">
+                <a16:creationId xmlns:a16="http://schemas.microsoft.com/office/drawing/2014/main" id="{B845C31B-A3D3-4208-913E-9E819F0645B1}"/>
+              </a:ext>
+            </a:extLst>
+          </p:cNvPr>
+          <p:cNvSpPr txBox="1"/>
+          <p:nvPr/>
+        </p:nvSpPr>
+        <p:spPr>
+          <a:xfrm>
+            <a:off x="162067" y="917390"/>
+            <a:ext cx="6097136" cy="369332"/>
+          </a:xfrm>
+          <a:prstGeom prst="rect">
+            <a:avLst/>
+          </a:prstGeom>
+          <a:noFill/>
+        </p:spPr>
+        <p:txBody>
+          <a:bodyPr wrap="square">
+            <a:spAutoFit/>
+          </a:bodyPr>
+          <a:lstStyle/>
+          <a:p>
+            <a:r>
+              <a:rPr lang="fr-FR" dirty="0">
+                <a:hlinkClick r:id="rId3"/>
+              </a:rPr>
+              <a:t>https://iceberg.apache.org/spec/#goals</a:t>
+            </a:r>
+            <a:r>
+              <a:rPr lang="fr-FR" dirty="0"/>
+              <a:t> </a:t>
+            </a:r>
+          </a:p>
+        </p:txBody>
+      </p:sp>
+    </p:spTree>
+    <p:extLst>
+      <p:ext uri="{BB962C8B-B14F-4D97-AF65-F5344CB8AC3E}">
+        <p14:creationId xmlns:p14="http://schemas.microsoft.com/office/powerpoint/2010/main" val="2867874686"/>
+      </p:ext>
+    </p:extLst>
+  </p:cSld>
+  <p:clrMapOvr>
+    <a:masterClrMapping/>
+  </p:clrMapOvr>
+</p:sld>
+</file>
+
+<file path=ppt/slides/slide26.xml><?xml version="1.0" encoding="utf-8"?>
+<p:sld xmlns:a="http://schemas.openxmlformats.org/drawingml/2006/main" xmlns:r="http://schemas.openxmlformats.org/officeDocument/2006/relationships" xmlns:p="http://schemas.openxmlformats.org/presentationml/2006/main">
+  <p:cSld>
+    <p:spTree>
+      <p:nvGrpSpPr>
+        <p:cNvPr id="1" name=""/>
+        <p:cNvGrpSpPr/>
+        <p:nvPr/>
+      </p:nvGrpSpPr>
+      <p:grpSpPr>
+        <a:xfrm>
+          <a:off x="0" y="0"/>
+          <a:ext cx="0" cy="0"/>
+          <a:chOff x="0" y="0"/>
+          <a:chExt cx="0" cy="0"/>
+        </a:xfrm>
+      </p:grpSpPr>
+      <p:sp>
+        <p:nvSpPr>
+          <p:cNvPr id="2" name="Titre 1">
+            <a:extLst>
+              <a:ext uri="{FF2B5EF4-FFF2-40B4-BE49-F238E27FC236}">
+                <a16:creationId xmlns:a16="http://schemas.microsoft.com/office/drawing/2014/main" id="{CDE59B0E-A064-45CE-A53D-8B85EC2C43CD}"/>
+              </a:ext>
+            </a:extLst>
+          </p:cNvPr>
+          <p:cNvSpPr>
+            <a:spLocks noGrp="1"/>
+          </p:cNvSpPr>
+          <p:nvPr>
+            <p:ph type="title"/>
+          </p:nvPr>
+        </p:nvSpPr>
+        <p:spPr>
+          <a:xfrm>
+            <a:off x="838200" y="365125"/>
+            <a:ext cx="11165006" cy="1325563"/>
+          </a:xfrm>
+        </p:spPr>
+        <p:txBody>
+          <a:bodyPr/>
+          <a:lstStyle/>
+          <a:p>
+            <a:r>
+              <a:rPr lang="fr-FR" dirty="0"/>
+              <a:t>Iceberg =&gt;  </a:t>
+            </a:r>
+            <a:r>
+              <a:rPr lang="fr-FR" dirty="0" err="1"/>
+              <a:t>Allow</a:t>
+            </a:r>
+            <a:r>
+              <a:rPr lang="fr-FR" dirty="0"/>
+              <a:t> Read Isolation / </a:t>
+            </a:r>
+            <a:r>
+              <a:rPr lang="fr-FR" dirty="0" err="1"/>
+              <a:t>Consistency</a:t>
+            </a:r>
+            <a:r>
+              <a:rPr lang="fr-FR" dirty="0"/>
+              <a:t> !!</a:t>
+            </a:r>
+          </a:p>
+        </p:txBody>
+      </p:sp>
+      <p:sp>
+        <p:nvSpPr>
+          <p:cNvPr id="4" name="ZoneTexte 3">
+            <a:extLst>
+              <a:ext uri="{FF2B5EF4-FFF2-40B4-BE49-F238E27FC236}">
+                <a16:creationId xmlns:a16="http://schemas.microsoft.com/office/drawing/2014/main" id="{E673AFD1-ACA3-48AB-9D9F-1A6E095BDBFB}"/>
+              </a:ext>
+            </a:extLst>
+          </p:cNvPr>
+          <p:cNvSpPr txBox="1"/>
+          <p:nvPr/>
+        </p:nvSpPr>
+        <p:spPr>
+          <a:xfrm>
+            <a:off x="2613548" y="3220872"/>
+            <a:ext cx="7067063" cy="830997"/>
+          </a:xfrm>
+          <a:prstGeom prst="rect">
+            <a:avLst/>
+          </a:prstGeom>
+          <a:noFill/>
+        </p:spPr>
+        <p:txBody>
+          <a:bodyPr wrap="none" rtlCol="0">
+            <a:spAutoFit/>
+          </a:bodyPr>
+          <a:lstStyle/>
+          <a:p>
+            <a:r>
+              <a:rPr lang="fr-FR" sz="2400" dirty="0"/>
+              <a:t>Solve the </a:t>
+            </a:r>
+            <a:r>
+              <a:rPr lang="fr-FR" sz="2400" dirty="0" err="1"/>
+              <a:t>problems</a:t>
+            </a:r>
+            <a:r>
+              <a:rPr lang="fr-FR" sz="2400" dirty="0"/>
+              <a:t> of concurrent </a:t>
+            </a:r>
+            <a:r>
+              <a:rPr lang="fr-FR" sz="2400" dirty="0" err="1"/>
+              <a:t>read</a:t>
+            </a:r>
+            <a:r>
+              <a:rPr lang="fr-FR" sz="2400" dirty="0"/>
+              <a:t>/</a:t>
+            </a:r>
+            <a:r>
+              <a:rPr lang="fr-FR" sz="2400" dirty="0" err="1"/>
+              <a:t>write</a:t>
+            </a:r>
+            <a:r>
+              <a:rPr lang="fr-FR" sz="2400" dirty="0"/>
+              <a:t> </a:t>
+            </a:r>
+            <a:r>
+              <a:rPr lang="fr-FR" sz="2400" dirty="0" err="1"/>
+              <a:t>problems</a:t>
+            </a:r>
+            <a:r>
+              <a:rPr lang="fr-FR" sz="2400" dirty="0"/>
+              <a:t> </a:t>
+            </a:r>
+          </a:p>
+          <a:p>
+            <a:r>
+              <a:rPr lang="fr-FR" sz="2400" dirty="0" err="1"/>
+              <a:t>occurring</a:t>
+            </a:r>
+            <a:r>
+              <a:rPr lang="fr-FR" sz="2400" dirty="0"/>
+              <a:t> </a:t>
+            </a:r>
+            <a:r>
+              <a:rPr lang="fr-FR" sz="2400" dirty="0" err="1"/>
+              <a:t>with</a:t>
+            </a:r>
+            <a:r>
+              <a:rPr lang="fr-FR" sz="2400" dirty="0"/>
+              <a:t> </a:t>
+            </a:r>
+            <a:r>
+              <a:rPr lang="fr-FR" sz="2400" dirty="0" err="1"/>
+              <a:t>Hive</a:t>
+            </a:r>
+            <a:r>
+              <a:rPr lang="fr-FR" sz="2400" dirty="0"/>
+              <a:t> (</a:t>
+            </a:r>
+            <a:r>
+              <a:rPr lang="fr-FR" sz="2400" dirty="0" err="1"/>
+              <a:t>Partitioned</a:t>
+            </a:r>
+            <a:r>
+              <a:rPr lang="fr-FR" sz="2400" dirty="0"/>
+              <a:t>) Tables</a:t>
+            </a:r>
+          </a:p>
+        </p:txBody>
+      </p:sp>
+    </p:spTree>
+    <p:extLst>
+      <p:ext uri="{BB962C8B-B14F-4D97-AF65-F5344CB8AC3E}">
+        <p14:creationId xmlns:p14="http://schemas.microsoft.com/office/powerpoint/2010/main" val="2600802435"/>
+      </p:ext>
+    </p:extLst>
+  </p:cSld>
+  <p:clrMapOvr>
+    <a:masterClrMapping/>
+  </p:clrMapOvr>
+</p:sld>
+</file>
+
+<file path=ppt/slides/slide27.xml><?xml version="1.0" encoding="utf-8"?>
+<p:sld xmlns:a="http://schemas.openxmlformats.org/drawingml/2006/main" xmlns:r="http://schemas.openxmlformats.org/officeDocument/2006/relationships" xmlns:p="http://schemas.openxmlformats.org/presentationml/2006/main">
+  <p:cSld>
+    <p:spTree>
+      <p:nvGrpSpPr>
+        <p:cNvPr id="1" name=""/>
+        <p:cNvGrpSpPr/>
+        <p:nvPr/>
+      </p:nvGrpSpPr>
+      <p:grpSpPr>
+        <a:xfrm>
+          <a:off x="0" y="0"/>
+          <a:ext cx="0" cy="0"/>
+          <a:chOff x="0" y="0"/>
+          <a:chExt cx="0" cy="0"/>
+        </a:xfrm>
+      </p:grpSpPr>
+      <p:sp>
+        <p:nvSpPr>
+          <p:cNvPr id="2" name="Titre 1">
+            <a:extLst>
+              <a:ext uri="{FF2B5EF4-FFF2-40B4-BE49-F238E27FC236}">
+                <a16:creationId xmlns:a16="http://schemas.microsoft.com/office/drawing/2014/main" id="{C829EA27-92EF-4F3B-BCD7-CB0EEE07E156}"/>
+              </a:ext>
+            </a:extLst>
+          </p:cNvPr>
+          <p:cNvSpPr>
+            <a:spLocks noGrp="1"/>
+          </p:cNvSpPr>
+          <p:nvPr>
+            <p:ph type="title"/>
+          </p:nvPr>
+        </p:nvSpPr>
+        <p:spPr/>
+        <p:txBody>
+          <a:bodyPr/>
+          <a:lstStyle/>
+          <a:p>
+            <a:r>
+              <a:rPr lang="fr-FR" dirty="0"/>
+              <a:t>Iceberg Bonus: Time </a:t>
+            </a:r>
+            <a:r>
+              <a:rPr lang="fr-FR" dirty="0" err="1"/>
+              <a:t>Travel</a:t>
+            </a:r>
+            <a:r>
+              <a:rPr lang="fr-FR" dirty="0"/>
+              <a:t> </a:t>
+            </a:r>
+            <a:r>
+              <a:rPr lang="fr-FR" dirty="0" err="1"/>
+              <a:t>Queries</a:t>
+            </a:r>
+            <a:r>
+              <a:rPr lang="fr-FR" dirty="0"/>
+              <a:t>, Branch, ..</a:t>
+            </a:r>
+          </a:p>
+        </p:txBody>
+      </p:sp>
+      <p:sp>
+        <p:nvSpPr>
+          <p:cNvPr id="4" name="ZoneTexte 3">
+            <a:extLst>
+              <a:ext uri="{FF2B5EF4-FFF2-40B4-BE49-F238E27FC236}">
+                <a16:creationId xmlns:a16="http://schemas.microsoft.com/office/drawing/2014/main" id="{76296474-0620-4A70-90CA-B502A60CFE41}"/>
+              </a:ext>
+            </a:extLst>
+          </p:cNvPr>
+          <p:cNvSpPr txBox="1"/>
+          <p:nvPr/>
+        </p:nvSpPr>
+        <p:spPr>
+          <a:xfrm>
+            <a:off x="3500651" y="3357349"/>
+            <a:ext cx="4943597" cy="1200329"/>
+          </a:xfrm>
+          <a:prstGeom prst="rect">
+            <a:avLst/>
+          </a:prstGeom>
+          <a:noFill/>
+        </p:spPr>
+        <p:txBody>
+          <a:bodyPr wrap="none" rtlCol="0">
+            <a:spAutoFit/>
+          </a:bodyPr>
+          <a:lstStyle/>
+          <a:p>
+            <a:r>
+              <a:rPr lang="fr-FR" sz="2400" dirty="0" err="1"/>
+              <a:t>Same</a:t>
+            </a:r>
+            <a:r>
+              <a:rPr lang="fr-FR" sz="2400" dirty="0"/>
+              <a:t> as in Oracle  « SELECT AS OF … »</a:t>
+            </a:r>
+          </a:p>
+          <a:p>
+            <a:endParaRPr lang="fr-FR" sz="2400" dirty="0"/>
+          </a:p>
+          <a:p>
+            <a:r>
+              <a:rPr lang="fr-FR" sz="2400" dirty="0" err="1"/>
+              <a:t>Same</a:t>
+            </a:r>
+            <a:r>
+              <a:rPr lang="fr-FR" sz="2400" dirty="0"/>
+              <a:t> as in Git</a:t>
+            </a:r>
+          </a:p>
+        </p:txBody>
+      </p:sp>
+    </p:spTree>
+    <p:extLst>
+      <p:ext uri="{BB962C8B-B14F-4D97-AF65-F5344CB8AC3E}">
+        <p14:creationId xmlns:p14="http://schemas.microsoft.com/office/powerpoint/2010/main" val="649468626"/>
+      </p:ext>
+    </p:extLst>
+  </p:cSld>
+  <p:clrMapOvr>
+    <a:masterClrMapping/>
+  </p:clrMapOvr>
+</p:sld>
+</file>
+
+<file path=ppt/slides/slide28.xml><?xml version="1.0" encoding="utf-8"?>
+<p:sld xmlns:a="http://schemas.openxmlformats.org/drawingml/2006/main" xmlns:r="http://schemas.openxmlformats.org/officeDocument/2006/relationships" xmlns:p="http://schemas.openxmlformats.org/presentationml/2006/main">
+  <p:cSld>
+    <p:spTree>
+      <p:nvGrpSpPr>
+        <p:cNvPr id="1" name=""/>
+        <p:cNvGrpSpPr/>
+        <p:nvPr/>
+      </p:nvGrpSpPr>
+      <p:grpSpPr>
+        <a:xfrm>
+          <a:off x="0" y="0"/>
+          <a:ext cx="0" cy="0"/>
+          <a:chOff x="0" y="0"/>
+          <a:chExt cx="0" cy="0"/>
+        </a:xfrm>
+      </p:grpSpPr>
+      <p:sp>
+        <p:nvSpPr>
+          <p:cNvPr id="2" name="Titre 1">
+            <a:extLst>
+              <a:ext uri="{FF2B5EF4-FFF2-40B4-BE49-F238E27FC236}">
+                <a16:creationId xmlns:a16="http://schemas.microsoft.com/office/drawing/2014/main" id="{5FFA8662-1F58-4C67-813F-FF83E706F68F}"/>
+              </a:ext>
+            </a:extLst>
+          </p:cNvPr>
+          <p:cNvSpPr>
+            <a:spLocks noGrp="1"/>
+          </p:cNvSpPr>
+          <p:nvPr>
+            <p:ph type="title"/>
+          </p:nvPr>
+        </p:nvSpPr>
+        <p:spPr/>
+        <p:txBody>
+          <a:bodyPr/>
+          <a:lstStyle/>
+          <a:p>
+            <a:r>
+              <a:rPr lang="fr-FR" dirty="0"/>
+              <a:t>Iceberg Performance </a:t>
+            </a:r>
+            <a:r>
+              <a:rPr lang="fr-FR" dirty="0" err="1"/>
+              <a:t>Problems</a:t>
+            </a:r>
+            <a:endParaRPr lang="fr-FR" dirty="0"/>
+          </a:p>
+        </p:txBody>
+      </p:sp>
+      <p:sp>
+        <p:nvSpPr>
+          <p:cNvPr id="4" name="ZoneTexte 3">
+            <a:extLst>
+              <a:ext uri="{FF2B5EF4-FFF2-40B4-BE49-F238E27FC236}">
+                <a16:creationId xmlns:a16="http://schemas.microsoft.com/office/drawing/2014/main" id="{06BB985A-5F48-4A9A-986F-0E4D402C4A0B}"/>
+              </a:ext>
+            </a:extLst>
+          </p:cNvPr>
+          <p:cNvSpPr txBox="1"/>
+          <p:nvPr/>
+        </p:nvSpPr>
+        <p:spPr>
+          <a:xfrm>
+            <a:off x="1326344" y="2384946"/>
+            <a:ext cx="10160602" cy="3170099"/>
+          </a:xfrm>
+          <a:prstGeom prst="rect">
+            <a:avLst/>
+          </a:prstGeom>
+          <a:noFill/>
+        </p:spPr>
+        <p:txBody>
+          <a:bodyPr wrap="none" rtlCol="0">
+            <a:spAutoFit/>
+          </a:bodyPr>
+          <a:lstStyle/>
+          <a:p>
+            <a:r>
+              <a:rPr lang="fr-FR" sz="2000" dirty="0" err="1"/>
+              <a:t>When</a:t>
+            </a:r>
+            <a:r>
+              <a:rPr lang="fr-FR" sz="2000" dirty="0"/>
+              <a:t> </a:t>
+            </a:r>
+            <a:r>
+              <a:rPr lang="fr-FR" sz="2000" dirty="0" err="1"/>
+              <a:t>Updating</a:t>
+            </a:r>
+            <a:r>
+              <a:rPr lang="fr-FR" sz="2000" dirty="0"/>
+              <a:t> Row(s) =&gt;  </a:t>
+            </a:r>
+          </a:p>
+          <a:p>
+            <a:endParaRPr lang="fr-FR" sz="2000" dirty="0"/>
+          </a:p>
+          <a:p>
+            <a:r>
+              <a:rPr lang="fr-FR" sz="2000" dirty="0" err="1"/>
+              <a:t>need</a:t>
+            </a:r>
+            <a:r>
+              <a:rPr lang="fr-FR" sz="2000" dirty="0"/>
+              <a:t> to </a:t>
+            </a:r>
+            <a:r>
+              <a:rPr lang="fr-FR" sz="2000" dirty="0" err="1"/>
+              <a:t>Fully</a:t>
+            </a:r>
+            <a:r>
+              <a:rPr lang="fr-FR" sz="2000" dirty="0"/>
+              <a:t> Duplicate the File  (Copy on Write)</a:t>
+            </a:r>
+            <a:br>
+              <a:rPr lang="fr-FR" sz="2000" dirty="0"/>
+            </a:br>
+            <a:r>
+              <a:rPr lang="fr-FR" sz="2000" dirty="0"/>
+              <a:t>OR </a:t>
+            </a:r>
+          </a:p>
+          <a:p>
+            <a:r>
+              <a:rPr lang="fr-FR" sz="2000" dirty="0" err="1"/>
+              <a:t>add</a:t>
+            </a:r>
+            <a:r>
+              <a:rPr lang="fr-FR" sz="2000" dirty="0"/>
+              <a:t> a new File </a:t>
+            </a:r>
+            <a:r>
+              <a:rPr lang="fr-FR" sz="2000" dirty="0" err="1"/>
+              <a:t>containing</a:t>
+            </a:r>
+            <a:r>
+              <a:rPr lang="fr-FR" sz="2000" dirty="0"/>
+              <a:t> </a:t>
+            </a:r>
+            <a:r>
+              <a:rPr lang="fr-FR" sz="2000" dirty="0" err="1"/>
+              <a:t>only</a:t>
+            </a:r>
+            <a:r>
+              <a:rPr lang="fr-FR" sz="2000" dirty="0"/>
+              <a:t> the new Row + file </a:t>
+            </a:r>
+            <a:r>
+              <a:rPr lang="fr-FR" sz="2000" dirty="0" err="1"/>
+              <a:t>marking</a:t>
+            </a:r>
+            <a:r>
+              <a:rPr lang="fr-FR" sz="2000" dirty="0"/>
+              <a:t> the </a:t>
+            </a:r>
+            <a:r>
+              <a:rPr lang="fr-FR" sz="2000" dirty="0" err="1"/>
+              <a:t>ids</a:t>
+            </a:r>
+            <a:r>
+              <a:rPr lang="fr-FR" sz="2000" dirty="0"/>
+              <a:t> to « </a:t>
+            </a:r>
+            <a:r>
+              <a:rPr lang="fr-FR" sz="2000" dirty="0" err="1"/>
+              <a:t>delete</a:t>
+            </a:r>
+            <a:r>
+              <a:rPr lang="fr-FR" sz="2000" dirty="0"/>
+              <a:t> » (Merge on Read)</a:t>
+            </a:r>
+          </a:p>
+          <a:p>
+            <a:endParaRPr lang="fr-FR" sz="2000" dirty="0"/>
+          </a:p>
+          <a:p>
+            <a:endParaRPr lang="fr-FR" sz="2000" dirty="0"/>
+          </a:p>
+          <a:p>
+            <a:r>
+              <a:rPr lang="fr-FR" sz="2000" dirty="0"/>
+              <a:t>…. Explosions of Files </a:t>
+            </a:r>
+            <a:r>
+              <a:rPr lang="fr-FR" sz="2000" dirty="0" err="1"/>
+              <a:t>number</a:t>
+            </a:r>
+            <a:br>
+              <a:rPr lang="fr-FR" sz="2000" dirty="0"/>
+            </a:br>
+            <a:r>
+              <a:rPr lang="fr-FR" sz="2000" dirty="0"/>
+              <a:t>OR</a:t>
+            </a:r>
+          </a:p>
+          <a:p>
+            <a:r>
+              <a:rPr lang="fr-FR" sz="2000" dirty="0"/>
+              <a:t>…. Explosion of </a:t>
+            </a:r>
+            <a:r>
+              <a:rPr lang="fr-FR" sz="2000" dirty="0" err="1"/>
+              <a:t>compute</a:t>
+            </a:r>
+            <a:r>
+              <a:rPr lang="fr-FR" sz="2000" dirty="0"/>
+              <a:t> </a:t>
+            </a:r>
+            <a:r>
+              <a:rPr lang="fr-FR" sz="2000" dirty="0" err="1"/>
+              <a:t>treatments</a:t>
+            </a:r>
+            <a:r>
+              <a:rPr lang="fr-FR" sz="2000" dirty="0"/>
+              <a:t> for </a:t>
+            </a:r>
+            <a:r>
+              <a:rPr lang="fr-FR" sz="2000" dirty="0" err="1"/>
+              <a:t>read</a:t>
+            </a:r>
+            <a:endParaRPr lang="fr-FR" sz="2000" dirty="0"/>
+          </a:p>
+        </p:txBody>
+      </p:sp>
+    </p:spTree>
+    <p:extLst>
+      <p:ext uri="{BB962C8B-B14F-4D97-AF65-F5344CB8AC3E}">
+        <p14:creationId xmlns:p14="http://schemas.microsoft.com/office/powerpoint/2010/main" val="2323029373"/>
+      </p:ext>
+    </p:extLst>
+  </p:cSld>
+  <p:clrMapOvr>
+    <a:masterClrMapping/>
+  </p:clrMapOvr>
+</p:sld>
+</file>
+
+<file path=ppt/slides/slide29.xml><?xml version="1.0" encoding="utf-8"?>
+<p:sld xmlns:a="http://schemas.openxmlformats.org/drawingml/2006/main" xmlns:r="http://schemas.openxmlformats.org/officeDocument/2006/relationships" xmlns:p="http://schemas.openxmlformats.org/presentationml/2006/main">
+  <p:cSld>
+    <p:spTree>
+      <p:nvGrpSpPr>
+        <p:cNvPr id="1" name=""/>
+        <p:cNvGrpSpPr/>
+        <p:nvPr/>
+      </p:nvGrpSpPr>
+      <p:grpSpPr>
+        <a:xfrm>
+          <a:off x="0" y="0"/>
+          <a:ext cx="0" cy="0"/>
+          <a:chOff x="0" y="0"/>
+          <a:chExt cx="0" cy="0"/>
+        </a:xfrm>
+      </p:grpSpPr>
+      <p:sp>
+        <p:nvSpPr>
+          <p:cNvPr id="2" name="Titre 1">
+            <a:extLst>
+              <a:ext uri="{FF2B5EF4-FFF2-40B4-BE49-F238E27FC236}">
+                <a16:creationId xmlns:a16="http://schemas.microsoft.com/office/drawing/2014/main" id="{003D6F9F-DFFE-41AC-B457-F7AF782AEC54}"/>
+              </a:ext>
+            </a:extLst>
+          </p:cNvPr>
+          <p:cNvSpPr>
+            <a:spLocks noGrp="1"/>
+          </p:cNvSpPr>
+          <p:nvPr>
+            <p:ph type="title"/>
+          </p:nvPr>
+        </p:nvSpPr>
+        <p:spPr/>
+        <p:txBody>
+          <a:bodyPr/>
+          <a:lstStyle/>
+          <a:p>
+            <a:r>
+              <a:rPr lang="fr-FR" dirty="0"/>
+              <a:t>B-</a:t>
+            </a:r>
+            <a:r>
+              <a:rPr lang="fr-FR" dirty="0" err="1"/>
+              <a:t>Tree</a:t>
+            </a:r>
+            <a:r>
+              <a:rPr lang="fr-FR" dirty="0"/>
+              <a:t>    … Log(N)  to </a:t>
+            </a:r>
+            <a:r>
+              <a:rPr lang="fr-FR" dirty="0" err="1"/>
+              <a:t>lookup</a:t>
+            </a:r>
+            <a:r>
+              <a:rPr lang="fr-FR" dirty="0"/>
+              <a:t> a Row by ID</a:t>
+            </a:r>
+          </a:p>
+        </p:txBody>
+      </p:sp>
+      <p:pic>
+        <p:nvPicPr>
+          <p:cNvPr id="5" name="Image 4">
+            <a:extLst>
+              <a:ext uri="{FF2B5EF4-FFF2-40B4-BE49-F238E27FC236}">
+                <a16:creationId xmlns:a16="http://schemas.microsoft.com/office/drawing/2014/main" id="{5A9C2CB8-3D09-47BD-A184-F8D1448469E5}"/>
+              </a:ext>
+            </a:extLst>
+          </p:cNvPr>
+          <p:cNvPicPr>
+            <a:picLocks noChangeAspect="1"/>
+          </p:cNvPicPr>
+          <p:nvPr/>
+        </p:nvPicPr>
+        <p:blipFill>
+          <a:blip r:embed="rId2"/>
+          <a:stretch>
+            <a:fillRect/>
+          </a:stretch>
+        </p:blipFill>
+        <p:spPr>
+          <a:xfrm>
+            <a:off x="1542655" y="1890865"/>
+            <a:ext cx="9106689" cy="4686706"/>
+          </a:xfrm>
+          <a:prstGeom prst="rect">
+            <a:avLst/>
+          </a:prstGeom>
+        </p:spPr>
+      </p:pic>
+    </p:spTree>
+    <p:extLst>
+      <p:ext uri="{BB962C8B-B14F-4D97-AF65-F5344CB8AC3E}">
+        <p14:creationId xmlns:p14="http://schemas.microsoft.com/office/powerpoint/2010/main" val="317597170"/>
       </p:ext>
     </p:extLst>
   </p:cSld>
@@ -4873,6 +13379,1048 @@
     <p:extLst>
       <p:ext uri="{BB962C8B-B14F-4D97-AF65-F5344CB8AC3E}">
         <p14:creationId xmlns:p14="http://schemas.microsoft.com/office/powerpoint/2010/main" val="503863557"/>
+      </p:ext>
+    </p:extLst>
+  </p:cSld>
+  <p:clrMapOvr>
+    <a:masterClrMapping/>
+  </p:clrMapOvr>
+</p:sld>
+</file>
+
+<file path=ppt/slides/slide30.xml><?xml version="1.0" encoding="utf-8"?>
+<p:sld xmlns:a="http://schemas.openxmlformats.org/drawingml/2006/main" xmlns:r="http://schemas.openxmlformats.org/officeDocument/2006/relationships" xmlns:p="http://schemas.openxmlformats.org/presentationml/2006/main">
+  <p:cSld>
+    <p:spTree>
+      <p:nvGrpSpPr>
+        <p:cNvPr id="1" name=""/>
+        <p:cNvGrpSpPr/>
+        <p:nvPr/>
+      </p:nvGrpSpPr>
+      <p:grpSpPr>
+        <a:xfrm>
+          <a:off x="0" y="0"/>
+          <a:ext cx="0" cy="0"/>
+          <a:chOff x="0" y="0"/>
+          <a:chExt cx="0" cy="0"/>
+        </a:xfrm>
+      </p:grpSpPr>
+      <p:sp>
+        <p:nvSpPr>
+          <p:cNvPr id="2" name="Titre 1">
+            <a:extLst>
+              <a:ext uri="{FF2B5EF4-FFF2-40B4-BE49-F238E27FC236}">
+                <a16:creationId xmlns:a16="http://schemas.microsoft.com/office/drawing/2014/main" id="{AAF9354F-A856-4415-8B60-B872F988EE1C}"/>
+              </a:ext>
+            </a:extLst>
+          </p:cNvPr>
+          <p:cNvSpPr>
+            <a:spLocks noGrp="1"/>
+          </p:cNvSpPr>
+          <p:nvPr>
+            <p:ph type="title"/>
+          </p:nvPr>
+        </p:nvSpPr>
+        <p:spPr/>
+        <p:txBody>
+          <a:bodyPr>
+            <a:normAutofit fontScale="90000"/>
+          </a:bodyPr>
+          <a:lstStyle/>
+          <a:p>
+            <a:r>
+              <a:rPr lang="fr-FR" dirty="0"/>
+              <a:t>In </a:t>
+            </a:r>
+            <a:r>
+              <a:rPr lang="fr-FR" dirty="0" err="1"/>
+              <a:t>BigData</a:t>
+            </a:r>
+            <a:r>
+              <a:rPr lang="fr-FR" dirty="0"/>
+              <a:t>: No B-</a:t>
+            </a:r>
+            <a:r>
+              <a:rPr lang="fr-FR" dirty="0" err="1"/>
+              <a:t>Tree</a:t>
+            </a:r>
+            <a:r>
+              <a:rPr lang="fr-FR" dirty="0"/>
+              <a:t> files</a:t>
+            </a:r>
+            <a:br>
+              <a:rPr lang="fr-FR" dirty="0"/>
+            </a:br>
+            <a:r>
+              <a:rPr lang="fr-FR" dirty="0"/>
+              <a:t>…</a:t>
+            </a:r>
+            <a:r>
+              <a:rPr lang="fr-FR" dirty="0" err="1"/>
+              <a:t>only</a:t>
+            </a:r>
+            <a:r>
+              <a:rPr lang="fr-FR" dirty="0"/>
+              <a:t> PARQUET « </a:t>
+            </a:r>
+            <a:r>
+              <a:rPr lang="fr-FR" dirty="0" err="1"/>
+              <a:t>Splittable</a:t>
+            </a:r>
+            <a:r>
+              <a:rPr lang="fr-FR" dirty="0"/>
+              <a:t> + </a:t>
+            </a:r>
+            <a:r>
+              <a:rPr lang="fr-FR" dirty="0" err="1"/>
+              <a:t>Columnar</a:t>
+            </a:r>
+            <a:r>
+              <a:rPr lang="fr-FR" dirty="0"/>
+              <a:t> » files</a:t>
+            </a:r>
+          </a:p>
+        </p:txBody>
+      </p:sp>
+      <p:sp>
+        <p:nvSpPr>
+          <p:cNvPr id="4" name="ZoneTexte 3">
+            <a:extLst>
+              <a:ext uri="{FF2B5EF4-FFF2-40B4-BE49-F238E27FC236}">
+                <a16:creationId xmlns:a16="http://schemas.microsoft.com/office/drawing/2014/main" id="{376DC765-2B8A-49D1-9466-F3826F6CCBC7}"/>
+              </a:ext>
+            </a:extLst>
+          </p:cNvPr>
+          <p:cNvSpPr txBox="1"/>
+          <p:nvPr/>
+        </p:nvSpPr>
+        <p:spPr>
+          <a:xfrm>
+            <a:off x="1364776" y="2504364"/>
+            <a:ext cx="10329879" cy="3046988"/>
+          </a:xfrm>
+          <a:prstGeom prst="rect">
+            <a:avLst/>
+          </a:prstGeom>
+          <a:noFill/>
+        </p:spPr>
+        <p:txBody>
+          <a:bodyPr wrap="none" rtlCol="0">
+            <a:spAutoFit/>
+          </a:bodyPr>
+          <a:lstStyle/>
+          <a:p>
+            <a:r>
+              <a:rPr lang="fr-FR" sz="2400" dirty="0"/>
+              <a:t>In </a:t>
+            </a:r>
+            <a:r>
+              <a:rPr lang="fr-FR" sz="2400" dirty="0" err="1"/>
+              <a:t>BigData</a:t>
+            </a:r>
+            <a:r>
+              <a:rPr lang="fr-FR" sz="2400" dirty="0"/>
+              <a:t> … </a:t>
+            </a:r>
+            <a:r>
+              <a:rPr lang="fr-FR" sz="2400" dirty="0" err="1"/>
+              <a:t>generally</a:t>
+            </a:r>
+            <a:r>
+              <a:rPr lang="fr-FR" sz="2400" dirty="0"/>
+              <a:t> NOT a good </a:t>
+            </a:r>
+            <a:r>
+              <a:rPr lang="fr-FR" sz="2400" dirty="0" err="1"/>
+              <a:t>idea</a:t>
+            </a:r>
+            <a:r>
+              <a:rPr lang="fr-FR" sz="2400" dirty="0"/>
+              <a:t> to </a:t>
+            </a:r>
+            <a:r>
+              <a:rPr lang="fr-FR" sz="2400" dirty="0" err="1"/>
+              <a:t>keep</a:t>
+            </a:r>
+            <a:r>
+              <a:rPr lang="fr-FR" sz="2400" dirty="0"/>
+              <a:t> </a:t>
+            </a:r>
+            <a:r>
+              <a:rPr lang="fr-FR" sz="2400" dirty="0" err="1"/>
+              <a:t>petabyte</a:t>
+            </a:r>
+            <a:r>
+              <a:rPr lang="fr-FR" sz="2400" dirty="0"/>
+              <a:t> of file in RAM</a:t>
+            </a:r>
+          </a:p>
+          <a:p>
+            <a:endParaRPr lang="fr-FR" sz="2400" dirty="0"/>
+          </a:p>
+          <a:p>
+            <a:r>
+              <a:rPr lang="fr-FR" sz="2400" dirty="0"/>
+              <a:t>Not </a:t>
+            </a:r>
+            <a:r>
+              <a:rPr lang="fr-FR" sz="2400" dirty="0" err="1"/>
+              <a:t>even</a:t>
+            </a:r>
+            <a:r>
+              <a:rPr lang="fr-FR" sz="2400" dirty="0"/>
+              <a:t> Page Blocks of </a:t>
+            </a:r>
+            <a:r>
+              <a:rPr lang="fr-FR" sz="2400" dirty="0" err="1"/>
+              <a:t>these</a:t>
+            </a:r>
+            <a:r>
+              <a:rPr lang="fr-FR" sz="2400" dirty="0"/>
+              <a:t> files</a:t>
+            </a:r>
+          </a:p>
+          <a:p>
+            <a:endParaRPr lang="fr-FR" sz="2400" dirty="0"/>
+          </a:p>
+          <a:p>
+            <a:r>
+              <a:rPr lang="fr-FR" sz="2400" dirty="0"/>
+              <a:t>… B-TREE  lose </a:t>
+            </a:r>
+            <a:r>
+              <a:rPr lang="fr-FR" sz="2400" dirty="0" err="1"/>
+              <a:t>their</a:t>
+            </a:r>
+            <a:r>
+              <a:rPr lang="fr-FR" sz="2400" dirty="0"/>
+              <a:t> </a:t>
+            </a:r>
+            <a:r>
+              <a:rPr lang="fr-FR" sz="2400" dirty="0" err="1"/>
+              <a:t>interrest</a:t>
+            </a:r>
+            <a:r>
+              <a:rPr lang="fr-FR" sz="2400" dirty="0"/>
+              <a:t> if </a:t>
+            </a:r>
+            <a:r>
+              <a:rPr lang="fr-FR" sz="2400" dirty="0" err="1"/>
+              <a:t>they</a:t>
+            </a:r>
+            <a:r>
+              <a:rPr lang="fr-FR" sz="2400" dirty="0"/>
+              <a:t> are not « </a:t>
+            </a:r>
+            <a:r>
+              <a:rPr lang="fr-FR" sz="2400" dirty="0" err="1"/>
+              <a:t>cached</a:t>
+            </a:r>
+            <a:r>
+              <a:rPr lang="fr-FR" sz="2400" dirty="0"/>
+              <a:t> »,  and </a:t>
+            </a:r>
+            <a:r>
+              <a:rPr lang="fr-FR" sz="2400" dirty="0" err="1"/>
+              <a:t>access</a:t>
+            </a:r>
+            <a:r>
+              <a:rPr lang="fr-FR" sz="2400" dirty="0"/>
+              <a:t> per pages</a:t>
+            </a:r>
+          </a:p>
+          <a:p>
+            <a:endParaRPr lang="fr-FR" sz="2400" dirty="0"/>
+          </a:p>
+          <a:p>
+            <a:endParaRPr lang="fr-FR" sz="2400" dirty="0"/>
+          </a:p>
+          <a:p>
+            <a:r>
+              <a:rPr lang="fr-FR" sz="2400" dirty="0" err="1"/>
+              <a:t>Better</a:t>
+            </a:r>
+            <a:r>
+              <a:rPr lang="fr-FR" sz="2400" dirty="0"/>
+              <a:t> to </a:t>
+            </a:r>
+            <a:r>
+              <a:rPr lang="fr-FR" sz="2400" dirty="0" err="1"/>
+              <a:t>read</a:t>
+            </a:r>
+            <a:r>
+              <a:rPr lang="fr-FR" sz="2400" dirty="0"/>
+              <a:t> </a:t>
+            </a:r>
+            <a:r>
+              <a:rPr lang="fr-FR" sz="2400" dirty="0" err="1"/>
+              <a:t>compressed</a:t>
+            </a:r>
+            <a:r>
+              <a:rPr lang="fr-FR" sz="2400" dirty="0"/>
+              <a:t> files, </a:t>
+            </a:r>
+            <a:r>
+              <a:rPr lang="fr-FR" sz="2400" dirty="0" err="1"/>
+              <a:t>rather</a:t>
+            </a:r>
+            <a:r>
+              <a:rPr lang="fr-FR" sz="2400" dirty="0"/>
+              <a:t> </a:t>
+            </a:r>
+            <a:r>
+              <a:rPr lang="fr-FR" sz="2400" dirty="0" err="1"/>
+              <a:t>than</a:t>
+            </a:r>
+            <a:r>
+              <a:rPr lang="fr-FR" sz="2400" dirty="0"/>
+              <a:t> follow </a:t>
+            </a:r>
+            <a:r>
+              <a:rPr lang="fr-FR" sz="2400" dirty="0" err="1"/>
+              <a:t>binary</a:t>
+            </a:r>
+            <a:r>
+              <a:rPr lang="fr-FR" sz="2400" dirty="0"/>
+              <a:t> « pointers » </a:t>
+            </a:r>
+            <a:r>
+              <a:rPr lang="fr-FR" sz="2400" dirty="0" err="1"/>
+              <a:t>within</a:t>
+            </a:r>
+            <a:r>
+              <a:rPr lang="fr-FR" sz="2400" dirty="0"/>
+              <a:t> files</a:t>
+            </a:r>
+          </a:p>
+        </p:txBody>
+      </p:sp>
+    </p:spTree>
+    <p:extLst>
+      <p:ext uri="{BB962C8B-B14F-4D97-AF65-F5344CB8AC3E}">
+        <p14:creationId xmlns:p14="http://schemas.microsoft.com/office/powerpoint/2010/main" val="1208994741"/>
+      </p:ext>
+    </p:extLst>
+  </p:cSld>
+  <p:clrMapOvr>
+    <a:masterClrMapping/>
+  </p:clrMapOvr>
+</p:sld>
+</file>
+
+<file path=ppt/slides/slide31.xml><?xml version="1.0" encoding="utf-8"?>
+<p:sld xmlns:a="http://schemas.openxmlformats.org/drawingml/2006/main" xmlns:r="http://schemas.openxmlformats.org/officeDocument/2006/relationships" xmlns:p="http://schemas.openxmlformats.org/presentationml/2006/main">
+  <p:cSld>
+    <p:spTree>
+      <p:nvGrpSpPr>
+        <p:cNvPr id="1" name=""/>
+        <p:cNvGrpSpPr/>
+        <p:nvPr/>
+      </p:nvGrpSpPr>
+      <p:grpSpPr>
+        <a:xfrm>
+          <a:off x="0" y="0"/>
+          <a:ext cx="0" cy="0"/>
+          <a:chOff x="0" y="0"/>
+          <a:chExt cx="0" cy="0"/>
+        </a:xfrm>
+      </p:grpSpPr>
+      <p:sp>
+        <p:nvSpPr>
+          <p:cNvPr id="2" name="Titre 1">
+            <a:extLst>
+              <a:ext uri="{FF2B5EF4-FFF2-40B4-BE49-F238E27FC236}">
+                <a16:creationId xmlns:a16="http://schemas.microsoft.com/office/drawing/2014/main" id="{939A8CA1-3F41-473F-87BA-8291F24F5CFD}"/>
+              </a:ext>
+            </a:extLst>
+          </p:cNvPr>
+          <p:cNvSpPr>
+            <a:spLocks noGrp="1"/>
+          </p:cNvSpPr>
+          <p:nvPr>
+            <p:ph type="title"/>
+          </p:nvPr>
+        </p:nvSpPr>
+        <p:spPr>
+          <a:xfrm>
+            <a:off x="838200" y="365125"/>
+            <a:ext cx="10515600" cy="1729806"/>
+          </a:xfrm>
+        </p:spPr>
+        <p:txBody>
+          <a:bodyPr>
+            <a:normAutofit fontScale="90000"/>
+          </a:bodyPr>
+          <a:lstStyle/>
+          <a:p>
+            <a:r>
+              <a:rPr lang="fr-FR" dirty="0"/>
+              <a:t>B-TREE  =&gt; efficient </a:t>
+            </a:r>
+            <a:br>
+              <a:rPr lang="fr-FR" dirty="0"/>
+            </a:br>
+            <a:r>
+              <a:rPr lang="fr-FR" dirty="0"/>
+              <a:t>(IF-AND-ONLY-IF  </a:t>
+            </a:r>
+            <a:r>
+              <a:rPr lang="fr-FR" dirty="0" err="1"/>
+              <a:t>mostly</a:t>
+            </a:r>
+            <a:r>
+              <a:rPr lang="fr-FR" dirty="0"/>
+              <a:t> </a:t>
+            </a:r>
+            <a:r>
+              <a:rPr lang="fr-FR" dirty="0" err="1"/>
+              <a:t>cached</a:t>
+            </a:r>
+            <a:r>
+              <a:rPr lang="fr-FR" dirty="0"/>
+              <a:t> in memory)  </a:t>
+            </a:r>
+            <a:br>
+              <a:rPr lang="fr-FR" dirty="0"/>
+            </a:br>
+            <a:r>
+              <a:rPr lang="fr-FR" dirty="0" err="1"/>
+              <a:t>lookup</a:t>
+            </a:r>
+            <a:r>
+              <a:rPr lang="fr-FR" dirty="0"/>
+              <a:t> Row by ID   :  log(N)</a:t>
+            </a:r>
+          </a:p>
+        </p:txBody>
+      </p:sp>
+      <p:pic>
+        <p:nvPicPr>
+          <p:cNvPr id="1026" name="Picture 2" descr="Using External Searching &amp; B-Trees in ...">
+            <a:extLst>
+              <a:ext uri="{FF2B5EF4-FFF2-40B4-BE49-F238E27FC236}">
+                <a16:creationId xmlns:a16="http://schemas.microsoft.com/office/drawing/2014/main" id="{0098F4D7-29CD-4EEC-8E84-CFBF5ECF11A6}"/>
+              </a:ext>
+            </a:extLst>
+          </p:cNvPr>
+          <p:cNvPicPr>
+            <a:picLocks noChangeAspect="1" noChangeArrowheads="1"/>
+          </p:cNvPicPr>
+          <p:nvPr/>
+        </p:nvPicPr>
+        <p:blipFill>
+          <a:blip r:embed="rId2">
+            <a:extLst>
+              <a:ext uri="{28A0092B-C50C-407E-A947-70E740481C1C}">
+                <a14:useLocalDpi xmlns:a14="http://schemas.microsoft.com/office/drawing/2010/main" val="0"/>
+              </a:ext>
+            </a:extLst>
+          </a:blip>
+          <a:srcRect/>
+          <a:stretch>
+            <a:fillRect/>
+          </a:stretch>
+        </p:blipFill>
+        <p:spPr bwMode="auto">
+          <a:xfrm>
+            <a:off x="4101154" y="2589308"/>
+            <a:ext cx="4322028" cy="3954196"/>
+          </a:xfrm>
+          <a:prstGeom prst="rect">
+            <a:avLst/>
+          </a:prstGeom>
+          <a:noFill/>
+          <a:extLst>
+            <a:ext uri="{909E8E84-426E-40DD-AFC4-6F175D3DCCD1}">
+              <a14:hiddenFill xmlns:a14="http://schemas.microsoft.com/office/drawing/2010/main">
+                <a:solidFill>
+                  <a:srgbClr val="FFFFFF"/>
+                </a:solidFill>
+              </a14:hiddenFill>
+            </a:ext>
+          </a:extLst>
+        </p:spPr>
+      </p:pic>
+    </p:spTree>
+    <p:extLst>
+      <p:ext uri="{BB962C8B-B14F-4D97-AF65-F5344CB8AC3E}">
+        <p14:creationId xmlns:p14="http://schemas.microsoft.com/office/powerpoint/2010/main" val="2140506363"/>
+      </p:ext>
+    </p:extLst>
+  </p:cSld>
+  <p:clrMapOvr>
+    <a:masterClrMapping/>
+  </p:clrMapOvr>
+</p:sld>
+</file>
+
+<file path=ppt/slides/slide32.xml><?xml version="1.0" encoding="utf-8"?>
+<p:sld xmlns:a="http://schemas.openxmlformats.org/drawingml/2006/main" xmlns:r="http://schemas.openxmlformats.org/officeDocument/2006/relationships" xmlns:p="http://schemas.openxmlformats.org/presentationml/2006/main">
+  <p:cSld>
+    <p:spTree>
+      <p:nvGrpSpPr>
+        <p:cNvPr id="1" name=""/>
+        <p:cNvGrpSpPr/>
+        <p:nvPr/>
+      </p:nvGrpSpPr>
+      <p:grpSpPr>
+        <a:xfrm>
+          <a:off x="0" y="0"/>
+          <a:ext cx="0" cy="0"/>
+          <a:chOff x="0" y="0"/>
+          <a:chExt cx="0" cy="0"/>
+        </a:xfrm>
+      </p:grpSpPr>
+      <p:sp>
+        <p:nvSpPr>
+          <p:cNvPr id="2" name="Titre 1">
+            <a:extLst>
+              <a:ext uri="{FF2B5EF4-FFF2-40B4-BE49-F238E27FC236}">
+                <a16:creationId xmlns:a16="http://schemas.microsoft.com/office/drawing/2014/main" id="{281C8E9C-E22B-40C2-ACFF-3399C8345572}"/>
+              </a:ext>
+            </a:extLst>
+          </p:cNvPr>
+          <p:cNvSpPr>
+            <a:spLocks noGrp="1"/>
+          </p:cNvSpPr>
+          <p:nvPr>
+            <p:ph type="title"/>
+          </p:nvPr>
+        </p:nvSpPr>
+        <p:spPr/>
+        <p:txBody>
+          <a:bodyPr/>
+          <a:lstStyle/>
+          <a:p>
+            <a:r>
+              <a:rPr lang="fr-FR" dirty="0"/>
+              <a:t>B-TREE :  Efficient to do « Index Range Scan »</a:t>
+            </a:r>
+          </a:p>
+        </p:txBody>
+      </p:sp>
+      <p:pic>
+        <p:nvPicPr>
+          <p:cNvPr id="2050" name="Picture 2" descr="B-Tree vs. Hash Indexing ...">
+            <a:extLst>
+              <a:ext uri="{FF2B5EF4-FFF2-40B4-BE49-F238E27FC236}">
+                <a16:creationId xmlns:a16="http://schemas.microsoft.com/office/drawing/2014/main" id="{AD05F64B-A954-4883-B613-8FC507ADF9F8}"/>
+              </a:ext>
+            </a:extLst>
+          </p:cNvPr>
+          <p:cNvPicPr>
+            <a:picLocks noChangeAspect="1" noChangeArrowheads="1"/>
+          </p:cNvPicPr>
+          <p:nvPr/>
+        </p:nvPicPr>
+        <p:blipFill>
+          <a:blip r:embed="rId2">
+            <a:extLst>
+              <a:ext uri="{28A0092B-C50C-407E-A947-70E740481C1C}">
+                <a14:useLocalDpi xmlns:a14="http://schemas.microsoft.com/office/drawing/2010/main" val="0"/>
+              </a:ext>
+            </a:extLst>
+          </a:blip>
+          <a:srcRect/>
+          <a:stretch>
+            <a:fillRect/>
+          </a:stretch>
+        </p:blipFill>
+        <p:spPr bwMode="auto">
+          <a:xfrm>
+            <a:off x="2645106" y="2445792"/>
+            <a:ext cx="6060040" cy="2774476"/>
+          </a:xfrm>
+          <a:prstGeom prst="rect">
+            <a:avLst/>
+          </a:prstGeom>
+          <a:noFill/>
+          <a:extLst>
+            <a:ext uri="{909E8E84-426E-40DD-AFC4-6F175D3DCCD1}">
+              <a14:hiddenFill xmlns:a14="http://schemas.microsoft.com/office/drawing/2010/main">
+                <a:solidFill>
+                  <a:srgbClr val="FFFFFF"/>
+                </a:solidFill>
+              </a14:hiddenFill>
+            </a:ext>
+          </a:extLst>
+        </p:spPr>
+      </p:pic>
+    </p:spTree>
+    <p:extLst>
+      <p:ext uri="{BB962C8B-B14F-4D97-AF65-F5344CB8AC3E}">
+        <p14:creationId xmlns:p14="http://schemas.microsoft.com/office/powerpoint/2010/main" val="485976162"/>
+      </p:ext>
+    </p:extLst>
+  </p:cSld>
+  <p:clrMapOvr>
+    <a:masterClrMapping/>
+  </p:clrMapOvr>
+</p:sld>
+</file>
+
+<file path=ppt/slides/slide33.xml><?xml version="1.0" encoding="utf-8"?>
+<p:sld xmlns:a="http://schemas.openxmlformats.org/drawingml/2006/main" xmlns:r="http://schemas.openxmlformats.org/officeDocument/2006/relationships" xmlns:p="http://schemas.openxmlformats.org/presentationml/2006/main">
+  <p:cSld>
+    <p:spTree>
+      <p:nvGrpSpPr>
+        <p:cNvPr id="1" name=""/>
+        <p:cNvGrpSpPr/>
+        <p:nvPr/>
+      </p:nvGrpSpPr>
+      <p:grpSpPr>
+        <a:xfrm>
+          <a:off x="0" y="0"/>
+          <a:ext cx="0" cy="0"/>
+          <a:chOff x="0" y="0"/>
+          <a:chExt cx="0" cy="0"/>
+        </a:xfrm>
+      </p:grpSpPr>
+      <p:sp>
+        <p:nvSpPr>
+          <p:cNvPr id="2" name="Titre 1">
+            <a:extLst>
+              <a:ext uri="{FF2B5EF4-FFF2-40B4-BE49-F238E27FC236}">
+                <a16:creationId xmlns:a16="http://schemas.microsoft.com/office/drawing/2014/main" id="{47800ADD-0814-4A39-8299-E3AA08EF6054}"/>
+              </a:ext>
+            </a:extLst>
+          </p:cNvPr>
+          <p:cNvSpPr>
+            <a:spLocks noGrp="1"/>
+          </p:cNvSpPr>
+          <p:nvPr>
+            <p:ph type="title"/>
+          </p:nvPr>
+        </p:nvSpPr>
+        <p:spPr/>
+        <p:txBody>
+          <a:bodyPr/>
+          <a:lstStyle/>
+          <a:p>
+            <a:r>
+              <a:rPr lang="fr-FR" dirty="0"/>
+              <a:t>No B-</a:t>
+            </a:r>
+            <a:r>
+              <a:rPr lang="fr-FR" dirty="0" err="1"/>
+              <a:t>Tree</a:t>
+            </a:r>
+            <a:r>
+              <a:rPr lang="fr-FR" dirty="0"/>
+              <a:t>  =&gt; ..</a:t>
+            </a:r>
+          </a:p>
+        </p:txBody>
+      </p:sp>
+      <p:sp>
+        <p:nvSpPr>
+          <p:cNvPr id="4" name="ZoneTexte 3">
+            <a:extLst>
+              <a:ext uri="{FF2B5EF4-FFF2-40B4-BE49-F238E27FC236}">
+                <a16:creationId xmlns:a16="http://schemas.microsoft.com/office/drawing/2014/main" id="{9640C9ED-A8F8-4D23-BF33-5ABE6FF51070}"/>
+              </a:ext>
+            </a:extLst>
+          </p:cNvPr>
+          <p:cNvSpPr txBox="1"/>
+          <p:nvPr/>
+        </p:nvSpPr>
+        <p:spPr>
+          <a:xfrm>
+            <a:off x="1084998" y="2531660"/>
+            <a:ext cx="9703558" cy="2246769"/>
+          </a:xfrm>
+          <a:prstGeom prst="rect">
+            <a:avLst/>
+          </a:prstGeom>
+          <a:noFill/>
+        </p:spPr>
+        <p:txBody>
+          <a:bodyPr wrap="square" rtlCol="0">
+            <a:spAutoFit/>
+          </a:bodyPr>
+          <a:lstStyle/>
+          <a:p>
+            <a:r>
+              <a:rPr lang="fr-FR" sz="2800" dirty="0"/>
+              <a:t>No </a:t>
+            </a:r>
+            <a:r>
+              <a:rPr lang="fr-FR" sz="2800" dirty="0" err="1"/>
+              <a:t>PrimaryKey</a:t>
+            </a:r>
+            <a:r>
+              <a:rPr lang="fr-FR" sz="2800" dirty="0"/>
+              <a:t>  Index   </a:t>
+            </a:r>
+            <a:r>
+              <a:rPr lang="fr-FR" sz="2800" dirty="0" err="1"/>
+              <a:t>constraint</a:t>
+            </a:r>
+            <a:endParaRPr lang="fr-FR" sz="2800" dirty="0"/>
+          </a:p>
+          <a:p>
+            <a:endParaRPr lang="fr-FR" sz="2800" dirty="0"/>
+          </a:p>
+          <a:p>
+            <a:r>
+              <a:rPr lang="fr-FR" sz="2800" dirty="0"/>
+              <a:t>No </a:t>
+            </a:r>
+            <a:r>
+              <a:rPr lang="fr-FR" sz="2800" dirty="0" err="1"/>
+              <a:t>Unicity</a:t>
+            </a:r>
+            <a:r>
+              <a:rPr lang="fr-FR" sz="2800" dirty="0"/>
+              <a:t> </a:t>
+            </a:r>
+            <a:r>
+              <a:rPr lang="fr-FR" sz="2800" dirty="0" err="1"/>
+              <a:t>constraint</a:t>
+            </a:r>
+            <a:endParaRPr lang="fr-FR" sz="2800" dirty="0"/>
+          </a:p>
+          <a:p>
+            <a:endParaRPr lang="fr-FR" sz="2800" dirty="0"/>
+          </a:p>
+          <a:p>
+            <a:r>
+              <a:rPr lang="fr-FR" sz="2800" dirty="0"/>
+              <a:t>No </a:t>
+            </a:r>
+            <a:r>
+              <a:rPr lang="fr-FR" sz="2800" dirty="0" err="1"/>
+              <a:t>Execution</a:t>
+            </a:r>
+            <a:r>
+              <a:rPr lang="fr-FR" sz="2800" dirty="0"/>
+              <a:t> Plan </a:t>
+            </a:r>
+            <a:r>
+              <a:rPr lang="fr-FR" sz="2800" dirty="0" err="1"/>
+              <a:t>with</a:t>
+            </a:r>
+            <a:r>
+              <a:rPr lang="fr-FR" sz="2800" dirty="0"/>
+              <a:t> « Index-</a:t>
+            </a:r>
+            <a:r>
+              <a:rPr lang="fr-FR" sz="2800" dirty="0" err="1"/>
+              <a:t>Lookup</a:t>
+            </a:r>
+            <a:r>
+              <a:rPr lang="fr-FR" sz="2800" dirty="0"/>
+              <a:t>-by-Key » / « Index-Scan »</a:t>
+            </a:r>
+          </a:p>
+        </p:txBody>
+      </p:sp>
+    </p:spTree>
+    <p:extLst>
+      <p:ext uri="{BB962C8B-B14F-4D97-AF65-F5344CB8AC3E}">
+        <p14:creationId xmlns:p14="http://schemas.microsoft.com/office/powerpoint/2010/main" val="2585836745"/>
+      </p:ext>
+    </p:extLst>
+  </p:cSld>
+  <p:clrMapOvr>
+    <a:masterClrMapping/>
+  </p:clrMapOvr>
+</p:sld>
+</file>
+
+<file path=ppt/slides/slide34.xml><?xml version="1.0" encoding="utf-8"?>
+<p:sld xmlns:a="http://schemas.openxmlformats.org/drawingml/2006/main" xmlns:r="http://schemas.openxmlformats.org/officeDocument/2006/relationships" xmlns:p="http://schemas.openxmlformats.org/presentationml/2006/main">
+  <p:cSld>
+    <p:spTree>
+      <p:nvGrpSpPr>
+        <p:cNvPr id="1" name=""/>
+        <p:cNvGrpSpPr/>
+        <p:nvPr/>
+      </p:nvGrpSpPr>
+      <p:grpSpPr>
+        <a:xfrm>
+          <a:off x="0" y="0"/>
+          <a:ext cx="0" cy="0"/>
+          <a:chOff x="0" y="0"/>
+          <a:chExt cx="0" cy="0"/>
+        </a:xfrm>
+      </p:grpSpPr>
+      <p:sp>
+        <p:nvSpPr>
+          <p:cNvPr id="2" name="Titre 1">
+            <a:extLst>
+              <a:ext uri="{FF2B5EF4-FFF2-40B4-BE49-F238E27FC236}">
+                <a16:creationId xmlns:a16="http://schemas.microsoft.com/office/drawing/2014/main" id="{C96D38A3-4E21-4AA8-BBC8-4D8A94399D36}"/>
+              </a:ext>
+            </a:extLst>
+          </p:cNvPr>
+          <p:cNvSpPr>
+            <a:spLocks noGrp="1"/>
+          </p:cNvSpPr>
+          <p:nvPr>
+            <p:ph type="title"/>
+          </p:nvPr>
+        </p:nvSpPr>
+        <p:spPr/>
+        <p:txBody>
+          <a:bodyPr/>
+          <a:lstStyle/>
+          <a:p>
+            <a:r>
+              <a:rPr lang="fr-FR" dirty="0"/>
+              <a:t>In </a:t>
+            </a:r>
+            <a:r>
+              <a:rPr lang="fr-FR" dirty="0" err="1"/>
+              <a:t>BigData</a:t>
+            </a:r>
+            <a:r>
+              <a:rPr lang="fr-FR" dirty="0"/>
+              <a:t> …  </a:t>
+            </a:r>
+            <a:r>
+              <a:rPr lang="fr-FR" dirty="0" err="1"/>
+              <a:t>prefer</a:t>
+            </a:r>
+            <a:r>
+              <a:rPr lang="fr-FR" dirty="0"/>
+              <a:t> </a:t>
+            </a:r>
+            <a:r>
+              <a:rPr lang="fr-FR" dirty="0" err="1"/>
+              <a:t>Parallelizing</a:t>
+            </a:r>
+            <a:r>
+              <a:rPr lang="fr-FR" dirty="0"/>
+              <a:t> Full Scan, </a:t>
+            </a:r>
+            <a:br>
+              <a:rPr lang="fr-FR" dirty="0"/>
+            </a:br>
+            <a:r>
+              <a:rPr lang="fr-FR" dirty="0"/>
+              <a:t>or </a:t>
+            </a:r>
+            <a:r>
+              <a:rPr lang="fr-FR" dirty="0" err="1"/>
+              <a:t>Parallelizing</a:t>
+            </a:r>
+            <a:r>
+              <a:rPr lang="fr-FR" dirty="0"/>
+              <a:t> </a:t>
+            </a:r>
+            <a:r>
+              <a:rPr lang="fr-FR" dirty="0" err="1"/>
+              <a:t>Optimized</a:t>
+            </a:r>
+            <a:r>
+              <a:rPr lang="fr-FR" dirty="0"/>
+              <a:t>/Partial Scans</a:t>
+            </a:r>
+          </a:p>
+        </p:txBody>
+      </p:sp>
+      <p:sp>
+        <p:nvSpPr>
+          <p:cNvPr id="4" name="ZoneTexte 3">
+            <a:extLst>
+              <a:ext uri="{FF2B5EF4-FFF2-40B4-BE49-F238E27FC236}">
+                <a16:creationId xmlns:a16="http://schemas.microsoft.com/office/drawing/2014/main" id="{8922BF93-74CF-4B1D-B4F2-8BA9C99F4986}"/>
+              </a:ext>
+            </a:extLst>
+          </p:cNvPr>
+          <p:cNvSpPr txBox="1"/>
+          <p:nvPr/>
+        </p:nvSpPr>
+        <p:spPr>
+          <a:xfrm>
+            <a:off x="3910084" y="2695433"/>
+            <a:ext cx="4838312" cy="3046988"/>
+          </a:xfrm>
+          <a:prstGeom prst="rect">
+            <a:avLst/>
+          </a:prstGeom>
+          <a:noFill/>
+        </p:spPr>
+        <p:txBody>
+          <a:bodyPr wrap="none" rtlCol="0">
+            <a:spAutoFit/>
+          </a:bodyPr>
+          <a:lstStyle/>
+          <a:p>
+            <a:r>
+              <a:rPr lang="fr-FR" sz="2400" dirty="0"/>
+              <a:t>Cf Course on  Parquet  </a:t>
+            </a:r>
+            <a:r>
+              <a:rPr lang="fr-FR" sz="2400" dirty="0" err="1"/>
+              <a:t>Optimizations</a:t>
+            </a:r>
+            <a:r>
+              <a:rPr lang="fr-FR" sz="2400" dirty="0"/>
+              <a:t>:</a:t>
+            </a:r>
+          </a:p>
+          <a:p>
+            <a:endParaRPr lang="fr-FR" sz="2400" dirty="0"/>
+          </a:p>
+          <a:p>
+            <a:r>
+              <a:rPr lang="fr-FR" sz="2400" dirty="0"/>
+              <a:t>1/ Partition </a:t>
+            </a:r>
+            <a:r>
+              <a:rPr lang="fr-FR" sz="2400" dirty="0" err="1"/>
+              <a:t>Pruning</a:t>
+            </a:r>
+            <a:endParaRPr lang="fr-FR" sz="2400" dirty="0"/>
+          </a:p>
+          <a:p>
+            <a:r>
+              <a:rPr lang="fr-FR" sz="2400" dirty="0"/>
+              <a:t>2/ </a:t>
+            </a:r>
+            <a:r>
+              <a:rPr lang="fr-FR" sz="2400" dirty="0" err="1"/>
+              <a:t>Column</a:t>
+            </a:r>
+            <a:r>
+              <a:rPr lang="fr-FR" sz="2400" dirty="0"/>
+              <a:t> </a:t>
+            </a:r>
+            <a:r>
+              <a:rPr lang="fr-FR" sz="2400" dirty="0" err="1"/>
+              <a:t>Pruning</a:t>
+            </a:r>
+            <a:endParaRPr lang="fr-FR" sz="2400" dirty="0"/>
+          </a:p>
+          <a:p>
+            <a:r>
+              <a:rPr lang="fr-FR" sz="2400" dirty="0"/>
+              <a:t>3/ </a:t>
+            </a:r>
+            <a:r>
+              <a:rPr lang="fr-FR" sz="2400" dirty="0" err="1"/>
+              <a:t>Predicate</a:t>
+            </a:r>
+            <a:r>
+              <a:rPr lang="fr-FR" sz="2400" dirty="0"/>
+              <a:t> Push Down</a:t>
+            </a:r>
+          </a:p>
+          <a:p>
+            <a:r>
+              <a:rPr lang="fr-FR" sz="2400" dirty="0"/>
+              <a:t>4/ </a:t>
+            </a:r>
+            <a:r>
+              <a:rPr lang="fr-FR" sz="2400" dirty="0" err="1"/>
+              <a:t>Using</a:t>
+            </a:r>
+            <a:r>
+              <a:rPr lang="fr-FR" sz="2400" dirty="0"/>
+              <a:t> </a:t>
+            </a:r>
+            <a:r>
+              <a:rPr lang="fr-FR" sz="2400" dirty="0" err="1"/>
+              <a:t>Statistics</a:t>
+            </a:r>
+            <a:r>
+              <a:rPr lang="fr-FR" sz="2400" dirty="0"/>
+              <a:t> ..</a:t>
+            </a:r>
+          </a:p>
+          <a:p>
+            <a:r>
+              <a:rPr lang="fr-FR" sz="2400" dirty="0"/>
+              <a:t>5/ </a:t>
+            </a:r>
+            <a:r>
+              <a:rPr lang="fr-FR" sz="2400" dirty="0" err="1"/>
+              <a:t>Using</a:t>
+            </a:r>
+            <a:r>
+              <a:rPr lang="fr-FR" sz="2400" dirty="0"/>
+              <a:t> Bloom </a:t>
+            </a:r>
+            <a:r>
+              <a:rPr lang="fr-FR" sz="2400" dirty="0" err="1"/>
+              <a:t>Filters</a:t>
+            </a:r>
+            <a:endParaRPr lang="fr-FR" sz="2400" dirty="0"/>
+          </a:p>
+          <a:p>
+            <a:endParaRPr lang="fr-FR" sz="2400" dirty="0"/>
+          </a:p>
+        </p:txBody>
+      </p:sp>
+    </p:spTree>
+    <p:extLst>
+      <p:ext uri="{BB962C8B-B14F-4D97-AF65-F5344CB8AC3E}">
+        <p14:creationId xmlns:p14="http://schemas.microsoft.com/office/powerpoint/2010/main" val="1560226221"/>
+      </p:ext>
+    </p:extLst>
+  </p:cSld>
+  <p:clrMapOvr>
+    <a:masterClrMapping/>
+  </p:clrMapOvr>
+</p:sld>
+</file>
+
+<file path=ppt/slides/slide35.xml><?xml version="1.0" encoding="utf-8"?>
+<p:sld xmlns:a="http://schemas.openxmlformats.org/drawingml/2006/main" xmlns:r="http://schemas.openxmlformats.org/officeDocument/2006/relationships" xmlns:p="http://schemas.openxmlformats.org/presentationml/2006/main">
+  <p:cSld>
+    <p:spTree>
+      <p:nvGrpSpPr>
+        <p:cNvPr id="1" name=""/>
+        <p:cNvGrpSpPr/>
+        <p:nvPr/>
+      </p:nvGrpSpPr>
+      <p:grpSpPr>
+        <a:xfrm>
+          <a:off x="0" y="0"/>
+          <a:ext cx="0" cy="0"/>
+          <a:chOff x="0" y="0"/>
+          <a:chExt cx="0" cy="0"/>
+        </a:xfrm>
+      </p:grpSpPr>
+      <p:sp>
+        <p:nvSpPr>
+          <p:cNvPr id="2" name="Titre 1">
+            <a:extLst>
+              <a:ext uri="{FF2B5EF4-FFF2-40B4-BE49-F238E27FC236}">
+                <a16:creationId xmlns:a16="http://schemas.microsoft.com/office/drawing/2014/main" id="{E69E073C-F8DF-4826-A693-88CB65069F4B}"/>
+              </a:ext>
+            </a:extLst>
+          </p:cNvPr>
+          <p:cNvSpPr>
+            <a:spLocks noGrp="1"/>
+          </p:cNvSpPr>
+          <p:nvPr>
+            <p:ph type="title"/>
+          </p:nvPr>
+        </p:nvSpPr>
+        <p:spPr>
+          <a:xfrm>
+            <a:off x="1481138" y="2732088"/>
+            <a:ext cx="10515600" cy="1325563"/>
+          </a:xfrm>
+        </p:spPr>
+        <p:txBody>
+          <a:bodyPr/>
+          <a:lstStyle/>
+          <a:p>
+            <a:r>
+              <a:rPr lang="fr-FR" dirty="0"/>
+              <a:t>TODO - WORK IN PROGRESS…</a:t>
+            </a:r>
+          </a:p>
+        </p:txBody>
+      </p:sp>
+    </p:spTree>
+    <p:extLst>
+      <p:ext uri="{BB962C8B-B14F-4D97-AF65-F5344CB8AC3E}">
+        <p14:creationId xmlns:p14="http://schemas.microsoft.com/office/powerpoint/2010/main" val="3866724078"/>
       </p:ext>
     </p:extLst>
   </p:cSld>
